--- a/Planning docs/Slides/lesson-12-1-teacher-slides.pptx
+++ b/Planning docs/Slides/lesson-12-1-teacher-slides.pptx
@@ -21,9 +21,12 @@
     <p:sldId id="269" r:id="rId15"/>
     <p:sldId id="270" r:id="rId16"/>
     <p:sldId id="271" r:id="rId17"/>
+    <p:sldId id="272" r:id="rId18"/>
+    <p:sldId id="273" r:id="rId19"/>
+    <p:sldId id="274" r:id="rId20"/>
   </p:sldIdLst>
   <p:notesMasterIdLst>
-    <p:notesMasterId r:id="rId18"/>
+    <p:notesMasterId r:id="rId21"/>
   </p:notesMasterIdLst>
   <p:sldSz cx="9144000" cy="5143500"/>
   <p:notesSz cx="5143500" cy="9144000"/>
@@ -605,7 +608,7 @@
           <a:p>
             <a:r>
               <a:rPr lang="en-US" dirty="0"/>
-              <a:t>Each word appears in the chapters read this week, in the author’s own sentence.</a:t>
+              <a:t>Break the word into base + word part. Ask what the part adds to the meaning.</a:t>
             </a:r>
             <a:endParaRPr lang="en-US" dirty="0"/>
           </a:p>
@@ -693,7 +696,7 @@
           <a:p>
             <a:r>
               <a:rPr lang="en-US" dirty="0"/>
-              <a:t>Answers: basket,”, said,, hungry,”, said,</a:t>
+              <a:t>Each word appears in the chapters read this week, in the author’s own sentence.</a:t>
             </a:r>
             <a:endParaRPr lang="en-US" dirty="0"/>
           </a:p>
@@ -781,7 +784,10 @@
           <a:p>
             <a:r>
               <a:rPr lang="en-US" dirty="0"/>
-              <a:t>Answers: basket,”, said,, hungry,”, said,</a:t>
+              <a:t>Let students talk through the questions before revealing the pattern.
+When a character speaks, the words they say go inside quotation marks. A comma separates the spoken words from the tag that says who spoke — and that comma goes inside the closing quotation mark.
+The comma sits inside the quotation marks, and said is not capitalized.
+When the tag comes first, the comma goes after it and the spoken words start with a capital.</a:t>
             </a:r>
             <a:endParaRPr lang="en-US" dirty="0"/>
           </a:p>
@@ -869,7 +875,10 @@
           <a:p>
             <a:r>
               <a:rPr lang="en-US" dirty="0"/>
-              <a:t>Plural (more than one): mice, spoons, rats, candles | Possessive (belongs to): mice's, mouse's, king's, princess's</a:t>
+              <a:t>Let students talk through the questions before revealing the pattern.
+When a character speaks, the words they say go inside quotation marks. A comma separates the spoken words from the tag that says who spoke — and that comma goes inside the closing quotation mark.
+The comma sits inside the quotation marks, and said is not capitalized.
+When the tag comes first, the comma goes after it and the spoken words start with a capital.</a:t>
             </a:r>
             <a:endParaRPr lang="en-US" dirty="0"/>
           </a:p>
@@ -957,7 +966,7 @@
           <a:p>
             <a:r>
               <a:rPr lang="en-US" dirty="0"/>
-              <a:t>Plural (more than one): mice, spoons, rats, candles | Possessive (belongs to): mice's, mouse's, king's, princess's</a:t>
+              <a:t>Group 1: “Carry the basket,” said Roscuro., Mig said, “I want to be a princess.”, “I am hungry,” the prince said., Cook said, “That is soup.” | Group 2: “Carry the basket” said Roscuro., Mig said “I want to be a princess.”, “I am hungry” the prince said., Cook said, “that is soup.”</a:t>
             </a:r>
             <a:endParaRPr lang="en-US" dirty="0"/>
           </a:p>
@@ -1045,7 +1054,7 @@
           <a:p>
             <a:r>
               <a:rPr lang="en-US" dirty="0"/>
-              <a:t>Read the chapters, then return to the pause questions.</a:t>
+              <a:t>Group 1: “Carry the basket,” said Roscuro., Mig said, “I want to be a princess.”, “I am hungry,” the prince said., Cook said, “That is soup.” | Group 2: “Carry the basket” said Roscuro., Mig said “I want to be a princess.”, “I am hungry” the prince said., Cook said, “that is soup.”</a:t>
             </a:r>
             <a:endParaRPr lang="en-US" dirty="0"/>
           </a:p>
@@ -1133,7 +1142,7 @@
           <a:p>
             <a:r>
               <a:rPr lang="en-US" dirty="0"/>
-              <a:t>Writer’s Workshop stage for the week.</a:t>
+              <a:t>Base + two endings: hopelessness, thoughtfulness, fearlessly, impatiently | Base + one ending: darkness, hopeful, quickly, disagree</a:t>
             </a:r>
             <a:endParaRPr lang="en-US" dirty="0"/>
           </a:p>
@@ -1157,6 +1166,270 @@
             <a:fld id="{F7021451-1387-4CA6-816F-3879F97B5CBC}" type="slidenum">
               <a:rPr lang="en-US"/>
               <a:t>16</a:t>
+            </a:fld>
+            <a:endParaRPr lang="en-US"/>
+          </a:p>
+        </p:txBody>
+      </p:sp>
+    </p:spTree>
+    <p:extLst>
+      <p:ext uri="{BB962C8B-B14F-4D97-AF65-F5344CB8AC3E}">
+        <p14:creationId xmlns:p14="http://schemas.microsoft.com/office/powerpoint/2010/main" val="1024086991"/>
+      </p:ext>
+    </p:extLst>
+  </p:cSld>
+  <p:clrMapOvr>
+    <a:masterClrMapping/>
+  </p:clrMapOvr>
+</p:notes>
+</file>
+
+<file path=ppt/notesSlides/notesSlide17.xml><?xml version="1.0" encoding="utf-8"?>
+<p:notes xmlns:a="http://schemas.openxmlformats.org/drawingml/2006/main" xmlns:r="http://schemas.openxmlformats.org/officeDocument/2006/relationships" xmlns:p="http://schemas.openxmlformats.org/presentationml/2006/main">
+  <p:cSld>
+    <p:spTree>
+      <p:nvGrpSpPr>
+        <p:cNvPr id="1" name=""/>
+        <p:cNvGrpSpPr/>
+        <p:nvPr/>
+      </p:nvGrpSpPr>
+      <p:grpSpPr>
+        <a:xfrm>
+          <a:off x="0" y="0"/>
+          <a:ext cx="0" cy="0"/>
+          <a:chOff x="0" y="0"/>
+          <a:chExt cx="0" cy="0"/>
+        </a:xfrm>
+      </p:grpSpPr>
+      <p:sp>
+        <p:nvSpPr>
+          <p:cNvPr id="2" name="Slide Image Placeholder 1"/>
+          <p:cNvSpPr>
+            <a:spLocks noGrp="1" noRot="1" noChangeAspect="1"/>
+          </p:cNvSpPr>
+          <p:nvPr>
+            <p:ph type="sldImg"/>
+          </p:nvPr>
+        </p:nvSpPr>
+        <p:spPr/>
+      </p:sp>
+      <p:sp>
+        <p:nvSpPr>
+          <p:cNvPr id="3" name="Notes Placeholder 2"/>
+          <p:cNvSpPr>
+            <a:spLocks noGrp="1"/>
+          </p:cNvSpPr>
+          <p:nvPr>
+            <p:ph type="body" idx="1"/>
+          </p:nvPr>
+        </p:nvSpPr>
+        <p:spPr/>
+        <p:txBody>
+          <a:bodyPr/>
+          <a:lstStyle/>
+          <a:p>
+            <a:r>
+              <a:rPr lang="en-US" dirty="0"/>
+              <a:t>Base + two endings: hopelessness, thoughtfulness, fearlessly, impatiently | Base + one ending: darkness, hopeful, quickly, disagree</a:t>
+            </a:r>
+            <a:endParaRPr lang="en-US" dirty="0"/>
+          </a:p>
+        </p:txBody>
+      </p:sp>
+      <p:sp>
+        <p:nvSpPr>
+          <p:cNvPr id="4" name="Slide Number Placeholder 3"/>
+          <p:cNvSpPr>
+            <a:spLocks noGrp="1"/>
+          </p:cNvSpPr>
+          <p:nvPr>
+            <p:ph type="sldNum" sz="quarter" idx="10"/>
+          </p:nvPr>
+        </p:nvSpPr>
+        <p:spPr/>
+        <p:txBody>
+          <a:bodyPr/>
+          <a:lstStyle/>
+          <a:p>
+            <a:fld id="{F7021451-1387-4CA6-816F-3879F97B5CBC}" type="slidenum">
+              <a:rPr lang="en-US"/>
+              <a:t>17</a:t>
+            </a:fld>
+            <a:endParaRPr lang="en-US"/>
+          </a:p>
+        </p:txBody>
+      </p:sp>
+    </p:spTree>
+    <p:extLst>
+      <p:ext uri="{BB962C8B-B14F-4D97-AF65-F5344CB8AC3E}">
+        <p14:creationId xmlns:p14="http://schemas.microsoft.com/office/powerpoint/2010/main" val="1024086991"/>
+      </p:ext>
+    </p:extLst>
+  </p:cSld>
+  <p:clrMapOvr>
+    <a:masterClrMapping/>
+  </p:clrMapOvr>
+</p:notes>
+</file>
+
+<file path=ppt/notesSlides/notesSlide18.xml><?xml version="1.0" encoding="utf-8"?>
+<p:notes xmlns:a="http://schemas.openxmlformats.org/drawingml/2006/main" xmlns:r="http://schemas.openxmlformats.org/officeDocument/2006/relationships" xmlns:p="http://schemas.openxmlformats.org/presentationml/2006/main">
+  <p:cSld>
+    <p:spTree>
+      <p:nvGrpSpPr>
+        <p:cNvPr id="1" name=""/>
+        <p:cNvGrpSpPr/>
+        <p:nvPr/>
+      </p:nvGrpSpPr>
+      <p:grpSpPr>
+        <a:xfrm>
+          <a:off x="0" y="0"/>
+          <a:ext cx="0" cy="0"/>
+          <a:chOff x="0" y="0"/>
+          <a:chExt cx="0" cy="0"/>
+        </a:xfrm>
+      </p:grpSpPr>
+      <p:sp>
+        <p:nvSpPr>
+          <p:cNvPr id="2" name="Slide Image Placeholder 1"/>
+          <p:cNvSpPr>
+            <a:spLocks noGrp="1" noRot="1" noChangeAspect="1"/>
+          </p:cNvSpPr>
+          <p:nvPr>
+            <p:ph type="sldImg"/>
+          </p:nvPr>
+        </p:nvSpPr>
+        <p:spPr/>
+      </p:sp>
+      <p:sp>
+        <p:nvSpPr>
+          <p:cNvPr id="3" name="Notes Placeholder 2"/>
+          <p:cNvSpPr>
+            <a:spLocks noGrp="1"/>
+          </p:cNvSpPr>
+          <p:nvPr>
+            <p:ph type="body" idx="1"/>
+          </p:nvPr>
+        </p:nvSpPr>
+        <p:spPr/>
+        <p:txBody>
+          <a:bodyPr/>
+          <a:lstStyle/>
+          <a:p>
+            <a:r>
+              <a:rPr lang="en-US" dirty="0"/>
+              <a:t>Read the chapters, then return to the pause questions.</a:t>
+            </a:r>
+            <a:endParaRPr lang="en-US" dirty="0"/>
+          </a:p>
+        </p:txBody>
+      </p:sp>
+      <p:sp>
+        <p:nvSpPr>
+          <p:cNvPr id="4" name="Slide Number Placeholder 3"/>
+          <p:cNvSpPr>
+            <a:spLocks noGrp="1"/>
+          </p:cNvSpPr>
+          <p:nvPr>
+            <p:ph type="sldNum" sz="quarter" idx="10"/>
+          </p:nvPr>
+        </p:nvSpPr>
+        <p:spPr/>
+        <p:txBody>
+          <a:bodyPr/>
+          <a:lstStyle/>
+          <a:p>
+            <a:fld id="{F7021451-1387-4CA6-816F-3879F97B5CBC}" type="slidenum">
+              <a:rPr lang="en-US"/>
+              <a:t>18</a:t>
+            </a:fld>
+            <a:endParaRPr lang="en-US"/>
+          </a:p>
+        </p:txBody>
+      </p:sp>
+    </p:spTree>
+    <p:extLst>
+      <p:ext uri="{BB962C8B-B14F-4D97-AF65-F5344CB8AC3E}">
+        <p14:creationId xmlns:p14="http://schemas.microsoft.com/office/powerpoint/2010/main" val="1024086991"/>
+      </p:ext>
+    </p:extLst>
+  </p:cSld>
+  <p:clrMapOvr>
+    <a:masterClrMapping/>
+  </p:clrMapOvr>
+</p:notes>
+</file>
+
+<file path=ppt/notesSlides/notesSlide19.xml><?xml version="1.0" encoding="utf-8"?>
+<p:notes xmlns:a="http://schemas.openxmlformats.org/drawingml/2006/main" xmlns:r="http://schemas.openxmlformats.org/officeDocument/2006/relationships" xmlns:p="http://schemas.openxmlformats.org/presentationml/2006/main">
+  <p:cSld>
+    <p:spTree>
+      <p:nvGrpSpPr>
+        <p:cNvPr id="1" name=""/>
+        <p:cNvGrpSpPr/>
+        <p:nvPr/>
+      </p:nvGrpSpPr>
+      <p:grpSpPr>
+        <a:xfrm>
+          <a:off x="0" y="0"/>
+          <a:ext cx="0" cy="0"/>
+          <a:chOff x="0" y="0"/>
+          <a:chExt cx="0" cy="0"/>
+        </a:xfrm>
+      </p:grpSpPr>
+      <p:sp>
+        <p:nvSpPr>
+          <p:cNvPr id="2" name="Slide Image Placeholder 1"/>
+          <p:cNvSpPr>
+            <a:spLocks noGrp="1" noRot="1" noChangeAspect="1"/>
+          </p:cNvSpPr>
+          <p:nvPr>
+            <p:ph type="sldImg"/>
+          </p:nvPr>
+        </p:nvSpPr>
+        <p:spPr/>
+      </p:sp>
+      <p:sp>
+        <p:nvSpPr>
+          <p:cNvPr id="3" name="Notes Placeholder 2"/>
+          <p:cNvSpPr>
+            <a:spLocks noGrp="1"/>
+          </p:cNvSpPr>
+          <p:nvPr>
+            <p:ph type="body" idx="1"/>
+          </p:nvPr>
+        </p:nvSpPr>
+        <p:spPr/>
+        <p:txBody>
+          <a:bodyPr/>
+          <a:lstStyle/>
+          <a:p>
+            <a:r>
+              <a:rPr lang="en-US" dirty="0"/>
+              <a:t>Writer’s Workshop stage for the week.</a:t>
+            </a:r>
+            <a:endParaRPr lang="en-US" dirty="0"/>
+          </a:p>
+        </p:txBody>
+      </p:sp>
+      <p:sp>
+        <p:nvSpPr>
+          <p:cNvPr id="4" name="Slide Number Placeholder 3"/>
+          <p:cNvSpPr>
+            <a:spLocks noGrp="1"/>
+          </p:cNvSpPr>
+          <p:nvPr>
+            <p:ph type="sldNum" sz="quarter" idx="10"/>
+          </p:nvPr>
+        </p:nvSpPr>
+        <p:spPr/>
+        <p:txBody>
+          <a:bodyPr/>
+          <a:lstStyle/>
+          <a:p>
+            <a:fld id="{F7021451-1387-4CA6-816F-3879F97B5CBC}" type="slidenum">
+              <a:rPr lang="en-US"/>
+              <a:t>19</a:t>
             </a:fld>
             <a:endParaRPr lang="en-US"/>
           </a:p>
@@ -1573,7 +1846,7 @@
           <a:p>
             <a:r>
               <a:rPr lang="en-US" dirty="0"/>
-              <a:t>Reading lens: Good readers pay attention to setting . Places shape what characters feel and do.</a:t>
+              <a:t>Reading lens: Good readers pay attention to setting. Places shape what characters feel and do.</a:t>
             </a:r>
             <a:endParaRPr lang="en-US" dirty="0"/>
           </a:p>
@@ -1661,8 +1934,7 @@
           <a:p>
             <a:r>
               <a:rPr lang="en-US" dirty="0"/>
-              <a:t>Corrected:  1. The Princess Pea sat in the dungeon and thought about what Despereaux must be doing right now.
-Look for: Did you catch the proper nouns (Princess Pea, Despereaux), the pronoun (she), and capital letters?</a:t>
+              <a:t>Tap through each highlighted word in the lesson and name what it does right before moving to the fix-it.</a:t>
             </a:r>
             <a:endParaRPr lang="en-US" dirty="0"/>
           </a:p>
@@ -1750,8 +2022,8 @@
           <a:p>
             <a:r>
               <a:rPr lang="en-US" dirty="0"/>
-              <a:t>Corrected:  1. The Princess Pea sat in the dungeon and thought about what Despereaux must be doing right now.
-Look for: Did you catch the proper nouns (Princess Pea, Despereaux), the pronoun (she), and capital letters?</a:t>
+              <a:t>Corrected: The Princess Pea sat in the dungeon and thought about what Despereaux must be doing right now. 
+Look for: </a:t>
             </a:r>
             <a:endParaRPr lang="en-US" dirty="0"/>
           </a:p>
@@ -1839,7 +2111,8 @@
           <a:p>
             <a:r>
               <a:rPr lang="en-US" dirty="0"/>
-              <a:t>Break the word into base + word part. Ask what the part adds to the meaning.</a:t>
+              <a:t>Corrected: The Princess Pea sat in the dungeon and thought about what Despereaux must be doing right now. 
+Look for: </a:t>
             </a:r>
             <a:endParaRPr lang="en-US" dirty="0"/>
           </a:p>
@@ -2412,7 +2685,7 @@
             <a:avLst/>
           </a:prstGeom>
           <a:solidFill>
-            <a:srgbClr val="55C8E8"/>
+            <a:srgbClr val="8B6FC0"/>
           </a:solidFill>
           <a:ln/>
         </p:spPr>
@@ -2450,7 +2723,7 @@
                 <a:ea typeface="Calibri" pitchFamily="34" charset="-122"/>
                 <a:cs typeface="Calibri" pitchFamily="34" charset="-120"/>
               </a:rPr>
-              <a:t>🔤  Vocabulary</a:t>
+              <a:t>🌱  Morphology</a:t>
             </a:r>
             <a:endParaRPr lang="en-US" sz="2200" dirty="0"/>
           </a:p>
@@ -2483,13 +2756,13 @@
             <a:r>
               <a:rPr lang="en-US" sz="1100" b="1" spc="100" kern="0" dirty="0">
                 <a:solidFill>
-                  <a:srgbClr val="55C8E8"/>
-                </a:solidFill>
-                <a:latin typeface="Calibri" pitchFamily="34" charset="0"/>
-                <a:ea typeface="Calibri" pitchFamily="34" charset="-122"/>
-                <a:cs typeface="Calibri" pitchFamily="34" charset="-120"/>
-              </a:rPr>
-              <a:t>VOCABULARY</a:t>
+                  <a:srgbClr val="8B6FC0"/>
+                </a:solidFill>
+                <a:latin typeface="Calibri" pitchFamily="34" charset="0"/>
+                <a:ea typeface="Calibri" pitchFamily="34" charset="-122"/>
+                <a:cs typeface="Calibri" pitchFamily="34" charset="-120"/>
+              </a:rPr>
+              <a:t>BASE + SUFFIX</a:t>
             </a:r>
             <a:endParaRPr lang="en-US" sz="1100" dirty="0"/>
           </a:p>
@@ -2504,15 +2777,15 @@
         <p:spPr>
           <a:xfrm>
             <a:off x="365760" y="1097280"/>
-            <a:ext cx="8412480" cy="658368"/>
+            <a:ext cx="8412480" cy="621792"/>
           </a:xfrm>
           <a:prstGeom prst="roundRect">
             <a:avLst>
-              <a:gd name="adj" fmla="val 13889"/>
+              <a:gd name="adj" fmla="val 14706"/>
             </a:avLst>
           </a:prstGeom>
           <a:solidFill>
-            <a:srgbClr val="E5F7FC"/>
+            <a:srgbClr val="F0E8FF"/>
           </a:solidFill>
           <a:ln/>
           <a:effectLst>
@@ -2532,8 +2805,8 @@
         </p:nvSpPr>
         <p:spPr>
           <a:xfrm>
-            <a:off x="594360" y="1225296"/>
-            <a:ext cx="7863840" cy="420624"/>
+            <a:off x="594360" y="1216152"/>
+            <a:ext cx="7863840" cy="384048"/>
           </a:xfrm>
           <a:prstGeom prst="rect">
             <a:avLst/>
@@ -2549,31 +2822,17 @@
               <a:buNone/>
             </a:pPr>
             <a:r>
-              <a:rPr lang="en-US" sz="1700" b="1" dirty="0">
-                <a:solidFill>
-                  <a:srgbClr val="0E1C42"/>
-                </a:solidFill>
-                <a:latin typeface="Calibri" pitchFamily="34" charset="0"/>
-                <a:ea typeface="Calibri" pitchFamily="34" charset="-122"/>
-                <a:cs typeface="Calibri" pitchFamily="34" charset="-120"/>
-              </a:rPr>
-              <a:t>armor  </a:t>
-            </a:r>
-            <a:pPr indent="0" marL="0">
-              <a:buNone/>
-            </a:pPr>
-            <a:r>
-              <a:rPr lang="en-US" sz="1400" dirty="0">
-                <a:solidFill>
-                  <a:srgbClr val="1E293B"/>
-                </a:solidFill>
-                <a:latin typeface="Calibri" pitchFamily="34" charset="0"/>
-                <a:ea typeface="Calibri" pitchFamily="34" charset="-122"/>
-                <a:cs typeface="Calibri" pitchFamily="34" charset="-120"/>
-              </a:rPr>
-              <a:t>Metal covering worn to protect the body in battle.</a:t>
-            </a:r>
-            <a:endParaRPr lang="en-US" sz="1700" dirty="0"/>
+              <a:rPr lang="en-US" sz="1500" dirty="0">
+                <a:solidFill>
+                  <a:srgbClr val="1E293B"/>
+                </a:solidFill>
+                <a:latin typeface="Calibri" pitchFamily="34" charset="0"/>
+                <a:ea typeface="Calibri" pitchFamily="34" charset="-122"/>
+                <a:cs typeface="Calibri" pitchFamily="34" charset="-120"/>
+              </a:rPr>
+              <a:t>🌱  slow + ly →slowly</a:t>
+            </a:r>
+            <a:endParaRPr lang="en-US" sz="1500" dirty="0"/>
           </a:p>
         </p:txBody>
       </p:sp>
@@ -2585,16 +2844,16 @@
         </p:nvSpPr>
         <p:spPr>
           <a:xfrm>
-            <a:off x="365760" y="1828800"/>
-            <a:ext cx="8412480" cy="658368"/>
+            <a:off x="365760" y="1792224"/>
+            <a:ext cx="8412480" cy="621792"/>
           </a:xfrm>
           <a:prstGeom prst="roundRect">
             <a:avLst>
-              <a:gd name="adj" fmla="val 13889"/>
+              <a:gd name="adj" fmla="val 14706"/>
             </a:avLst>
           </a:prstGeom>
           <a:solidFill>
-            <a:srgbClr val="FFFFFF"/>
+            <a:srgbClr val="F8F4FF"/>
           </a:solidFill>
           <a:ln/>
           <a:effectLst>
@@ -2614,8 +2873,8 @@
         </p:nvSpPr>
         <p:spPr>
           <a:xfrm>
-            <a:off x="594360" y="1956816"/>
-            <a:ext cx="7863840" cy="420624"/>
+            <a:off x="594360" y="1911096"/>
+            <a:ext cx="7863840" cy="384048"/>
           </a:xfrm>
           <a:prstGeom prst="rect">
             <a:avLst/>
@@ -2631,31 +2890,17 @@
               <a:buNone/>
             </a:pPr>
             <a:r>
-              <a:rPr lang="en-US" sz="1700" b="1" dirty="0">
-                <a:solidFill>
-                  <a:srgbClr val="0E1C42"/>
-                </a:solidFill>
-                <a:latin typeface="Calibri" pitchFamily="34" charset="0"/>
-                <a:ea typeface="Calibri" pitchFamily="34" charset="-122"/>
-                <a:cs typeface="Calibri" pitchFamily="34" charset="-120"/>
-              </a:rPr>
-              <a:t>foolish  </a:t>
-            </a:r>
-            <a:pPr indent="0" marL="0">
-              <a:buNone/>
-            </a:pPr>
-            <a:r>
-              <a:rPr lang="en-US" sz="1400" dirty="0">
-                <a:solidFill>
-                  <a:srgbClr val="1E293B"/>
-                </a:solidFill>
-                <a:latin typeface="Calibri" pitchFamily="34" charset="0"/>
-                <a:ea typeface="Calibri" pitchFamily="34" charset="-122"/>
-                <a:cs typeface="Calibri" pitchFamily="34" charset="-120"/>
-              </a:rPr>
-              <a:t>Silly or unwise; showing poor judgment.</a:t>
-            </a:r>
-            <a:endParaRPr lang="en-US" sz="1700" dirty="0"/>
+              <a:rPr lang="en-US" sz="1500" dirty="0">
+                <a:solidFill>
+                  <a:srgbClr val="1E293B"/>
+                </a:solidFill>
+                <a:latin typeface="Calibri" pitchFamily="34" charset="0"/>
+                <a:ea typeface="Calibri" pitchFamily="34" charset="-122"/>
+                <a:cs typeface="Calibri" pitchFamily="34" charset="-120"/>
+              </a:rPr>
+              <a:t>🌱  quiet + ly →quietly</a:t>
+            </a:r>
+            <a:endParaRPr lang="en-US" sz="1500" dirty="0"/>
           </a:p>
         </p:txBody>
       </p:sp>
@@ -2667,16 +2912,16 @@
         </p:nvSpPr>
         <p:spPr>
           <a:xfrm>
-            <a:off x="365760" y="2560320"/>
-            <a:ext cx="8412480" cy="658368"/>
+            <a:off x="365760" y="2487168"/>
+            <a:ext cx="8412480" cy="621792"/>
           </a:xfrm>
           <a:prstGeom prst="roundRect">
             <a:avLst>
-              <a:gd name="adj" fmla="val 13889"/>
+              <a:gd name="adj" fmla="val 14706"/>
             </a:avLst>
           </a:prstGeom>
           <a:solidFill>
-            <a:srgbClr val="E5F7FC"/>
+            <a:srgbClr val="F0E8FF"/>
           </a:solidFill>
           <a:ln/>
           <a:effectLst>
@@ -2696,8 +2941,8 @@
         </p:nvSpPr>
         <p:spPr>
           <a:xfrm>
-            <a:off x="594360" y="2688336"/>
-            <a:ext cx="7863840" cy="420624"/>
+            <a:off x="594360" y="2606040"/>
+            <a:ext cx="7863840" cy="384048"/>
           </a:xfrm>
           <a:prstGeom prst="rect">
             <a:avLst/>
@@ -2713,31 +2958,17 @@
               <a:buNone/>
             </a:pPr>
             <a:r>
-              <a:rPr lang="en-US" sz="1700" b="1" dirty="0">
-                <a:solidFill>
-                  <a:srgbClr val="0E1C42"/>
-                </a:solidFill>
-                <a:latin typeface="Calibri" pitchFamily="34" charset="0"/>
-                <a:ea typeface="Calibri" pitchFamily="34" charset="-122"/>
-                <a:cs typeface="Calibri" pitchFamily="34" charset="-120"/>
-              </a:rPr>
-              <a:t>jailer  </a:t>
-            </a:r>
-            <a:pPr indent="0" marL="0">
-              <a:buNone/>
-            </a:pPr>
-            <a:r>
-              <a:rPr lang="en-US" sz="1400" dirty="0">
-                <a:solidFill>
-                  <a:srgbClr val="1E293B"/>
-                </a:solidFill>
-                <a:latin typeface="Calibri" pitchFamily="34" charset="0"/>
-                <a:ea typeface="Calibri" pitchFamily="34" charset="-122"/>
-                <a:cs typeface="Calibri" pitchFamily="34" charset="-120"/>
-              </a:rPr>
-              <a:t>The person who guards prisoners in a jail or dungeon.</a:t>
-            </a:r>
-            <a:endParaRPr lang="en-US" sz="1700" dirty="0"/>
+              <a:rPr lang="en-US" sz="1500" dirty="0">
+                <a:solidFill>
+                  <a:srgbClr val="1E293B"/>
+                </a:solidFill>
+                <a:latin typeface="Calibri" pitchFamily="34" charset="0"/>
+                <a:ea typeface="Calibri" pitchFamily="34" charset="-122"/>
+                <a:cs typeface="Calibri" pitchFamily="34" charset="-120"/>
+              </a:rPr>
+              <a:t>🌱  act + ion →action</a:t>
+            </a:r>
+            <a:endParaRPr lang="en-US" sz="1500" dirty="0"/>
           </a:p>
         </p:txBody>
       </p:sp>
@@ -2749,16 +2980,16 @@
         </p:nvSpPr>
         <p:spPr>
           <a:xfrm>
-            <a:off x="365760" y="3291840"/>
-            <a:ext cx="8412480" cy="658368"/>
+            <a:off x="365760" y="3182112"/>
+            <a:ext cx="8412480" cy="621792"/>
           </a:xfrm>
           <a:prstGeom prst="roundRect">
             <a:avLst>
-              <a:gd name="adj" fmla="val 13889"/>
+              <a:gd name="adj" fmla="val 14706"/>
             </a:avLst>
           </a:prstGeom>
           <a:solidFill>
-            <a:srgbClr val="FFFFFF"/>
+            <a:srgbClr val="F8F4FF"/>
           </a:solidFill>
           <a:ln/>
           <a:effectLst>
@@ -2778,8 +3009,8 @@
         </p:nvSpPr>
         <p:spPr>
           <a:xfrm>
-            <a:off x="594360" y="3419856"/>
-            <a:ext cx="7863840" cy="420624"/>
+            <a:off x="594360" y="3300984"/>
+            <a:ext cx="7863840" cy="384048"/>
           </a:xfrm>
           <a:prstGeom prst="rect">
             <a:avLst/>
@@ -2795,31 +3026,17 @@
               <a:buNone/>
             </a:pPr>
             <a:r>
-              <a:rPr lang="en-US" sz="1700" b="1" dirty="0">
-                <a:solidFill>
-                  <a:srgbClr val="0E1C42"/>
-                </a:solidFill>
-                <a:latin typeface="Calibri" pitchFamily="34" charset="0"/>
-                <a:ea typeface="Calibri" pitchFamily="34" charset="-122"/>
-                <a:cs typeface="Calibri" pitchFamily="34" charset="-120"/>
-              </a:rPr>
-              <a:t>advanced  </a:t>
-            </a:r>
-            <a:pPr indent="0" marL="0">
-              <a:buNone/>
-            </a:pPr>
-            <a:r>
-              <a:rPr lang="en-US" sz="1400" dirty="0">
-                <a:solidFill>
-                  <a:srgbClr val="1E293B"/>
-                </a:solidFill>
-                <a:latin typeface="Calibri" pitchFamily="34" charset="0"/>
-                <a:ea typeface="Calibri" pitchFamily="34" charset="-122"/>
-                <a:cs typeface="Calibri" pitchFamily="34" charset="-120"/>
-              </a:rPr>
-              <a:t>Moved forward, especially toward someone.</a:t>
-            </a:r>
-            <a:endParaRPr lang="en-US" sz="1700" dirty="0"/>
+              <a:rPr lang="en-US" sz="1500" dirty="0">
+                <a:solidFill>
+                  <a:srgbClr val="1E293B"/>
+                </a:solidFill>
+                <a:latin typeface="Calibri" pitchFamily="34" charset="0"/>
+                <a:ea typeface="Calibri" pitchFamily="34" charset="-122"/>
+                <a:cs typeface="Calibri" pitchFamily="34" charset="-120"/>
+              </a:rPr>
+              <a:t>🌱  celebrate + ion →celebration</a:t>
+            </a:r>
+            <a:endParaRPr lang="en-US" sz="1500" dirty="0"/>
           </a:p>
         </p:txBody>
       </p:sp>
@@ -2837,7 +3054,7 @@
     <p:bg>
       <p:bgPr>
         <a:solidFill>
-          <a:srgbClr val="F8FAFC"/>
+          <a:srgbClr val="FFFFFF"/>
         </a:solidFill>
       </p:bgPr>
     </p:bg>
@@ -2870,7 +3087,7 @@
             <a:avLst/>
           </a:prstGeom>
           <a:solidFill>
-            <a:srgbClr val="C7922C"/>
+            <a:srgbClr val="55C8E8"/>
           </a:solidFill>
           <a:ln/>
         </p:spPr>
@@ -2908,7 +3125,7 @@
                 <a:ea typeface="Calibri" pitchFamily="34" charset="-122"/>
                 <a:cs typeface="Calibri" pitchFamily="34" charset="-120"/>
               </a:rPr>
-              <a:t>✏️  Grammar</a:t>
+              <a:t>🔤  Vocabulary</a:t>
             </a:r>
             <a:endParaRPr lang="en-US" sz="2200" dirty="0"/>
           </a:p>
@@ -2922,7 +3139,7 @@
         </p:nvSpPr>
         <p:spPr>
           <a:xfrm>
-            <a:off x="365760" y="777240"/>
+            <a:off x="365760" y="804672"/>
             <a:ext cx="8229600" cy="237744"/>
           </a:xfrm>
           <a:prstGeom prst="rect">
@@ -2941,13 +3158,13 @@
             <a:r>
               <a:rPr lang="en-US" sz="1100" b="1" spc="100" kern="0" dirty="0">
                 <a:solidFill>
-                  <a:srgbClr val="C7922C"/>
-                </a:solidFill>
-                <a:latin typeface="Calibri" pitchFamily="34" charset="0"/>
-                <a:ea typeface="Calibri" pitchFamily="34" charset="-122"/>
-                <a:cs typeface="Calibri" pitchFamily="34" charset="-120"/>
-              </a:rPr>
-              <a:t>PUNCTUATING DIALOGUE</a:t>
+                  <a:srgbClr val="55C8E8"/>
+                </a:solidFill>
+                <a:latin typeface="Calibri" pitchFamily="34" charset="0"/>
+                <a:ea typeface="Calibri" pitchFamily="34" charset="-122"/>
+                <a:cs typeface="Calibri" pitchFamily="34" charset="-120"/>
+              </a:rPr>
+              <a:t>VOCABULARY</a:t>
             </a:r>
             <a:endParaRPr lang="en-US" sz="1100" dirty="0"/>
           </a:p>
@@ -2961,7 +3178,7 @@
         </p:nvSpPr>
         <p:spPr>
           <a:xfrm>
-            <a:off x="365760" y="1078992"/>
+            <a:off x="365760" y="1097280"/>
             <a:ext cx="8412480" cy="658368"/>
           </a:xfrm>
           <a:prstGeom prst="roundRect">
@@ -2970,7 +3187,7 @@
             </a:avLst>
           </a:prstGeom>
           <a:solidFill>
-            <a:srgbClr val="FEF6E8"/>
+            <a:srgbClr val="E5F7FC"/>
           </a:solidFill>
           <a:ln/>
           <a:effectLst>
@@ -2991,7 +3208,7 @@
         <p:spPr>
           <a:xfrm>
             <a:off x="594360" y="1225296"/>
-            <a:ext cx="7863840" cy="402336"/>
+            <a:ext cx="7863840" cy="420624"/>
           </a:xfrm>
           <a:prstGeom prst="rect">
             <a:avLst/>
@@ -3007,17 +3224,31 @@
               <a:buNone/>
             </a:pPr>
             <a:r>
-              <a:rPr lang="en-US" sz="1600" dirty="0">
-                <a:solidFill>
-                  <a:srgbClr val="1E293B"/>
-                </a:solidFill>
-                <a:latin typeface="Calibri" pitchFamily="34" charset="0"/>
-                <a:ea typeface="Calibri" pitchFamily="34" charset="-122"/>
-                <a:cs typeface="Calibri" pitchFamily="34" charset="-120"/>
-              </a:rPr>
-              <a:t>“Carry the basket,” said Roscuro.</a:t>
-            </a:r>
-            <a:endParaRPr lang="en-US" sz="1600" dirty="0"/>
+              <a:rPr lang="en-US" sz="1700" b="1" dirty="0">
+                <a:solidFill>
+                  <a:srgbClr val="0E1C42"/>
+                </a:solidFill>
+                <a:latin typeface="Calibri" pitchFamily="34" charset="0"/>
+                <a:ea typeface="Calibri" pitchFamily="34" charset="-122"/>
+                <a:cs typeface="Calibri" pitchFamily="34" charset="-120"/>
+              </a:rPr>
+              <a:t>armor  </a:t>
+            </a:r>
+            <a:pPr indent="0" marL="0">
+              <a:buNone/>
+            </a:pPr>
+            <a:r>
+              <a:rPr lang="en-US" sz="1400" dirty="0">
+                <a:solidFill>
+                  <a:srgbClr val="1E293B"/>
+                </a:solidFill>
+                <a:latin typeface="Calibri" pitchFamily="34" charset="0"/>
+                <a:ea typeface="Calibri" pitchFamily="34" charset="-122"/>
+                <a:cs typeface="Calibri" pitchFamily="34" charset="-120"/>
+              </a:rPr>
+              <a:t>Metal covering worn to protect the body in battle.</a:t>
+            </a:r>
+            <a:endParaRPr lang="en-US" sz="1700" dirty="0"/>
           </a:p>
         </p:txBody>
       </p:sp>
@@ -3029,7 +3260,7 @@
         </p:nvSpPr>
         <p:spPr>
           <a:xfrm>
-            <a:off x="365760" y="1810512"/>
+            <a:off x="365760" y="1828800"/>
             <a:ext cx="8412480" cy="658368"/>
           </a:xfrm>
           <a:prstGeom prst="roundRect">
@@ -3059,7 +3290,7 @@
         <p:spPr>
           <a:xfrm>
             <a:off x="594360" y="1956816"/>
-            <a:ext cx="7863840" cy="402336"/>
+            <a:ext cx="7863840" cy="420624"/>
           </a:xfrm>
           <a:prstGeom prst="rect">
             <a:avLst/>
@@ -3075,17 +3306,31 @@
               <a:buNone/>
             </a:pPr>
             <a:r>
-              <a:rPr lang="en-US" sz="1600" dirty="0">
-                <a:solidFill>
-                  <a:srgbClr val="1E293B"/>
-                </a:solidFill>
-                <a:latin typeface="Calibri" pitchFamily="34" charset="0"/>
-                <a:ea typeface="Calibri" pitchFamily="34" charset="-122"/>
-                <a:cs typeface="Calibri" pitchFamily="34" charset="-120"/>
-              </a:rPr>
-              <a:t>Mig said, “I want to be a princess.”</a:t>
-            </a:r>
-            <a:endParaRPr lang="en-US" sz="1600" dirty="0"/>
+              <a:rPr lang="en-US" sz="1700" b="1" dirty="0">
+                <a:solidFill>
+                  <a:srgbClr val="0E1C42"/>
+                </a:solidFill>
+                <a:latin typeface="Calibri" pitchFamily="34" charset="0"/>
+                <a:ea typeface="Calibri" pitchFamily="34" charset="-122"/>
+                <a:cs typeface="Calibri" pitchFamily="34" charset="-120"/>
+              </a:rPr>
+              <a:t>foolish  </a:t>
+            </a:r>
+            <a:pPr indent="0" marL="0">
+              <a:buNone/>
+            </a:pPr>
+            <a:r>
+              <a:rPr lang="en-US" sz="1400" dirty="0">
+                <a:solidFill>
+                  <a:srgbClr val="1E293B"/>
+                </a:solidFill>
+                <a:latin typeface="Calibri" pitchFamily="34" charset="0"/>
+                <a:ea typeface="Calibri" pitchFamily="34" charset="-122"/>
+                <a:cs typeface="Calibri" pitchFamily="34" charset="-120"/>
+              </a:rPr>
+              <a:t>Silly or unwise; showing poor judgment.</a:t>
+            </a:r>
+            <a:endParaRPr lang="en-US" sz="1700" dirty="0"/>
           </a:p>
         </p:txBody>
       </p:sp>
@@ -3097,7 +3342,7 @@
         </p:nvSpPr>
         <p:spPr>
           <a:xfrm>
-            <a:off x="365760" y="2542032"/>
+            <a:off x="365760" y="2560320"/>
             <a:ext cx="8412480" cy="658368"/>
           </a:xfrm>
           <a:prstGeom prst="roundRect">
@@ -3106,7 +3351,7 @@
             </a:avLst>
           </a:prstGeom>
           <a:solidFill>
-            <a:srgbClr val="FEF6E8"/>
+            <a:srgbClr val="E5F7FC"/>
           </a:solidFill>
           <a:ln/>
           <a:effectLst>
@@ -3127,7 +3372,7 @@
         <p:spPr>
           <a:xfrm>
             <a:off x="594360" y="2688336"/>
-            <a:ext cx="7863840" cy="402336"/>
+            <a:ext cx="7863840" cy="420624"/>
           </a:xfrm>
           <a:prstGeom prst="rect">
             <a:avLst/>
@@ -3143,17 +3388,31 @@
               <a:buNone/>
             </a:pPr>
             <a:r>
-              <a:rPr lang="en-US" sz="1600" dirty="0">
-                <a:solidFill>
-                  <a:srgbClr val="1E293B"/>
-                </a:solidFill>
-                <a:latin typeface="Calibri" pitchFamily="34" charset="0"/>
-                <a:ea typeface="Calibri" pitchFamily="34" charset="-122"/>
-                <a:cs typeface="Calibri" pitchFamily="34" charset="-120"/>
-              </a:rPr>
-              <a:t>“I am hungry,” the prince said.</a:t>
-            </a:r>
-            <a:endParaRPr lang="en-US" sz="1600" dirty="0"/>
+              <a:rPr lang="en-US" sz="1700" b="1" dirty="0">
+                <a:solidFill>
+                  <a:srgbClr val="0E1C42"/>
+                </a:solidFill>
+                <a:latin typeface="Calibri" pitchFamily="34" charset="0"/>
+                <a:ea typeface="Calibri" pitchFamily="34" charset="-122"/>
+                <a:cs typeface="Calibri" pitchFamily="34" charset="-120"/>
+              </a:rPr>
+              <a:t>jailer  </a:t>
+            </a:r>
+            <a:pPr indent="0" marL="0">
+              <a:buNone/>
+            </a:pPr>
+            <a:r>
+              <a:rPr lang="en-US" sz="1400" dirty="0">
+                <a:solidFill>
+                  <a:srgbClr val="1E293B"/>
+                </a:solidFill>
+                <a:latin typeface="Calibri" pitchFamily="34" charset="0"/>
+                <a:ea typeface="Calibri" pitchFamily="34" charset="-122"/>
+                <a:cs typeface="Calibri" pitchFamily="34" charset="-120"/>
+              </a:rPr>
+              <a:t>The person who guards prisoners in a jail or dungeon.</a:t>
+            </a:r>
+            <a:endParaRPr lang="en-US" sz="1700" dirty="0"/>
           </a:p>
         </p:txBody>
       </p:sp>
@@ -3165,7 +3424,7 @@
         </p:nvSpPr>
         <p:spPr>
           <a:xfrm>
-            <a:off x="365760" y="3273552"/>
+            <a:off x="365760" y="3291840"/>
             <a:ext cx="8412480" cy="658368"/>
           </a:xfrm>
           <a:prstGeom prst="roundRect">
@@ -3195,7 +3454,7 @@
         <p:spPr>
           <a:xfrm>
             <a:off x="594360" y="3419856"/>
-            <a:ext cx="7863840" cy="402336"/>
+            <a:ext cx="7863840" cy="420624"/>
           </a:xfrm>
           <a:prstGeom prst="rect">
             <a:avLst/>
@@ -3211,56 +3470,31 @@
               <a:buNone/>
             </a:pPr>
             <a:r>
-              <a:rPr lang="en-US" sz="1600" dirty="0">
-                <a:solidFill>
-                  <a:srgbClr val="1E293B"/>
-                </a:solidFill>
-                <a:latin typeface="Calibri" pitchFamily="34" charset="0"/>
-                <a:ea typeface="Calibri" pitchFamily="34" charset="-122"/>
-                <a:cs typeface="Calibri" pitchFamily="34" charset="-120"/>
-              </a:rPr>
-              <a:t>Cook said, “That is soup you are smelling.”</a:t>
-            </a:r>
-            <a:endParaRPr lang="en-US" sz="1600" dirty="0"/>
-          </a:p>
-        </p:txBody>
-      </p:sp>
-      <p:sp>
-        <p:nvSpPr>
-          <p:cNvPr id="13" name="Text 11"/>
-          <p:cNvSpPr/>
-          <p:nvPr/>
-        </p:nvSpPr>
-        <p:spPr>
-          <a:xfrm>
-            <a:off x="365760" y="4050792"/>
-            <a:ext cx="8412480" cy="365760"/>
-          </a:xfrm>
-          <a:prstGeom prst="rect">
-            <a:avLst/>
-          </a:prstGeom>
-          <a:noFill/>
-          <a:ln/>
-        </p:spPr>
-        <p:txBody>
-          <a:bodyPr wrap="square" lIns="0" tIns="0" rIns="0" bIns="0" rtlCol="0" anchor="ctr"/>
-          <a:lstStyle/>
-          <a:p>
-            <a:pPr indent="0" marL="0">
-              <a:buNone/>
-            </a:pPr>
-            <a:r>
-              <a:rPr lang="en-US" sz="1500" i="1" dirty="0">
-                <a:solidFill>
-                  <a:srgbClr val="64748B"/>
-                </a:solidFill>
-                <a:latin typeface="Calibri" pitchFamily="34" charset="0"/>
-                <a:ea typeface="Calibri" pitchFamily="34" charset="-122"/>
-                <a:cs typeface="Calibri" pitchFamily="34" charset="-120"/>
-              </a:rPr>
-              <a:t>Your turn. Find the comma that separates the speech from the speaker. Tap a word to check — green means you got it.</a:t>
-            </a:r>
-            <a:endParaRPr lang="en-US" sz="1500" dirty="0"/>
+              <a:rPr lang="en-US" sz="1700" b="1" dirty="0">
+                <a:solidFill>
+                  <a:srgbClr val="0E1C42"/>
+                </a:solidFill>
+                <a:latin typeface="Calibri" pitchFamily="34" charset="0"/>
+                <a:ea typeface="Calibri" pitchFamily="34" charset="-122"/>
+                <a:cs typeface="Calibri" pitchFamily="34" charset="-120"/>
+              </a:rPr>
+              <a:t>advanced  </a:t>
+            </a:r>
+            <a:pPr indent="0" marL="0">
+              <a:buNone/>
+            </a:pPr>
+            <a:r>
+              <a:rPr lang="en-US" sz="1400" dirty="0">
+                <a:solidFill>
+                  <a:srgbClr val="1E293B"/>
+                </a:solidFill>
+                <a:latin typeface="Calibri" pitchFamily="34" charset="0"/>
+                <a:ea typeface="Calibri" pitchFamily="34" charset="-122"/>
+                <a:cs typeface="Calibri" pitchFamily="34" charset="-120"/>
+              </a:rPr>
+              <a:t>Moved forward, especially toward someone.</a:t>
+            </a:r>
+            <a:endParaRPr lang="en-US" sz="1700" dirty="0"/>
           </a:p>
         </p:txBody>
       </p:sp>
@@ -3349,7 +3583,7 @@
                 <a:ea typeface="Calibri" pitchFamily="34" charset="-122"/>
                 <a:cs typeface="Calibri" pitchFamily="34" charset="-120"/>
               </a:rPr>
-              <a:t>✏️  Grammar</a:t>
+              <a:t>✏️  Grammar — What do you notice?</a:t>
             </a:r>
             <a:endParaRPr lang="en-US" sz="2200" dirty="0"/>
           </a:p>
@@ -3363,7 +3597,7 @@
         </p:nvSpPr>
         <p:spPr>
           <a:xfrm>
-            <a:off x="365760" y="777240"/>
+            <a:off x="365760" y="749808"/>
             <a:ext cx="8229600" cy="237744"/>
           </a:xfrm>
           <a:prstGeom prst="rect">
@@ -3396,13 +3630,52 @@
       </p:sp>
       <p:sp>
         <p:nvSpPr>
-          <p:cNvPr id="5" name="Shape 3"/>
-          <p:cNvSpPr/>
-          <p:nvPr/>
-        </p:nvSpPr>
-        <p:spPr>
-          <a:xfrm>
-            <a:off x="365760" y="1078992"/>
+          <p:cNvPr id="5" name="Text 3"/>
+          <p:cNvSpPr/>
+          <p:nvPr/>
+        </p:nvSpPr>
+        <p:spPr>
+          <a:xfrm>
+            <a:off x="365760" y="987552"/>
+            <a:ext cx="8412480" cy="411480"/>
+          </a:xfrm>
+          <a:prstGeom prst="rect">
+            <a:avLst/>
+          </a:prstGeom>
+          <a:noFill/>
+          <a:ln/>
+        </p:spPr>
+        <p:txBody>
+          <a:bodyPr wrap="square" lIns="0" tIns="0" rIns="0" bIns="0" rtlCol="0" anchor="ctr"/>
+          <a:lstStyle/>
+          <a:p>
+            <a:pPr indent="0" marL="0">
+              <a:buNone/>
+            </a:pPr>
+            <a:r>
+              <a:rPr lang="en-US" sz="1500" i="1" dirty="0">
+                <a:solidFill>
+                  <a:srgbClr val="64748B"/>
+                </a:solidFill>
+                <a:latin typeface="Calibri" pitchFamily="34" charset="0"/>
+                <a:ea typeface="Calibri" pitchFamily="34" charset="-122"/>
+                <a:cs typeface="Calibri" pitchFamily="34" charset="-120"/>
+              </a:rPr>
+              <a:t>Both sentences say the same thing. The author punctuated them differently. Look at the marks, not the words.</a:t>
+            </a:r>
+            <a:endParaRPr lang="en-US" sz="1500" dirty="0"/>
+          </a:p>
+        </p:txBody>
+      </p:sp>
+      <p:sp>
+        <p:nvSpPr>
+          <p:cNvPr id="6" name="Shape 4"/>
+          <p:cNvSpPr/>
+          <p:nvPr/>
+        </p:nvSpPr>
+        <p:spPr>
+          <a:xfrm>
+            <a:off x="365760" y="1463040"/>
             <a:ext cx="8412480" cy="658368"/>
           </a:xfrm>
           <a:prstGeom prst="roundRect">
@@ -3413,7 +3686,12 @@
           <a:solidFill>
             <a:srgbClr val="FEF6E8"/>
           </a:solidFill>
-          <a:ln/>
+          <a:ln w="19050">
+            <a:solidFill>
+              <a:srgbClr val="C7922C"/>
+            </a:solidFill>
+            <a:prstDash val="solid"/>
+          </a:ln>
           <a:effectLst>
             <a:outerShdw sx="100000" sy="100000" kx="0" ky="0" algn="bl" rotWithShape="0" blurRad="101600" dist="38100" dir="2700000">
               <a:srgbClr val="000000">
@@ -3425,14 +3703,14 @@
       </p:sp>
       <p:sp>
         <p:nvSpPr>
-          <p:cNvPr id="6" name="Text 4"/>
-          <p:cNvSpPr/>
-          <p:nvPr/>
-        </p:nvSpPr>
-        <p:spPr>
-          <a:xfrm>
-            <a:off x="594360" y="1225296"/>
-            <a:ext cx="7863840" cy="402336"/>
+          <p:cNvPr id="7" name="Text 5"/>
+          <p:cNvSpPr/>
+          <p:nvPr/>
+        </p:nvSpPr>
+        <p:spPr>
+          <a:xfrm>
+            <a:off x="594360" y="1591056"/>
+            <a:ext cx="7955280" cy="402336"/>
           </a:xfrm>
           <a:prstGeom prst="rect">
             <a:avLst/>
@@ -3447,58 +3725,310 @@
             <a:pPr indent="0" marL="0">
               <a:buNone/>
             </a:pPr>
-            <a:r>
-              <a:rPr lang="en-US" sz="1600" dirty="0">
-                <a:solidFill>
-                  <a:srgbClr val="1E293B"/>
-                </a:solidFill>
-                <a:latin typeface="Calibri" pitchFamily="34" charset="0"/>
-                <a:ea typeface="Calibri" pitchFamily="34" charset="-122"/>
-                <a:cs typeface="Calibri" pitchFamily="34" charset="-120"/>
-              </a:rPr>
-              <a:t>“Carry the </a:t>
-            </a:r>
-            <a:pPr indent="0" marL="0">
-              <a:buNone/>
-            </a:pPr>
-            <a:r>
-              <a:rPr lang="en-US" sz="1600" b="1" dirty="0">
-                <a:solidFill>
-                  <a:srgbClr val="34B76F"/>
-                </a:solidFill>
-                <a:latin typeface="Calibri" pitchFamily="34" charset="0"/>
-                <a:ea typeface="Calibri" pitchFamily="34" charset="-122"/>
-                <a:cs typeface="Calibri" pitchFamily="34" charset="-120"/>
-              </a:rPr>
-              <a:t>basket,”</a:t>
-            </a:r>
-            <a:pPr indent="0" marL="0">
-              <a:buNone/>
-            </a:pPr>
-            <a:r>
-              <a:rPr lang="en-US" sz="1600" dirty="0">
-                <a:solidFill>
-                  <a:srgbClr val="1E293B"/>
-                </a:solidFill>
-                <a:latin typeface="Calibri" pitchFamily="34" charset="0"/>
-                <a:ea typeface="Calibri" pitchFamily="34" charset="-122"/>
-                <a:cs typeface="Calibri" pitchFamily="34" charset="-120"/>
-              </a:rPr>
-              <a:t> said Roscuro.</a:t>
-            </a:r>
-            <a:endParaRPr lang="en-US" sz="1600" dirty="0"/>
-          </a:p>
-        </p:txBody>
-      </p:sp>
-      <p:sp>
-        <p:nvSpPr>
-          <p:cNvPr id="7" name="Shape 5"/>
-          <p:cNvSpPr/>
-          <p:nvPr/>
-        </p:nvSpPr>
-        <p:spPr>
-          <a:xfrm>
-            <a:off x="365760" y="1810512"/>
+            <a:endParaRPr lang="en-US" sz="1700" dirty="0"/>
+          </a:p>
+        </p:txBody>
+      </p:sp>
+      <p:sp>
+        <p:nvSpPr>
+          <p:cNvPr id="8" name="Text 6"/>
+          <p:cNvSpPr/>
+          <p:nvPr/>
+        </p:nvSpPr>
+        <p:spPr>
+          <a:xfrm>
+            <a:off x="594360" y="1591056"/>
+            <a:ext cx="7955280" cy="402336"/>
+          </a:xfrm>
+          <a:prstGeom prst="rect">
+            <a:avLst/>
+          </a:prstGeom>
+          <a:noFill/>
+          <a:ln/>
+        </p:spPr>
+        <p:txBody>
+          <a:bodyPr wrap="square" lIns="0" tIns="0" rIns="0" bIns="0" rtlCol="0" anchor="ctr"/>
+          <a:lstStyle/>
+          <a:p>
+            <a:pPr indent="0" marL="0">
+              <a:buNone/>
+            </a:pPr>
+            <a:r>
+              <a:rPr lang="en-US" sz="1700" dirty="0">
+                <a:solidFill>
+                  <a:srgbClr val="1E293B"/>
+                </a:solidFill>
+                <a:latin typeface="Calibri" pitchFamily="34" charset="0"/>
+                <a:ea typeface="Calibri" pitchFamily="34" charset="-122"/>
+                <a:cs typeface="Calibri" pitchFamily="34" charset="-120"/>
+              </a:rPr>
+              <a:t>“Straight</a:t>
+            </a:r>
+            <a:pPr indent="0" marL="0">
+              <a:buNone/>
+            </a:pPr>
+            <a:r>
+              <a:rPr lang="en-US" sz="1700" dirty="0">
+                <a:solidFill>
+                  <a:srgbClr val="1E293B"/>
+                </a:solidFill>
+                <a:latin typeface="Calibri" pitchFamily="34" charset="0"/>
+                <a:ea typeface="Calibri" pitchFamily="34" charset="-122"/>
+                <a:cs typeface="Calibri" pitchFamily="34" charset="-120"/>
+              </a:rPr>
+              <a:t> </a:t>
+            </a:r>
+            <a:pPr indent="0" marL="0">
+              <a:buNone/>
+            </a:pPr>
+            <a:r>
+              <a:rPr lang="en-US" sz="1700" dirty="0">
+                <a:solidFill>
+                  <a:srgbClr val="1E293B"/>
+                </a:solidFill>
+                <a:latin typeface="Calibri" pitchFamily="34" charset="0"/>
+                <a:ea typeface="Calibri" pitchFamily="34" charset="-122"/>
+                <a:cs typeface="Calibri" pitchFamily="34" charset="-120"/>
+              </a:rPr>
+              <a:t>to</a:t>
+            </a:r>
+            <a:pPr indent="0" marL="0">
+              <a:buNone/>
+            </a:pPr>
+            <a:r>
+              <a:rPr lang="en-US" sz="1700" dirty="0">
+                <a:solidFill>
+                  <a:srgbClr val="1E293B"/>
+                </a:solidFill>
+                <a:latin typeface="Calibri" pitchFamily="34" charset="0"/>
+                <a:ea typeface="Calibri" pitchFamily="34" charset="-122"/>
+                <a:cs typeface="Calibri" pitchFamily="34" charset="-120"/>
+              </a:rPr>
+              <a:t> </a:t>
+            </a:r>
+            <a:pPr indent="0" marL="0">
+              <a:buNone/>
+            </a:pPr>
+            <a:r>
+              <a:rPr lang="en-US" sz="1700" dirty="0">
+                <a:solidFill>
+                  <a:srgbClr val="1E293B"/>
+                </a:solidFill>
+                <a:latin typeface="Calibri" pitchFamily="34" charset="0"/>
+                <a:ea typeface="Calibri" pitchFamily="34" charset="-122"/>
+                <a:cs typeface="Calibri" pitchFamily="34" charset="-120"/>
+              </a:rPr>
+              <a:t>the</a:t>
+            </a:r>
+            <a:pPr indent="0" marL="0">
+              <a:buNone/>
+            </a:pPr>
+            <a:r>
+              <a:rPr lang="en-US" sz="1700" dirty="0">
+                <a:solidFill>
+                  <a:srgbClr val="1E293B"/>
+                </a:solidFill>
+                <a:latin typeface="Calibri" pitchFamily="34" charset="0"/>
+                <a:ea typeface="Calibri" pitchFamily="34" charset="-122"/>
+                <a:cs typeface="Calibri" pitchFamily="34" charset="-120"/>
+              </a:rPr>
+              <a:t> </a:t>
+            </a:r>
+            <a:pPr indent="0" marL="0">
+              <a:buNone/>
+            </a:pPr>
+            <a:r>
+              <a:rPr lang="en-US" sz="1700" dirty="0">
+                <a:solidFill>
+                  <a:srgbClr val="1E293B"/>
+                </a:solidFill>
+                <a:latin typeface="Calibri" pitchFamily="34" charset="0"/>
+                <a:ea typeface="Calibri" pitchFamily="34" charset="-122"/>
+                <a:cs typeface="Calibri" pitchFamily="34" charset="-120"/>
+              </a:rPr>
+              <a:t>dungeon</a:t>
+            </a:r>
+            <a:pPr indent="0" marL="0">
+              <a:buNone/>
+            </a:pPr>
+            <a:r>
+              <a:rPr lang="en-US" sz="1700" dirty="0">
+                <a:solidFill>
+                  <a:srgbClr val="1E293B"/>
+                </a:solidFill>
+                <a:latin typeface="Calibri" pitchFamily="34" charset="0"/>
+                <a:ea typeface="Calibri" pitchFamily="34" charset="-122"/>
+                <a:cs typeface="Calibri" pitchFamily="34" charset="-120"/>
+              </a:rPr>
+              <a:t> </a:t>
+            </a:r>
+            <a:pPr indent="0" marL="0">
+              <a:buNone/>
+            </a:pPr>
+            <a:r>
+              <a:rPr lang="en-US" sz="1700" dirty="0">
+                <a:solidFill>
+                  <a:srgbClr val="1E293B"/>
+                </a:solidFill>
+                <a:latin typeface="Calibri" pitchFamily="34" charset="0"/>
+                <a:ea typeface="Calibri" pitchFamily="34" charset="-122"/>
+                <a:cs typeface="Calibri" pitchFamily="34" charset="-120"/>
+              </a:rPr>
+              <a:t>with</a:t>
+            </a:r>
+            <a:pPr indent="0" marL="0">
+              <a:buNone/>
+            </a:pPr>
+            <a:r>
+              <a:rPr lang="en-US" sz="1700" dirty="0">
+                <a:solidFill>
+                  <a:srgbClr val="1E293B"/>
+                </a:solidFill>
+                <a:latin typeface="Calibri" pitchFamily="34" charset="0"/>
+                <a:ea typeface="Calibri" pitchFamily="34" charset="-122"/>
+                <a:cs typeface="Calibri" pitchFamily="34" charset="-120"/>
+              </a:rPr>
+              <a:t> </a:t>
+            </a:r>
+            <a:pPr indent="0" marL="0">
+              <a:buNone/>
+            </a:pPr>
+            <a:r>
+              <a:rPr lang="en-US" sz="1700" dirty="0">
+                <a:solidFill>
+                  <a:srgbClr val="1E293B"/>
+                </a:solidFill>
+                <a:latin typeface="Calibri" pitchFamily="34" charset="0"/>
+                <a:ea typeface="Calibri" pitchFamily="34" charset="-122"/>
+                <a:cs typeface="Calibri" pitchFamily="34" charset="-120"/>
+              </a:rPr>
+              <a:t>him,”</a:t>
+            </a:r>
+            <a:pPr indent="0" marL="0">
+              <a:buNone/>
+            </a:pPr>
+            <a:r>
+              <a:rPr lang="en-US" sz="1700" dirty="0">
+                <a:solidFill>
+                  <a:srgbClr val="1E293B"/>
+                </a:solidFill>
+                <a:latin typeface="Calibri" pitchFamily="34" charset="0"/>
+                <a:ea typeface="Calibri" pitchFamily="34" charset="-122"/>
+                <a:cs typeface="Calibri" pitchFamily="34" charset="-120"/>
+              </a:rPr>
+              <a:t> </a:t>
+            </a:r>
+            <a:pPr indent="0" marL="0">
+              <a:buNone/>
+            </a:pPr>
+            <a:r>
+              <a:rPr lang="en-US" sz="1700" dirty="0">
+                <a:solidFill>
+                  <a:srgbClr val="1E293B"/>
+                </a:solidFill>
+                <a:latin typeface="Calibri" pitchFamily="34" charset="0"/>
+                <a:ea typeface="Calibri" pitchFamily="34" charset="-122"/>
+                <a:cs typeface="Calibri" pitchFamily="34" charset="-120"/>
+              </a:rPr>
+              <a:t>said</a:t>
+            </a:r>
+            <a:pPr indent="0" marL="0">
+              <a:buNone/>
+            </a:pPr>
+            <a:r>
+              <a:rPr lang="en-US" sz="1700" dirty="0">
+                <a:solidFill>
+                  <a:srgbClr val="1E293B"/>
+                </a:solidFill>
+                <a:latin typeface="Calibri" pitchFamily="34" charset="0"/>
+                <a:ea typeface="Calibri" pitchFamily="34" charset="-122"/>
+                <a:cs typeface="Calibri" pitchFamily="34" charset="-120"/>
+              </a:rPr>
+              <a:t> </a:t>
+            </a:r>
+            <a:pPr indent="0" marL="0">
+              <a:buNone/>
+            </a:pPr>
+            <a:r>
+              <a:rPr lang="en-US" sz="1700" dirty="0">
+                <a:solidFill>
+                  <a:srgbClr val="1E293B"/>
+                </a:solidFill>
+                <a:latin typeface="Calibri" pitchFamily="34" charset="0"/>
+                <a:ea typeface="Calibri" pitchFamily="34" charset="-122"/>
+                <a:cs typeface="Calibri" pitchFamily="34" charset="-120"/>
+              </a:rPr>
+              <a:t>the</a:t>
+            </a:r>
+            <a:pPr indent="0" marL="0">
+              <a:buNone/>
+            </a:pPr>
+            <a:r>
+              <a:rPr lang="en-US" sz="1700" dirty="0">
+                <a:solidFill>
+                  <a:srgbClr val="1E293B"/>
+                </a:solidFill>
+                <a:latin typeface="Calibri" pitchFamily="34" charset="0"/>
+                <a:ea typeface="Calibri" pitchFamily="34" charset="-122"/>
+                <a:cs typeface="Calibri" pitchFamily="34" charset="-120"/>
+              </a:rPr>
+              <a:t> </a:t>
+            </a:r>
+            <a:pPr indent="0" marL="0">
+              <a:buNone/>
+            </a:pPr>
+            <a:r>
+              <a:rPr lang="en-US" sz="1700" dirty="0">
+                <a:solidFill>
+                  <a:srgbClr val="1E293B"/>
+                </a:solidFill>
+                <a:latin typeface="Calibri" pitchFamily="34" charset="0"/>
+                <a:ea typeface="Calibri" pitchFamily="34" charset="-122"/>
+                <a:cs typeface="Calibri" pitchFamily="34" charset="-120"/>
+              </a:rPr>
+              <a:t>Head</a:t>
+            </a:r>
+            <a:pPr indent="0" marL="0">
+              <a:buNone/>
+            </a:pPr>
+            <a:r>
+              <a:rPr lang="en-US" sz="1700" dirty="0">
+                <a:solidFill>
+                  <a:srgbClr val="1E293B"/>
+                </a:solidFill>
+                <a:latin typeface="Calibri" pitchFamily="34" charset="0"/>
+                <a:ea typeface="Calibri" pitchFamily="34" charset="-122"/>
+                <a:cs typeface="Calibri" pitchFamily="34" charset="-120"/>
+              </a:rPr>
+              <a:t> </a:t>
+            </a:r>
+            <a:pPr indent="0" marL="0">
+              <a:buNone/>
+            </a:pPr>
+            <a:r>
+              <a:rPr lang="en-US" sz="1700" dirty="0">
+                <a:solidFill>
+                  <a:srgbClr val="1E293B"/>
+                </a:solidFill>
+                <a:latin typeface="Calibri" pitchFamily="34" charset="0"/>
+                <a:ea typeface="Calibri" pitchFamily="34" charset="-122"/>
+                <a:cs typeface="Calibri" pitchFamily="34" charset="-120"/>
+              </a:rPr>
+              <a:t>Mouse.</a:t>
+            </a:r>
+            <a:endParaRPr lang="en-US" sz="1700" dirty="0"/>
+          </a:p>
+        </p:txBody>
+      </p:sp>
+      <p:sp>
+        <p:nvSpPr>
+          <p:cNvPr id="9" name="Shape 7"/>
+          <p:cNvSpPr/>
+          <p:nvPr/>
+        </p:nvSpPr>
+        <p:spPr>
+          <a:xfrm>
+            <a:off x="365760" y="2212848"/>
             <a:ext cx="8412480" cy="658368"/>
           </a:xfrm>
           <a:prstGeom prst="roundRect">
@@ -3509,7 +4039,12 @@
           <a:solidFill>
             <a:srgbClr val="FFFFFF"/>
           </a:solidFill>
-          <a:ln/>
+          <a:ln w="19050">
+            <a:solidFill>
+              <a:srgbClr val="C7922C"/>
+            </a:solidFill>
+            <a:prstDash val="solid"/>
+          </a:ln>
           <a:effectLst>
             <a:outerShdw sx="100000" sy="100000" kx="0" ky="0" algn="bl" rotWithShape="0" blurRad="101600" dist="38100" dir="2700000">
               <a:srgbClr val="000000">
@@ -3521,14 +4056,14 @@
       </p:sp>
       <p:sp>
         <p:nvSpPr>
-          <p:cNvPr id="8" name="Text 6"/>
-          <p:cNvSpPr/>
-          <p:nvPr/>
-        </p:nvSpPr>
-        <p:spPr>
-          <a:xfrm>
-            <a:off x="594360" y="1956816"/>
-            <a:ext cx="7863840" cy="402336"/>
+          <p:cNvPr id="10" name="Text 8"/>
+          <p:cNvSpPr/>
+          <p:nvPr/>
+        </p:nvSpPr>
+        <p:spPr>
+          <a:xfrm>
+            <a:off x="594360" y="2340864"/>
+            <a:ext cx="7955280" cy="402336"/>
           </a:xfrm>
           <a:prstGeom prst="rect">
             <a:avLst/>
@@ -3543,24 +4078,122 @@
             <a:pPr indent="0" marL="0">
               <a:buNone/>
             </a:pPr>
-            <a:r>
-              <a:rPr lang="en-US" sz="1600" dirty="0">
-                <a:solidFill>
-                  <a:srgbClr val="1E293B"/>
-                </a:solidFill>
-                <a:latin typeface="Calibri" pitchFamily="34" charset="0"/>
-                <a:ea typeface="Calibri" pitchFamily="34" charset="-122"/>
-                <a:cs typeface="Calibri" pitchFamily="34" charset="-120"/>
-              </a:rPr>
-              <a:t>Mig </a:t>
-            </a:r>
-            <a:pPr indent="0" marL="0">
-              <a:buNone/>
-            </a:pPr>
-            <a:r>
-              <a:rPr lang="en-US" sz="1600" b="1" dirty="0">
-                <a:solidFill>
-                  <a:srgbClr val="34B76F"/>
+            <a:endParaRPr lang="en-US" sz="1700" dirty="0"/>
+          </a:p>
+        </p:txBody>
+      </p:sp>
+      <p:sp>
+        <p:nvSpPr>
+          <p:cNvPr id="11" name="Text 9"/>
+          <p:cNvSpPr/>
+          <p:nvPr/>
+        </p:nvSpPr>
+        <p:spPr>
+          <a:xfrm>
+            <a:off x="594360" y="2340864"/>
+            <a:ext cx="7955280" cy="402336"/>
+          </a:xfrm>
+          <a:prstGeom prst="rect">
+            <a:avLst/>
+          </a:prstGeom>
+          <a:noFill/>
+          <a:ln/>
+        </p:spPr>
+        <p:txBody>
+          <a:bodyPr wrap="square" lIns="0" tIns="0" rIns="0" bIns="0" rtlCol="0" anchor="ctr"/>
+          <a:lstStyle/>
+          <a:p>
+            <a:pPr indent="0" marL="0">
+              <a:buNone/>
+            </a:pPr>
+            <a:r>
+              <a:rPr lang="en-US" sz="1700" dirty="0">
+                <a:solidFill>
+                  <a:srgbClr val="1E293B"/>
+                </a:solidFill>
+                <a:latin typeface="Calibri" pitchFamily="34" charset="0"/>
+                <a:ea typeface="Calibri" pitchFamily="34" charset="-122"/>
+                <a:cs typeface="Calibri" pitchFamily="34" charset="-120"/>
+              </a:rPr>
+              <a:t>The</a:t>
+            </a:r>
+            <a:pPr indent="0" marL="0">
+              <a:buNone/>
+            </a:pPr>
+            <a:r>
+              <a:rPr lang="en-US" sz="1700" dirty="0">
+                <a:solidFill>
+                  <a:srgbClr val="1E293B"/>
+                </a:solidFill>
+                <a:latin typeface="Calibri" pitchFamily="34" charset="0"/>
+                <a:ea typeface="Calibri" pitchFamily="34" charset="-122"/>
+                <a:cs typeface="Calibri" pitchFamily="34" charset="-120"/>
+              </a:rPr>
+              <a:t> </a:t>
+            </a:r>
+            <a:pPr indent="0" marL="0">
+              <a:buNone/>
+            </a:pPr>
+            <a:r>
+              <a:rPr lang="en-US" sz="1700" dirty="0">
+                <a:solidFill>
+                  <a:srgbClr val="1E293B"/>
+                </a:solidFill>
+                <a:latin typeface="Calibri" pitchFamily="34" charset="0"/>
+                <a:ea typeface="Calibri" pitchFamily="34" charset="-122"/>
+                <a:cs typeface="Calibri" pitchFamily="34" charset="-120"/>
+              </a:rPr>
+              <a:t>Head</a:t>
+            </a:r>
+            <a:pPr indent="0" marL="0">
+              <a:buNone/>
+            </a:pPr>
+            <a:r>
+              <a:rPr lang="en-US" sz="1700" dirty="0">
+                <a:solidFill>
+                  <a:srgbClr val="1E293B"/>
+                </a:solidFill>
+                <a:latin typeface="Calibri" pitchFamily="34" charset="0"/>
+                <a:ea typeface="Calibri" pitchFamily="34" charset="-122"/>
+                <a:cs typeface="Calibri" pitchFamily="34" charset="-120"/>
+              </a:rPr>
+              <a:t> </a:t>
+            </a:r>
+            <a:pPr indent="0" marL="0">
+              <a:buNone/>
+            </a:pPr>
+            <a:r>
+              <a:rPr lang="en-US" sz="1700" dirty="0">
+                <a:solidFill>
+                  <a:srgbClr val="1E293B"/>
+                </a:solidFill>
+                <a:latin typeface="Calibri" pitchFamily="34" charset="0"/>
+                <a:ea typeface="Calibri" pitchFamily="34" charset="-122"/>
+                <a:cs typeface="Calibri" pitchFamily="34" charset="-120"/>
+              </a:rPr>
+              <a:t>Mouse</a:t>
+            </a:r>
+            <a:pPr indent="0" marL="0">
+              <a:buNone/>
+            </a:pPr>
+            <a:r>
+              <a:rPr lang="en-US" sz="1700" dirty="0">
+                <a:solidFill>
+                  <a:srgbClr val="1E293B"/>
+                </a:solidFill>
+                <a:latin typeface="Calibri" pitchFamily="34" charset="0"/>
+                <a:ea typeface="Calibri" pitchFamily="34" charset="-122"/>
+                <a:cs typeface="Calibri" pitchFamily="34" charset="-120"/>
+              </a:rPr>
+              <a:t> </a:t>
+            </a:r>
+            <a:pPr indent="0" marL="0">
+              <a:buNone/>
+            </a:pPr>
+            <a:r>
+              <a:rPr lang="en-US" sz="1700" dirty="0">
+                <a:solidFill>
+                  <a:srgbClr val="1E293B"/>
                 </a:solidFill>
                 <a:latin typeface="Calibri" pitchFamily="34" charset="0"/>
                 <a:ea typeface="Calibri" pitchFamily="34" charset="-122"/>
@@ -3572,59 +4205,184 @@
               <a:buNone/>
             </a:pPr>
             <a:r>
-              <a:rPr lang="en-US" sz="1600" dirty="0">
-                <a:solidFill>
-                  <a:srgbClr val="1E293B"/>
-                </a:solidFill>
-                <a:latin typeface="Calibri" pitchFamily="34" charset="0"/>
-                <a:ea typeface="Calibri" pitchFamily="34" charset="-122"/>
-                <a:cs typeface="Calibri" pitchFamily="34" charset="-120"/>
-              </a:rPr>
-              <a:t> “I want to be a princess.”</a:t>
-            </a:r>
-            <a:endParaRPr lang="en-US" sz="1600" dirty="0"/>
-          </a:p>
-        </p:txBody>
-      </p:sp>
-      <p:sp>
-        <p:nvSpPr>
-          <p:cNvPr id="9" name="Shape 7"/>
-          <p:cNvSpPr/>
-          <p:nvPr/>
-        </p:nvSpPr>
-        <p:spPr>
-          <a:xfrm>
-            <a:off x="365760" y="2542032"/>
-            <a:ext cx="8412480" cy="658368"/>
-          </a:xfrm>
-          <a:prstGeom prst="roundRect">
-            <a:avLst>
-              <a:gd name="adj" fmla="val 13889"/>
-            </a:avLst>
-          </a:prstGeom>
-          <a:solidFill>
-            <a:srgbClr val="FEF6E8"/>
-          </a:solidFill>
-          <a:ln/>
-          <a:effectLst>
-            <a:outerShdw sx="100000" sy="100000" kx="0" ky="0" algn="bl" rotWithShape="0" blurRad="101600" dist="38100" dir="2700000">
-              <a:srgbClr val="000000">
-                <a:alpha val="12000"/>
-              </a:srgbClr>
-            </a:outerShdw>
-          </a:effectLst>
-        </p:spPr>
-      </p:sp>
-      <p:sp>
-        <p:nvSpPr>
-          <p:cNvPr id="10" name="Text 8"/>
-          <p:cNvSpPr/>
-          <p:nvPr/>
-        </p:nvSpPr>
-        <p:spPr>
-          <a:xfrm>
-            <a:off x="594360" y="2688336"/>
-            <a:ext cx="7863840" cy="402336"/>
+              <a:rPr lang="en-US" sz="1700" dirty="0">
+                <a:solidFill>
+                  <a:srgbClr val="1E293B"/>
+                </a:solidFill>
+                <a:latin typeface="Calibri" pitchFamily="34" charset="0"/>
+                <a:ea typeface="Calibri" pitchFamily="34" charset="-122"/>
+                <a:cs typeface="Calibri" pitchFamily="34" charset="-120"/>
+              </a:rPr>
+              <a:t> </a:t>
+            </a:r>
+            <a:pPr indent="0" marL="0">
+              <a:buNone/>
+            </a:pPr>
+            <a:r>
+              <a:rPr lang="en-US" sz="1700" dirty="0">
+                <a:solidFill>
+                  <a:srgbClr val="1E293B"/>
+                </a:solidFill>
+                <a:latin typeface="Calibri" pitchFamily="34" charset="0"/>
+                <a:ea typeface="Calibri" pitchFamily="34" charset="-122"/>
+                <a:cs typeface="Calibri" pitchFamily="34" charset="-120"/>
+              </a:rPr>
+              <a:t>“Straight</a:t>
+            </a:r>
+            <a:pPr indent="0" marL="0">
+              <a:buNone/>
+            </a:pPr>
+            <a:r>
+              <a:rPr lang="en-US" sz="1700" dirty="0">
+                <a:solidFill>
+                  <a:srgbClr val="1E293B"/>
+                </a:solidFill>
+                <a:latin typeface="Calibri" pitchFamily="34" charset="0"/>
+                <a:ea typeface="Calibri" pitchFamily="34" charset="-122"/>
+                <a:cs typeface="Calibri" pitchFamily="34" charset="-120"/>
+              </a:rPr>
+              <a:t> </a:t>
+            </a:r>
+            <a:pPr indent="0" marL="0">
+              <a:buNone/>
+            </a:pPr>
+            <a:r>
+              <a:rPr lang="en-US" sz="1700" dirty="0">
+                <a:solidFill>
+                  <a:srgbClr val="1E293B"/>
+                </a:solidFill>
+                <a:latin typeface="Calibri" pitchFamily="34" charset="0"/>
+                <a:ea typeface="Calibri" pitchFamily="34" charset="-122"/>
+                <a:cs typeface="Calibri" pitchFamily="34" charset="-120"/>
+              </a:rPr>
+              <a:t>to</a:t>
+            </a:r>
+            <a:pPr indent="0" marL="0">
+              <a:buNone/>
+            </a:pPr>
+            <a:r>
+              <a:rPr lang="en-US" sz="1700" dirty="0">
+                <a:solidFill>
+                  <a:srgbClr val="1E293B"/>
+                </a:solidFill>
+                <a:latin typeface="Calibri" pitchFamily="34" charset="0"/>
+                <a:ea typeface="Calibri" pitchFamily="34" charset="-122"/>
+                <a:cs typeface="Calibri" pitchFamily="34" charset="-120"/>
+              </a:rPr>
+              <a:t> </a:t>
+            </a:r>
+            <a:pPr indent="0" marL="0">
+              <a:buNone/>
+            </a:pPr>
+            <a:r>
+              <a:rPr lang="en-US" sz="1700" dirty="0">
+                <a:solidFill>
+                  <a:srgbClr val="1E293B"/>
+                </a:solidFill>
+                <a:latin typeface="Calibri" pitchFamily="34" charset="0"/>
+                <a:ea typeface="Calibri" pitchFamily="34" charset="-122"/>
+                <a:cs typeface="Calibri" pitchFamily="34" charset="-120"/>
+              </a:rPr>
+              <a:t>the</a:t>
+            </a:r>
+            <a:pPr indent="0" marL="0">
+              <a:buNone/>
+            </a:pPr>
+            <a:r>
+              <a:rPr lang="en-US" sz="1700" dirty="0">
+                <a:solidFill>
+                  <a:srgbClr val="1E293B"/>
+                </a:solidFill>
+                <a:latin typeface="Calibri" pitchFamily="34" charset="0"/>
+                <a:ea typeface="Calibri" pitchFamily="34" charset="-122"/>
+                <a:cs typeface="Calibri" pitchFamily="34" charset="-120"/>
+              </a:rPr>
+              <a:t> </a:t>
+            </a:r>
+            <a:pPr indent="0" marL="0">
+              <a:buNone/>
+            </a:pPr>
+            <a:r>
+              <a:rPr lang="en-US" sz="1700" dirty="0">
+                <a:solidFill>
+                  <a:srgbClr val="1E293B"/>
+                </a:solidFill>
+                <a:latin typeface="Calibri" pitchFamily="34" charset="0"/>
+                <a:ea typeface="Calibri" pitchFamily="34" charset="-122"/>
+                <a:cs typeface="Calibri" pitchFamily="34" charset="-120"/>
+              </a:rPr>
+              <a:t>dungeon</a:t>
+            </a:r>
+            <a:pPr indent="0" marL="0">
+              <a:buNone/>
+            </a:pPr>
+            <a:r>
+              <a:rPr lang="en-US" sz="1700" dirty="0">
+                <a:solidFill>
+                  <a:srgbClr val="1E293B"/>
+                </a:solidFill>
+                <a:latin typeface="Calibri" pitchFamily="34" charset="0"/>
+                <a:ea typeface="Calibri" pitchFamily="34" charset="-122"/>
+                <a:cs typeface="Calibri" pitchFamily="34" charset="-120"/>
+              </a:rPr>
+              <a:t> </a:t>
+            </a:r>
+            <a:pPr indent="0" marL="0">
+              <a:buNone/>
+            </a:pPr>
+            <a:r>
+              <a:rPr lang="en-US" sz="1700" dirty="0">
+                <a:solidFill>
+                  <a:srgbClr val="1E293B"/>
+                </a:solidFill>
+                <a:latin typeface="Calibri" pitchFamily="34" charset="0"/>
+                <a:ea typeface="Calibri" pitchFamily="34" charset="-122"/>
+                <a:cs typeface="Calibri" pitchFamily="34" charset="-120"/>
+              </a:rPr>
+              <a:t>with</a:t>
+            </a:r>
+            <a:pPr indent="0" marL="0">
+              <a:buNone/>
+            </a:pPr>
+            <a:r>
+              <a:rPr lang="en-US" sz="1700" dirty="0">
+                <a:solidFill>
+                  <a:srgbClr val="1E293B"/>
+                </a:solidFill>
+                <a:latin typeface="Calibri" pitchFamily="34" charset="0"/>
+                <a:ea typeface="Calibri" pitchFamily="34" charset="-122"/>
+                <a:cs typeface="Calibri" pitchFamily="34" charset="-120"/>
+              </a:rPr>
+              <a:t> </a:t>
+            </a:r>
+            <a:pPr indent="0" marL="0">
+              <a:buNone/>
+            </a:pPr>
+            <a:r>
+              <a:rPr lang="en-US" sz="1700" dirty="0">
+                <a:solidFill>
+                  <a:srgbClr val="1E293B"/>
+                </a:solidFill>
+                <a:latin typeface="Calibri" pitchFamily="34" charset="0"/>
+                <a:ea typeface="Calibri" pitchFamily="34" charset="-122"/>
+                <a:cs typeface="Calibri" pitchFamily="34" charset="-120"/>
+              </a:rPr>
+              <a:t>him.”</a:t>
+            </a:r>
+            <a:endParaRPr lang="en-US" sz="1700" dirty="0"/>
+          </a:p>
+        </p:txBody>
+      </p:sp>
+      <p:sp>
+        <p:nvSpPr>
+          <p:cNvPr id="12" name="Text 10"/>
+          <p:cNvSpPr/>
+          <p:nvPr/>
+        </p:nvSpPr>
+        <p:spPr>
+          <a:xfrm>
+            <a:off x="365760" y="3008376"/>
+            <a:ext cx="8229600" cy="237744"/>
           </a:xfrm>
           <a:prstGeom prst="rect">
             <a:avLst/>
@@ -3640,141 +4398,17 @@
               <a:buNone/>
             </a:pPr>
             <a:r>
-              <a:rPr lang="en-US" sz="1600" dirty="0">
-                <a:solidFill>
-                  <a:srgbClr val="1E293B"/>
-                </a:solidFill>
-                <a:latin typeface="Calibri" pitchFamily="34" charset="0"/>
-                <a:ea typeface="Calibri" pitchFamily="34" charset="-122"/>
-                <a:cs typeface="Calibri" pitchFamily="34" charset="-120"/>
-              </a:rPr>
-              <a:t>“I am </a:t>
-            </a:r>
-            <a:pPr indent="0" marL="0">
-              <a:buNone/>
-            </a:pPr>
-            <a:r>
-              <a:rPr lang="en-US" sz="1600" b="1" dirty="0">
-                <a:solidFill>
-                  <a:srgbClr val="34B76F"/>
-                </a:solidFill>
-                <a:latin typeface="Calibri" pitchFamily="34" charset="0"/>
-                <a:ea typeface="Calibri" pitchFamily="34" charset="-122"/>
-                <a:cs typeface="Calibri" pitchFamily="34" charset="-120"/>
-              </a:rPr>
-              <a:t>hungry,”</a:t>
-            </a:r>
-            <a:pPr indent="0" marL="0">
-              <a:buNone/>
-            </a:pPr>
-            <a:r>
-              <a:rPr lang="en-US" sz="1600" dirty="0">
-                <a:solidFill>
-                  <a:srgbClr val="1E293B"/>
-                </a:solidFill>
-                <a:latin typeface="Calibri" pitchFamily="34" charset="0"/>
-                <a:ea typeface="Calibri" pitchFamily="34" charset="-122"/>
-                <a:cs typeface="Calibri" pitchFamily="34" charset="-120"/>
-              </a:rPr>
-              <a:t> the prince said.</a:t>
-            </a:r>
-            <a:endParaRPr lang="en-US" sz="1600" dirty="0"/>
-          </a:p>
-        </p:txBody>
-      </p:sp>
-      <p:sp>
-        <p:nvSpPr>
-          <p:cNvPr id="11" name="Shape 9"/>
-          <p:cNvSpPr/>
-          <p:nvPr/>
-        </p:nvSpPr>
-        <p:spPr>
-          <a:xfrm>
-            <a:off x="365760" y="3273552"/>
-            <a:ext cx="8412480" cy="658368"/>
-          </a:xfrm>
-          <a:prstGeom prst="roundRect">
-            <a:avLst>
-              <a:gd name="adj" fmla="val 13889"/>
-            </a:avLst>
-          </a:prstGeom>
-          <a:solidFill>
-            <a:srgbClr val="FFFFFF"/>
-          </a:solidFill>
-          <a:ln/>
-          <a:effectLst>
-            <a:outerShdw sx="100000" sy="100000" kx="0" ky="0" algn="bl" rotWithShape="0" blurRad="101600" dist="38100" dir="2700000">
-              <a:srgbClr val="000000">
-                <a:alpha val="12000"/>
-              </a:srgbClr>
-            </a:outerShdw>
-          </a:effectLst>
-        </p:spPr>
-      </p:sp>
-      <p:sp>
-        <p:nvSpPr>
-          <p:cNvPr id="12" name="Text 10"/>
-          <p:cNvSpPr/>
-          <p:nvPr/>
-        </p:nvSpPr>
-        <p:spPr>
-          <a:xfrm>
-            <a:off x="594360" y="3419856"/>
-            <a:ext cx="7863840" cy="402336"/>
-          </a:xfrm>
-          <a:prstGeom prst="rect">
-            <a:avLst/>
-          </a:prstGeom>
-          <a:noFill/>
-          <a:ln/>
-        </p:spPr>
-        <p:txBody>
-          <a:bodyPr wrap="square" lIns="0" tIns="0" rIns="0" bIns="0" rtlCol="0" anchor="ctr"/>
-          <a:lstStyle/>
-          <a:p>
-            <a:pPr indent="0" marL="0">
-              <a:buNone/>
-            </a:pPr>
-            <a:r>
-              <a:rPr lang="en-US" sz="1600" dirty="0">
-                <a:solidFill>
-                  <a:srgbClr val="1E293B"/>
-                </a:solidFill>
-                <a:latin typeface="Calibri" pitchFamily="34" charset="0"/>
-                <a:ea typeface="Calibri" pitchFamily="34" charset="-122"/>
-                <a:cs typeface="Calibri" pitchFamily="34" charset="-120"/>
-              </a:rPr>
-              <a:t>Cook </a:t>
-            </a:r>
-            <a:pPr indent="0" marL="0">
-              <a:buNone/>
-            </a:pPr>
-            <a:r>
-              <a:rPr lang="en-US" sz="1600" b="1" dirty="0">
-                <a:solidFill>
-                  <a:srgbClr val="34B76F"/>
-                </a:solidFill>
-                <a:latin typeface="Calibri" pitchFamily="34" charset="0"/>
-                <a:ea typeface="Calibri" pitchFamily="34" charset="-122"/>
-                <a:cs typeface="Calibri" pitchFamily="34" charset="-120"/>
-              </a:rPr>
-              <a:t>said,</a:t>
-            </a:r>
-            <a:pPr indent="0" marL="0">
-              <a:buNone/>
-            </a:pPr>
-            <a:r>
-              <a:rPr lang="en-US" sz="1600" dirty="0">
-                <a:solidFill>
-                  <a:srgbClr val="1E293B"/>
-                </a:solidFill>
-                <a:latin typeface="Calibri" pitchFamily="34" charset="0"/>
-                <a:ea typeface="Calibri" pitchFamily="34" charset="-122"/>
-                <a:cs typeface="Calibri" pitchFamily="34" charset="-120"/>
-              </a:rPr>
-              <a:t> “That is soup you are smelling.”</a:t>
-            </a:r>
-            <a:endParaRPr lang="en-US" sz="1600" dirty="0"/>
+              <a:rPr lang="en-US" sz="1100" b="1" spc="100" kern="0" dirty="0">
+                <a:solidFill>
+                  <a:srgbClr val="C7922C"/>
+                </a:solidFill>
+                <a:latin typeface="Calibri" pitchFamily="34" charset="0"/>
+                <a:ea typeface="Calibri" pitchFamily="34" charset="-122"/>
+                <a:cs typeface="Calibri" pitchFamily="34" charset="-120"/>
+              </a:rPr>
+              <a:t>THINK IT THROUGH</a:t>
+            </a:r>
+            <a:endParaRPr lang="en-US" sz="1100" dirty="0"/>
           </a:p>
         </p:txBody>
       </p:sp>
@@ -3786,34 +4420,68 @@
         </p:nvSpPr>
         <p:spPr>
           <a:xfrm>
-            <a:off x="365760" y="4050792"/>
-            <a:ext cx="8412480" cy="365760"/>
-          </a:xfrm>
-          <a:prstGeom prst="rect">
-            <a:avLst/>
-          </a:prstGeom>
-          <a:noFill/>
-          <a:ln/>
-        </p:spPr>
-        <p:txBody>
-          <a:bodyPr wrap="square" lIns="0" tIns="0" rIns="0" bIns="0" rtlCol="0" anchor="ctr"/>
-          <a:lstStyle/>
-          <a:p>
-            <a:pPr indent="0" marL="0">
-              <a:buNone/>
-            </a:pPr>
-            <a:r>
-              <a:rPr lang="en-US" sz="1500" b="1" dirty="0">
-                <a:solidFill>
-                  <a:srgbClr val="34B76F"/>
-                </a:solidFill>
-                <a:latin typeface="Calibri" pitchFamily="34" charset="0"/>
-                <a:ea typeface="Calibri" pitchFamily="34" charset="-122"/>
-                <a:cs typeface="Calibri" pitchFamily="34" charset="-120"/>
-              </a:rPr>
-              <a:t>✅  Answers revealed</a:t>
-            </a:r>
-            <a:endParaRPr lang="en-US" sz="1500" dirty="0"/>
+            <a:off x="365760" y="3255264"/>
+            <a:ext cx="8412480" cy="1563624"/>
+          </a:xfrm>
+          <a:prstGeom prst="rect">
+            <a:avLst/>
+          </a:prstGeom>
+          <a:noFill/>
+          <a:ln/>
+        </p:spPr>
+        <p:txBody>
+          <a:bodyPr wrap="square" lIns="0" tIns="0" rIns="0" bIns="0" rtlCol="0" anchor="t"/>
+          <a:lstStyle/>
+          <a:p>
+            <a:pPr indent="0" marL="0">
+              <a:buNone/>
+            </a:pPr>
+            <a:r>
+              <a:rPr lang="en-US" sz="1400" dirty="0">
+                <a:solidFill>
+                  <a:srgbClr val="1E293B"/>
+                </a:solidFill>
+                <a:latin typeface="Calibri" pitchFamily="34" charset="0"/>
+                <a:ea typeface="Calibri" pitchFamily="34" charset="-122"/>
+                <a:cs typeface="Calibri" pitchFamily="34" charset="-120"/>
+              </a:rPr>
+              <a:t>1.  Find the comma in each sentence. Is it inside the quotation marks or outside?</a:t>
+            </a:r>
+            <a:endParaRPr lang="en-US" sz="1400" dirty="0"/>
+          </a:p>
+          <a:p>
+            <a:pPr indent="0" marL="0">
+              <a:buNone/>
+            </a:pPr>
+            <a:r>
+              <a:rPr lang="en-US" sz="1400" dirty="0">
+                <a:solidFill>
+                  <a:srgbClr val="1E293B"/>
+                </a:solidFill>
+                <a:latin typeface="Calibri" pitchFamily="34" charset="0"/>
+                <a:ea typeface="Calibri" pitchFamily="34" charset="-122"/>
+                <a:cs typeface="Calibri" pitchFamily="34" charset="-120"/>
+              </a:rPr>
+              <a:t>2.  One of the sentences has a lowercase word right after a quotation mark. Why is it not capitalized?</a:t>
+            </a:r>
+            <a:endParaRPr lang="en-US" sz="1400" dirty="0"/>
+          </a:p>
+          <a:p>
+            <a:pPr indent="0" marL="0">
+              <a:buNone/>
+            </a:pPr>
+            <a:r>
+              <a:rPr lang="en-US" sz="1400" dirty="0">
+                <a:solidFill>
+                  <a:srgbClr val="1E293B"/>
+                </a:solidFill>
+                <a:latin typeface="Calibri" pitchFamily="34" charset="0"/>
+                <a:ea typeface="Calibri" pitchFamily="34" charset="-122"/>
+                <a:cs typeface="Calibri" pitchFamily="34" charset="-120"/>
+              </a:rPr>
+              <a:t>3.  What has to change when the speaker's name moves to the front?</a:t>
+            </a:r>
+            <a:endParaRPr lang="en-US" sz="1400" dirty="0"/>
           </a:p>
         </p:txBody>
       </p:sp>
@@ -3864,7 +4532,7 @@
             <a:avLst/>
           </a:prstGeom>
           <a:solidFill>
-            <a:srgbClr val="0E1C42"/>
+            <a:srgbClr val="C7922C"/>
           </a:solidFill>
           <a:ln/>
         </p:spPr>
@@ -3902,7 +4570,7 @@
                 <a:ea typeface="Calibri" pitchFamily="34" charset="-122"/>
                 <a:cs typeface="Calibri" pitchFamily="34" charset="-120"/>
               </a:rPr>
-              <a:t>🔠  Spelling</a:t>
+              <a:t>✏️  Grammar — What do you notice?</a:t>
             </a:r>
             <a:endParaRPr lang="en-US" sz="2200" dirty="0"/>
           </a:p>
@@ -3916,7 +4584,7 @@
         </p:nvSpPr>
         <p:spPr>
           <a:xfrm>
-            <a:off x="365760" y="777240"/>
+            <a:off x="365760" y="749808"/>
             <a:ext cx="8229600" cy="237744"/>
           </a:xfrm>
           <a:prstGeom prst="rect">
@@ -3935,13 +4603,13 @@
             <a:r>
               <a:rPr lang="en-US" sz="1100" b="1" spc="100" kern="0" dirty="0">
                 <a:solidFill>
-                  <a:srgbClr val="0E1C42"/>
-                </a:solidFill>
-                <a:latin typeface="Calibri" pitchFamily="34" charset="0"/>
-                <a:ea typeface="Calibri" pitchFamily="34" charset="-122"/>
-                <a:cs typeface="Calibri" pitchFamily="34" charset="-120"/>
-              </a:rPr>
-              <a:t>POSSESSIVES AND PLURALS</a:t>
+                  <a:srgbClr val="C7922C"/>
+                </a:solidFill>
+                <a:latin typeface="Calibri" pitchFamily="34" charset="0"/>
+                <a:ea typeface="Calibri" pitchFamily="34" charset="-122"/>
+                <a:cs typeface="Calibri" pitchFamily="34" charset="-120"/>
+              </a:rPr>
+              <a:t>PUNCTUATING DIALOGUE</a:t>
             </a:r>
             <a:endParaRPr lang="en-US" sz="1100" dirty="0"/>
           </a:p>
@@ -3955,8 +4623,8 @@
         </p:nvSpPr>
         <p:spPr>
           <a:xfrm>
-            <a:off x="365760" y="1078992"/>
-            <a:ext cx="8229600" cy="237744"/>
+            <a:off x="365760" y="987552"/>
+            <a:ext cx="8412480" cy="411480"/>
           </a:xfrm>
           <a:prstGeom prst="rect">
             <a:avLst/>
@@ -3972,7 +4640,7 @@
               <a:buNone/>
             </a:pPr>
             <a:r>
-              <a:rPr lang="en-US" sz="1100" b="1" spc="100" kern="0" dirty="0">
+              <a:rPr lang="en-US" sz="1500" i="1" dirty="0">
                 <a:solidFill>
                   <a:srgbClr val="64748B"/>
                 </a:solidFill>
@@ -3980,9 +4648,9 @@
                 <a:ea typeface="Calibri" pitchFamily="34" charset="-122"/>
                 <a:cs typeface="Calibri" pitchFamily="34" charset="-120"/>
               </a:rPr>
-              <a:t>WORD BANK</a:t>
-            </a:r>
-            <a:endParaRPr lang="en-US" sz="1100" dirty="0"/>
+              <a:t>Both sentences say the same thing. The author punctuated them differently. Look at the marks, not the words.</a:t>
+            </a:r>
+            <a:endParaRPr lang="en-US" sz="1500" dirty="0"/>
           </a:p>
         </p:txBody>
       </p:sp>
@@ -3994,20 +4662,20 @@
         </p:nvSpPr>
         <p:spPr>
           <a:xfrm>
-            <a:off x="365760" y="1353312"/>
-            <a:ext cx="8412480" cy="1005840"/>
+            <a:off x="365760" y="1463040"/>
+            <a:ext cx="8412480" cy="658368"/>
           </a:xfrm>
           <a:prstGeom prst="roundRect">
             <a:avLst>
-              <a:gd name="adj" fmla="val 9091"/>
+              <a:gd name="adj" fmla="val 13889"/>
             </a:avLst>
           </a:prstGeom>
           <a:solidFill>
-            <a:srgbClr val="FFFFFF"/>
+            <a:srgbClr val="FEF6E8"/>
           </a:solidFill>
           <a:ln w="19050">
             <a:solidFill>
-              <a:srgbClr val="0E1C42"/>
+              <a:srgbClr val="C7922C"/>
             </a:solidFill>
             <a:prstDash val="solid"/>
           </a:ln>
@@ -4028,8 +4696,8 @@
         </p:nvSpPr>
         <p:spPr>
           <a:xfrm>
-            <a:off x="594360" y="1481328"/>
-            <a:ext cx="7955280" cy="749808"/>
+            <a:off x="594360" y="1591056"/>
+            <a:ext cx="7955280" cy="402336"/>
           </a:xfrm>
           <a:prstGeom prst="rect">
             <a:avLst/>
@@ -4044,16 +4712,296 @@
             <a:pPr indent="0" marL="0">
               <a:buNone/>
             </a:pPr>
+            <a:endParaRPr lang="en-US" sz="1700" dirty="0"/>
+          </a:p>
+        </p:txBody>
+      </p:sp>
+      <p:sp>
+        <p:nvSpPr>
+          <p:cNvPr id="8" name="Text 6"/>
+          <p:cNvSpPr/>
+          <p:nvPr/>
+        </p:nvSpPr>
+        <p:spPr>
+          <a:xfrm>
+            <a:off x="594360" y="1591056"/>
+            <a:ext cx="7955280" cy="402336"/>
+          </a:xfrm>
+          <a:prstGeom prst="rect">
+            <a:avLst/>
+          </a:prstGeom>
+          <a:noFill/>
+          <a:ln/>
+        </p:spPr>
+        <p:txBody>
+          <a:bodyPr wrap="square" lIns="0" tIns="0" rIns="0" bIns="0" rtlCol="0" anchor="ctr"/>
+          <a:lstStyle/>
+          <a:p>
+            <a:pPr indent="0" marL="0">
+              <a:buNone/>
+            </a:pPr>
             <a:r>
               <a:rPr lang="en-US" sz="1700" dirty="0">
                 <a:solidFill>
-                  <a:srgbClr val="0E1C42"/>
-                </a:solidFill>
-                <a:latin typeface="Calibri" pitchFamily="34" charset="0"/>
-                <a:ea typeface="Calibri" pitchFamily="34" charset="-122"/>
-                <a:cs typeface="Calibri" pitchFamily="34" charset="-120"/>
-              </a:rPr>
-              <a:t>mice   ·   spoons   ·   rats   ·   candles   ·   mice's   ·   mouse's   ·   king's   ·   princess's</a:t>
+                  <a:srgbClr val="1E293B"/>
+                </a:solidFill>
+                <a:latin typeface="Calibri" pitchFamily="34" charset="0"/>
+                <a:ea typeface="Calibri" pitchFamily="34" charset="-122"/>
+                <a:cs typeface="Calibri" pitchFamily="34" charset="-120"/>
+              </a:rPr>
+              <a:t>“Straight</a:t>
+            </a:r>
+            <a:pPr indent="0" marL="0">
+              <a:buNone/>
+            </a:pPr>
+            <a:r>
+              <a:rPr lang="en-US" sz="1700" dirty="0">
+                <a:solidFill>
+                  <a:srgbClr val="1E293B"/>
+                </a:solidFill>
+                <a:latin typeface="Calibri" pitchFamily="34" charset="0"/>
+                <a:ea typeface="Calibri" pitchFamily="34" charset="-122"/>
+                <a:cs typeface="Calibri" pitchFamily="34" charset="-120"/>
+              </a:rPr>
+              <a:t> </a:t>
+            </a:r>
+            <a:pPr indent="0" marL="0">
+              <a:buNone/>
+            </a:pPr>
+            <a:r>
+              <a:rPr lang="en-US" sz="1700" dirty="0">
+                <a:solidFill>
+                  <a:srgbClr val="1E293B"/>
+                </a:solidFill>
+                <a:latin typeface="Calibri" pitchFamily="34" charset="0"/>
+                <a:ea typeface="Calibri" pitchFamily="34" charset="-122"/>
+                <a:cs typeface="Calibri" pitchFamily="34" charset="-120"/>
+              </a:rPr>
+              <a:t>to</a:t>
+            </a:r>
+            <a:pPr indent="0" marL="0">
+              <a:buNone/>
+            </a:pPr>
+            <a:r>
+              <a:rPr lang="en-US" sz="1700" dirty="0">
+                <a:solidFill>
+                  <a:srgbClr val="1E293B"/>
+                </a:solidFill>
+                <a:latin typeface="Calibri" pitchFamily="34" charset="0"/>
+                <a:ea typeface="Calibri" pitchFamily="34" charset="-122"/>
+                <a:cs typeface="Calibri" pitchFamily="34" charset="-120"/>
+              </a:rPr>
+              <a:t> </a:t>
+            </a:r>
+            <a:pPr indent="0" marL="0">
+              <a:buNone/>
+            </a:pPr>
+            <a:r>
+              <a:rPr lang="en-US" sz="1700" dirty="0">
+                <a:solidFill>
+                  <a:srgbClr val="1E293B"/>
+                </a:solidFill>
+                <a:latin typeface="Calibri" pitchFamily="34" charset="0"/>
+                <a:ea typeface="Calibri" pitchFamily="34" charset="-122"/>
+                <a:cs typeface="Calibri" pitchFamily="34" charset="-120"/>
+              </a:rPr>
+              <a:t>the</a:t>
+            </a:r>
+            <a:pPr indent="0" marL="0">
+              <a:buNone/>
+            </a:pPr>
+            <a:r>
+              <a:rPr lang="en-US" sz="1700" dirty="0">
+                <a:solidFill>
+                  <a:srgbClr val="1E293B"/>
+                </a:solidFill>
+                <a:latin typeface="Calibri" pitchFamily="34" charset="0"/>
+                <a:ea typeface="Calibri" pitchFamily="34" charset="-122"/>
+                <a:cs typeface="Calibri" pitchFamily="34" charset="-120"/>
+              </a:rPr>
+              <a:t> </a:t>
+            </a:r>
+            <a:pPr indent="0" marL="0">
+              <a:buNone/>
+            </a:pPr>
+            <a:r>
+              <a:rPr lang="en-US" sz="1700" dirty="0">
+                <a:solidFill>
+                  <a:srgbClr val="1E293B"/>
+                </a:solidFill>
+                <a:latin typeface="Calibri" pitchFamily="34" charset="0"/>
+                <a:ea typeface="Calibri" pitchFamily="34" charset="-122"/>
+                <a:cs typeface="Calibri" pitchFamily="34" charset="-120"/>
+              </a:rPr>
+              <a:t>dungeon</a:t>
+            </a:r>
+            <a:pPr indent="0" marL="0">
+              <a:buNone/>
+            </a:pPr>
+            <a:r>
+              <a:rPr lang="en-US" sz="1700" dirty="0">
+                <a:solidFill>
+                  <a:srgbClr val="1E293B"/>
+                </a:solidFill>
+                <a:latin typeface="Calibri" pitchFamily="34" charset="0"/>
+                <a:ea typeface="Calibri" pitchFamily="34" charset="-122"/>
+                <a:cs typeface="Calibri" pitchFamily="34" charset="-120"/>
+              </a:rPr>
+              <a:t> </a:t>
+            </a:r>
+            <a:pPr indent="0" marL="0">
+              <a:buNone/>
+            </a:pPr>
+            <a:r>
+              <a:rPr lang="en-US" sz="1700" dirty="0">
+                <a:solidFill>
+                  <a:srgbClr val="1E293B"/>
+                </a:solidFill>
+                <a:latin typeface="Calibri" pitchFamily="34" charset="0"/>
+                <a:ea typeface="Calibri" pitchFamily="34" charset="-122"/>
+                <a:cs typeface="Calibri" pitchFamily="34" charset="-120"/>
+              </a:rPr>
+              <a:t>with</a:t>
+            </a:r>
+            <a:pPr indent="0" marL="0">
+              <a:buNone/>
+            </a:pPr>
+            <a:r>
+              <a:rPr lang="en-US" sz="1700" dirty="0">
+                <a:solidFill>
+                  <a:srgbClr val="1E293B"/>
+                </a:solidFill>
+                <a:latin typeface="Calibri" pitchFamily="34" charset="0"/>
+                <a:ea typeface="Calibri" pitchFamily="34" charset="-122"/>
+                <a:cs typeface="Calibri" pitchFamily="34" charset="-120"/>
+              </a:rPr>
+              <a:t> </a:t>
+            </a:r>
+            <a:pPr indent="0" marL="0">
+              <a:buNone/>
+            </a:pPr>
+            <a:r>
+              <a:rPr lang="en-US" sz="1700" dirty="0">
+                <a:solidFill>
+                  <a:srgbClr val="1E293B"/>
+                </a:solidFill>
+                <a:latin typeface="Calibri" pitchFamily="34" charset="0"/>
+                <a:ea typeface="Calibri" pitchFamily="34" charset="-122"/>
+                <a:cs typeface="Calibri" pitchFamily="34" charset="-120"/>
+              </a:rPr>
+              <a:t>him,”</a:t>
+            </a:r>
+            <a:pPr indent="0" marL="0">
+              <a:buNone/>
+            </a:pPr>
+            <a:r>
+              <a:rPr lang="en-US" sz="1700" dirty="0">
+                <a:solidFill>
+                  <a:srgbClr val="1E293B"/>
+                </a:solidFill>
+                <a:latin typeface="Calibri" pitchFamily="34" charset="0"/>
+                <a:ea typeface="Calibri" pitchFamily="34" charset="-122"/>
+                <a:cs typeface="Calibri" pitchFamily="34" charset="-120"/>
+              </a:rPr>
+              <a:t> </a:t>
+            </a:r>
+            <a:pPr indent="0" marL="0">
+              <a:buNone/>
+            </a:pPr>
+            <a:r>
+              <a:rPr lang="en-US" sz="1700" dirty="0">
+                <a:solidFill>
+                  <a:srgbClr val="1E293B"/>
+                </a:solidFill>
+                <a:latin typeface="Calibri" pitchFamily="34" charset="0"/>
+                <a:ea typeface="Calibri" pitchFamily="34" charset="-122"/>
+                <a:cs typeface="Calibri" pitchFamily="34" charset="-120"/>
+              </a:rPr>
+              <a:t>said</a:t>
+            </a:r>
+            <a:pPr indent="0" marL="0">
+              <a:buNone/>
+            </a:pPr>
+            <a:r>
+              <a:rPr lang="en-US" sz="1700" dirty="0">
+                <a:solidFill>
+                  <a:srgbClr val="1E293B"/>
+                </a:solidFill>
+                <a:latin typeface="Calibri" pitchFamily="34" charset="0"/>
+                <a:ea typeface="Calibri" pitchFamily="34" charset="-122"/>
+                <a:cs typeface="Calibri" pitchFamily="34" charset="-120"/>
+              </a:rPr>
+              <a:t> </a:t>
+            </a:r>
+            <a:pPr indent="0" marL="0">
+              <a:buNone/>
+            </a:pPr>
+            <a:r>
+              <a:rPr lang="en-US" sz="1700" dirty="0">
+                <a:solidFill>
+                  <a:srgbClr val="1E293B"/>
+                </a:solidFill>
+                <a:latin typeface="Calibri" pitchFamily="34" charset="0"/>
+                <a:ea typeface="Calibri" pitchFamily="34" charset="-122"/>
+                <a:cs typeface="Calibri" pitchFamily="34" charset="-120"/>
+              </a:rPr>
+              <a:t>the</a:t>
+            </a:r>
+            <a:pPr indent="0" marL="0">
+              <a:buNone/>
+            </a:pPr>
+            <a:r>
+              <a:rPr lang="en-US" sz="1700" dirty="0">
+                <a:solidFill>
+                  <a:srgbClr val="1E293B"/>
+                </a:solidFill>
+                <a:latin typeface="Calibri" pitchFamily="34" charset="0"/>
+                <a:ea typeface="Calibri" pitchFamily="34" charset="-122"/>
+                <a:cs typeface="Calibri" pitchFamily="34" charset="-120"/>
+              </a:rPr>
+              <a:t> </a:t>
+            </a:r>
+            <a:pPr indent="0" marL="0">
+              <a:buNone/>
+            </a:pPr>
+            <a:r>
+              <a:rPr lang="en-US" sz="1700" dirty="0">
+                <a:solidFill>
+                  <a:srgbClr val="1E293B"/>
+                </a:solidFill>
+                <a:latin typeface="Calibri" pitchFamily="34" charset="0"/>
+                <a:ea typeface="Calibri" pitchFamily="34" charset="-122"/>
+                <a:cs typeface="Calibri" pitchFamily="34" charset="-120"/>
+              </a:rPr>
+              <a:t>Head</a:t>
+            </a:r>
+            <a:pPr indent="0" marL="0">
+              <a:buNone/>
+            </a:pPr>
+            <a:r>
+              <a:rPr lang="en-US" sz="1700" dirty="0">
+                <a:solidFill>
+                  <a:srgbClr val="1E293B"/>
+                </a:solidFill>
+                <a:latin typeface="Calibri" pitchFamily="34" charset="0"/>
+                <a:ea typeface="Calibri" pitchFamily="34" charset="-122"/>
+                <a:cs typeface="Calibri" pitchFamily="34" charset="-120"/>
+              </a:rPr>
+              <a:t> </a:t>
+            </a:r>
+            <a:pPr indent="0" marL="0">
+              <a:buNone/>
+            </a:pPr>
+            <a:r>
+              <a:rPr lang="en-US" sz="1700" dirty="0">
+                <a:solidFill>
+                  <a:srgbClr val="1E293B"/>
+                </a:solidFill>
+                <a:latin typeface="Calibri" pitchFamily="34" charset="0"/>
+                <a:ea typeface="Calibri" pitchFamily="34" charset="-122"/>
+                <a:cs typeface="Calibri" pitchFamily="34" charset="-120"/>
+              </a:rPr>
+              <a:t>Mouse.</a:t>
             </a:r>
             <a:endParaRPr lang="en-US" sz="1700" dirty="0"/>
           </a:p>
@@ -4061,14 +5009,48 @@
       </p:sp>
       <p:sp>
         <p:nvSpPr>
-          <p:cNvPr id="8" name="Text 6"/>
-          <p:cNvSpPr/>
-          <p:nvPr/>
-        </p:nvSpPr>
-        <p:spPr>
-          <a:xfrm>
-            <a:off x="365760" y="2514600"/>
-            <a:ext cx="8412480" cy="457200"/>
+          <p:cNvPr id="9" name="Shape 7"/>
+          <p:cNvSpPr/>
+          <p:nvPr/>
+        </p:nvSpPr>
+        <p:spPr>
+          <a:xfrm>
+            <a:off x="365760" y="2212848"/>
+            <a:ext cx="8412480" cy="658368"/>
+          </a:xfrm>
+          <a:prstGeom prst="roundRect">
+            <a:avLst>
+              <a:gd name="adj" fmla="val 13889"/>
+            </a:avLst>
+          </a:prstGeom>
+          <a:solidFill>
+            <a:srgbClr val="FFFFFF"/>
+          </a:solidFill>
+          <a:ln w="19050">
+            <a:solidFill>
+              <a:srgbClr val="C7922C"/>
+            </a:solidFill>
+            <a:prstDash val="solid"/>
+          </a:ln>
+          <a:effectLst>
+            <a:outerShdw sx="100000" sy="100000" kx="0" ky="0" algn="bl" rotWithShape="0" blurRad="101600" dist="38100" dir="2700000">
+              <a:srgbClr val="000000">
+                <a:alpha val="12000"/>
+              </a:srgbClr>
+            </a:outerShdw>
+          </a:effectLst>
+        </p:spPr>
+      </p:sp>
+      <p:sp>
+        <p:nvSpPr>
+          <p:cNvPr id="10" name="Text 8"/>
+          <p:cNvSpPr/>
+          <p:nvPr/>
+        </p:nvSpPr>
+        <p:spPr>
+          <a:xfrm>
+            <a:off x="594360" y="2340864"/>
+            <a:ext cx="7955280" cy="402336"/>
           </a:xfrm>
           <a:prstGeom prst="rect">
             <a:avLst/>
@@ -4083,18 +5065,441 @@
             <a:pPr indent="0" marL="0">
               <a:buNone/>
             </a:pPr>
-            <a:r>
-              <a:rPr lang="en-US" sz="1500" i="1" dirty="0">
-                <a:solidFill>
-                  <a:srgbClr val="64748B"/>
-                </a:solidFill>
-                <a:latin typeface="Calibri" pitchFamily="34" charset="0"/>
-                <a:ea typeface="Calibri" pitchFamily="34" charset="-122"/>
-                <a:cs typeface="Calibri" pitchFamily="34" charset="-120"/>
-              </a:rPr>
-              <a:t>Which column does each word belong in?  Columns: Plural (more than one)  |  Possessive (belongs to)</a:t>
-            </a:r>
-            <a:endParaRPr lang="en-US" sz="1500" dirty="0"/>
+            <a:endParaRPr lang="en-US" sz="1700" dirty="0"/>
+          </a:p>
+        </p:txBody>
+      </p:sp>
+      <p:sp>
+        <p:nvSpPr>
+          <p:cNvPr id="11" name="Text 9"/>
+          <p:cNvSpPr/>
+          <p:nvPr/>
+        </p:nvSpPr>
+        <p:spPr>
+          <a:xfrm>
+            <a:off x="594360" y="2340864"/>
+            <a:ext cx="7955280" cy="402336"/>
+          </a:xfrm>
+          <a:prstGeom prst="rect">
+            <a:avLst/>
+          </a:prstGeom>
+          <a:noFill/>
+          <a:ln/>
+        </p:spPr>
+        <p:txBody>
+          <a:bodyPr wrap="square" lIns="0" tIns="0" rIns="0" bIns="0" rtlCol="0" anchor="ctr"/>
+          <a:lstStyle/>
+          <a:p>
+            <a:pPr indent="0" marL="0">
+              <a:buNone/>
+            </a:pPr>
+            <a:r>
+              <a:rPr lang="en-US" sz="1700" dirty="0">
+                <a:solidFill>
+                  <a:srgbClr val="1E293B"/>
+                </a:solidFill>
+                <a:latin typeface="Calibri" pitchFamily="34" charset="0"/>
+                <a:ea typeface="Calibri" pitchFamily="34" charset="-122"/>
+                <a:cs typeface="Calibri" pitchFamily="34" charset="-120"/>
+              </a:rPr>
+              <a:t>The</a:t>
+            </a:r>
+            <a:pPr indent="0" marL="0">
+              <a:buNone/>
+            </a:pPr>
+            <a:r>
+              <a:rPr lang="en-US" sz="1700" dirty="0">
+                <a:solidFill>
+                  <a:srgbClr val="1E293B"/>
+                </a:solidFill>
+                <a:latin typeface="Calibri" pitchFamily="34" charset="0"/>
+                <a:ea typeface="Calibri" pitchFamily="34" charset="-122"/>
+                <a:cs typeface="Calibri" pitchFamily="34" charset="-120"/>
+              </a:rPr>
+              <a:t> </a:t>
+            </a:r>
+            <a:pPr indent="0" marL="0">
+              <a:buNone/>
+            </a:pPr>
+            <a:r>
+              <a:rPr lang="en-US" sz="1700" dirty="0">
+                <a:solidFill>
+                  <a:srgbClr val="1E293B"/>
+                </a:solidFill>
+                <a:latin typeface="Calibri" pitchFamily="34" charset="0"/>
+                <a:ea typeface="Calibri" pitchFamily="34" charset="-122"/>
+                <a:cs typeface="Calibri" pitchFamily="34" charset="-120"/>
+              </a:rPr>
+              <a:t>Head</a:t>
+            </a:r>
+            <a:pPr indent="0" marL="0">
+              <a:buNone/>
+            </a:pPr>
+            <a:r>
+              <a:rPr lang="en-US" sz="1700" dirty="0">
+                <a:solidFill>
+                  <a:srgbClr val="1E293B"/>
+                </a:solidFill>
+                <a:latin typeface="Calibri" pitchFamily="34" charset="0"/>
+                <a:ea typeface="Calibri" pitchFamily="34" charset="-122"/>
+                <a:cs typeface="Calibri" pitchFamily="34" charset="-120"/>
+              </a:rPr>
+              <a:t> </a:t>
+            </a:r>
+            <a:pPr indent="0" marL="0">
+              <a:buNone/>
+            </a:pPr>
+            <a:r>
+              <a:rPr lang="en-US" sz="1700" dirty="0">
+                <a:solidFill>
+                  <a:srgbClr val="1E293B"/>
+                </a:solidFill>
+                <a:latin typeface="Calibri" pitchFamily="34" charset="0"/>
+                <a:ea typeface="Calibri" pitchFamily="34" charset="-122"/>
+                <a:cs typeface="Calibri" pitchFamily="34" charset="-120"/>
+              </a:rPr>
+              <a:t>Mouse</a:t>
+            </a:r>
+            <a:pPr indent="0" marL="0">
+              <a:buNone/>
+            </a:pPr>
+            <a:r>
+              <a:rPr lang="en-US" sz="1700" dirty="0">
+                <a:solidFill>
+                  <a:srgbClr val="1E293B"/>
+                </a:solidFill>
+                <a:latin typeface="Calibri" pitchFamily="34" charset="0"/>
+                <a:ea typeface="Calibri" pitchFamily="34" charset="-122"/>
+                <a:cs typeface="Calibri" pitchFamily="34" charset="-120"/>
+              </a:rPr>
+              <a:t> </a:t>
+            </a:r>
+            <a:pPr indent="0" marL="0">
+              <a:buNone/>
+            </a:pPr>
+            <a:r>
+              <a:rPr lang="en-US" sz="1700" dirty="0">
+                <a:solidFill>
+                  <a:srgbClr val="1E293B"/>
+                </a:solidFill>
+                <a:latin typeface="Calibri" pitchFamily="34" charset="0"/>
+                <a:ea typeface="Calibri" pitchFamily="34" charset="-122"/>
+                <a:cs typeface="Calibri" pitchFamily="34" charset="-120"/>
+              </a:rPr>
+              <a:t>said,</a:t>
+            </a:r>
+            <a:pPr indent="0" marL="0">
+              <a:buNone/>
+            </a:pPr>
+            <a:r>
+              <a:rPr lang="en-US" sz="1700" dirty="0">
+                <a:solidFill>
+                  <a:srgbClr val="1E293B"/>
+                </a:solidFill>
+                <a:latin typeface="Calibri" pitchFamily="34" charset="0"/>
+                <a:ea typeface="Calibri" pitchFamily="34" charset="-122"/>
+                <a:cs typeface="Calibri" pitchFamily="34" charset="-120"/>
+              </a:rPr>
+              <a:t> </a:t>
+            </a:r>
+            <a:pPr indent="0" marL="0">
+              <a:buNone/>
+            </a:pPr>
+            <a:r>
+              <a:rPr lang="en-US" sz="1700" dirty="0">
+                <a:solidFill>
+                  <a:srgbClr val="1E293B"/>
+                </a:solidFill>
+                <a:latin typeface="Calibri" pitchFamily="34" charset="0"/>
+                <a:ea typeface="Calibri" pitchFamily="34" charset="-122"/>
+                <a:cs typeface="Calibri" pitchFamily="34" charset="-120"/>
+              </a:rPr>
+              <a:t>“Straight</a:t>
+            </a:r>
+            <a:pPr indent="0" marL="0">
+              <a:buNone/>
+            </a:pPr>
+            <a:r>
+              <a:rPr lang="en-US" sz="1700" dirty="0">
+                <a:solidFill>
+                  <a:srgbClr val="1E293B"/>
+                </a:solidFill>
+                <a:latin typeface="Calibri" pitchFamily="34" charset="0"/>
+                <a:ea typeface="Calibri" pitchFamily="34" charset="-122"/>
+                <a:cs typeface="Calibri" pitchFamily="34" charset="-120"/>
+              </a:rPr>
+              <a:t> </a:t>
+            </a:r>
+            <a:pPr indent="0" marL="0">
+              <a:buNone/>
+            </a:pPr>
+            <a:r>
+              <a:rPr lang="en-US" sz="1700" dirty="0">
+                <a:solidFill>
+                  <a:srgbClr val="1E293B"/>
+                </a:solidFill>
+                <a:latin typeface="Calibri" pitchFamily="34" charset="0"/>
+                <a:ea typeface="Calibri" pitchFamily="34" charset="-122"/>
+                <a:cs typeface="Calibri" pitchFamily="34" charset="-120"/>
+              </a:rPr>
+              <a:t>to</a:t>
+            </a:r>
+            <a:pPr indent="0" marL="0">
+              <a:buNone/>
+            </a:pPr>
+            <a:r>
+              <a:rPr lang="en-US" sz="1700" dirty="0">
+                <a:solidFill>
+                  <a:srgbClr val="1E293B"/>
+                </a:solidFill>
+                <a:latin typeface="Calibri" pitchFamily="34" charset="0"/>
+                <a:ea typeface="Calibri" pitchFamily="34" charset="-122"/>
+                <a:cs typeface="Calibri" pitchFamily="34" charset="-120"/>
+              </a:rPr>
+              <a:t> </a:t>
+            </a:r>
+            <a:pPr indent="0" marL="0">
+              <a:buNone/>
+            </a:pPr>
+            <a:r>
+              <a:rPr lang="en-US" sz="1700" dirty="0">
+                <a:solidFill>
+                  <a:srgbClr val="1E293B"/>
+                </a:solidFill>
+                <a:latin typeface="Calibri" pitchFamily="34" charset="0"/>
+                <a:ea typeface="Calibri" pitchFamily="34" charset="-122"/>
+                <a:cs typeface="Calibri" pitchFamily="34" charset="-120"/>
+              </a:rPr>
+              <a:t>the</a:t>
+            </a:r>
+            <a:pPr indent="0" marL="0">
+              <a:buNone/>
+            </a:pPr>
+            <a:r>
+              <a:rPr lang="en-US" sz="1700" dirty="0">
+                <a:solidFill>
+                  <a:srgbClr val="1E293B"/>
+                </a:solidFill>
+                <a:latin typeface="Calibri" pitchFamily="34" charset="0"/>
+                <a:ea typeface="Calibri" pitchFamily="34" charset="-122"/>
+                <a:cs typeface="Calibri" pitchFamily="34" charset="-120"/>
+              </a:rPr>
+              <a:t> </a:t>
+            </a:r>
+            <a:pPr indent="0" marL="0">
+              <a:buNone/>
+            </a:pPr>
+            <a:r>
+              <a:rPr lang="en-US" sz="1700" dirty="0">
+                <a:solidFill>
+                  <a:srgbClr val="1E293B"/>
+                </a:solidFill>
+                <a:latin typeface="Calibri" pitchFamily="34" charset="0"/>
+                <a:ea typeface="Calibri" pitchFamily="34" charset="-122"/>
+                <a:cs typeface="Calibri" pitchFamily="34" charset="-120"/>
+              </a:rPr>
+              <a:t>dungeon</a:t>
+            </a:r>
+            <a:pPr indent="0" marL="0">
+              <a:buNone/>
+            </a:pPr>
+            <a:r>
+              <a:rPr lang="en-US" sz="1700" dirty="0">
+                <a:solidFill>
+                  <a:srgbClr val="1E293B"/>
+                </a:solidFill>
+                <a:latin typeface="Calibri" pitchFamily="34" charset="0"/>
+                <a:ea typeface="Calibri" pitchFamily="34" charset="-122"/>
+                <a:cs typeface="Calibri" pitchFamily="34" charset="-120"/>
+              </a:rPr>
+              <a:t> </a:t>
+            </a:r>
+            <a:pPr indent="0" marL="0">
+              <a:buNone/>
+            </a:pPr>
+            <a:r>
+              <a:rPr lang="en-US" sz="1700" dirty="0">
+                <a:solidFill>
+                  <a:srgbClr val="1E293B"/>
+                </a:solidFill>
+                <a:latin typeface="Calibri" pitchFamily="34" charset="0"/>
+                <a:ea typeface="Calibri" pitchFamily="34" charset="-122"/>
+                <a:cs typeface="Calibri" pitchFamily="34" charset="-120"/>
+              </a:rPr>
+              <a:t>with</a:t>
+            </a:r>
+            <a:pPr indent="0" marL="0">
+              <a:buNone/>
+            </a:pPr>
+            <a:r>
+              <a:rPr lang="en-US" sz="1700" dirty="0">
+                <a:solidFill>
+                  <a:srgbClr val="1E293B"/>
+                </a:solidFill>
+                <a:latin typeface="Calibri" pitchFamily="34" charset="0"/>
+                <a:ea typeface="Calibri" pitchFamily="34" charset="-122"/>
+                <a:cs typeface="Calibri" pitchFamily="34" charset="-120"/>
+              </a:rPr>
+              <a:t> </a:t>
+            </a:r>
+            <a:pPr indent="0" marL="0">
+              <a:buNone/>
+            </a:pPr>
+            <a:r>
+              <a:rPr lang="en-US" sz="1700" dirty="0">
+                <a:solidFill>
+                  <a:srgbClr val="1E293B"/>
+                </a:solidFill>
+                <a:latin typeface="Calibri" pitchFamily="34" charset="0"/>
+                <a:ea typeface="Calibri" pitchFamily="34" charset="-122"/>
+                <a:cs typeface="Calibri" pitchFamily="34" charset="-120"/>
+              </a:rPr>
+              <a:t>him.”</a:t>
+            </a:r>
+            <a:endParaRPr lang="en-US" sz="1700" dirty="0"/>
+          </a:p>
+        </p:txBody>
+      </p:sp>
+      <p:sp>
+        <p:nvSpPr>
+          <p:cNvPr id="12" name="Shape 10"/>
+          <p:cNvSpPr/>
+          <p:nvPr/>
+        </p:nvSpPr>
+        <p:spPr>
+          <a:xfrm>
+            <a:off x="365760" y="3008376"/>
+            <a:ext cx="8412480" cy="1837944"/>
+          </a:xfrm>
+          <a:prstGeom prst="roundRect">
+            <a:avLst>
+              <a:gd name="adj" fmla="val 4975"/>
+            </a:avLst>
+          </a:prstGeom>
+          <a:solidFill>
+            <a:srgbClr val="E8F8EF"/>
+          </a:solidFill>
+          <a:ln/>
+          <a:effectLst>
+            <a:outerShdw sx="100000" sy="100000" kx="0" ky="0" algn="bl" rotWithShape="0" blurRad="101600" dist="38100" dir="2700000">
+              <a:srgbClr val="000000">
+                <a:alpha val="12000"/>
+              </a:srgbClr>
+            </a:outerShdw>
+          </a:effectLst>
+        </p:spPr>
+      </p:sp>
+      <p:sp>
+        <p:nvSpPr>
+          <p:cNvPr id="13" name="Text 11"/>
+          <p:cNvSpPr/>
+          <p:nvPr/>
+        </p:nvSpPr>
+        <p:spPr>
+          <a:xfrm>
+            <a:off x="566928" y="3072384"/>
+            <a:ext cx="8229600" cy="237744"/>
+          </a:xfrm>
+          <a:prstGeom prst="rect">
+            <a:avLst/>
+          </a:prstGeom>
+          <a:noFill/>
+          <a:ln/>
+        </p:spPr>
+        <p:txBody>
+          <a:bodyPr wrap="square" lIns="0" tIns="0" rIns="0" bIns="0" rtlCol="0" anchor="ctr"/>
+          <a:lstStyle/>
+          <a:p>
+            <a:pPr indent="0" marL="0">
+              <a:buNone/>
+            </a:pPr>
+            <a:r>
+              <a:rPr lang="en-US" sz="1100" b="1" spc="100" kern="0" dirty="0">
+                <a:solidFill>
+                  <a:srgbClr val="34B76F"/>
+                </a:solidFill>
+                <a:latin typeface="Calibri" pitchFamily="34" charset="0"/>
+                <a:ea typeface="Calibri" pitchFamily="34" charset="-122"/>
+                <a:cs typeface="Calibri" pitchFamily="34" charset="-120"/>
+              </a:rPr>
+              <a:t>✅  THE PATTERN</a:t>
+            </a:r>
+            <a:endParaRPr lang="en-US" sz="1100" dirty="0"/>
+          </a:p>
+        </p:txBody>
+      </p:sp>
+      <p:sp>
+        <p:nvSpPr>
+          <p:cNvPr id="14" name="Text 12"/>
+          <p:cNvSpPr/>
+          <p:nvPr/>
+        </p:nvSpPr>
+        <p:spPr>
+          <a:xfrm>
+            <a:off x="566928" y="3328416"/>
+            <a:ext cx="8010144" cy="1380744"/>
+          </a:xfrm>
+          <a:prstGeom prst="rect">
+            <a:avLst/>
+          </a:prstGeom>
+          <a:noFill/>
+          <a:ln/>
+        </p:spPr>
+        <p:txBody>
+          <a:bodyPr wrap="square" lIns="0" tIns="0" rIns="0" bIns="0" rtlCol="0" anchor="t">
+            <a:normAutofit/>
+          </a:bodyPr>
+          <a:lstStyle/>
+          <a:p>
+            <a:pPr indent="0" marL="0">
+              <a:buNone/>
+            </a:pPr>
+            <a:r>
+              <a:rPr lang="en-US" sz="1300" dirty="0">
+                <a:solidFill>
+                  <a:srgbClr val="1E293B"/>
+                </a:solidFill>
+                <a:latin typeface="Calibri" pitchFamily="34" charset="0"/>
+                <a:ea typeface="Calibri" pitchFamily="34" charset="-122"/>
+                <a:cs typeface="Calibri" pitchFamily="34" charset="-120"/>
+              </a:rPr>
+              <a:t>When a character speaks, the words they say go inside quotation marks. A comma separates the spoken words from the tag that says who spoke — and that comma goes inside the closing quotation mark.</a:t>
+            </a:r>
+            <a:endParaRPr lang="en-US" sz="1300" dirty="0"/>
+          </a:p>
+          <a:p>
+            <a:pPr indent="0" marL="0">
+              <a:buNone/>
+            </a:pPr>
+            <a:r>
+              <a:rPr lang="en-US" sz="1300" dirty="0">
+                <a:solidFill>
+                  <a:srgbClr val="1E293B"/>
+                </a:solidFill>
+                <a:latin typeface="Calibri" pitchFamily="34" charset="0"/>
+                <a:ea typeface="Calibri" pitchFamily="34" charset="-122"/>
+                <a:cs typeface="Calibri" pitchFamily="34" charset="-120"/>
+              </a:rPr>
+              <a:t>The comma sits inside the quotation marks, and said is not capitalized.</a:t>
+            </a:r>
+            <a:endParaRPr lang="en-US" sz="1300" dirty="0"/>
+          </a:p>
+          <a:p>
+            <a:pPr indent="0" marL="0">
+              <a:buNone/>
+            </a:pPr>
+            <a:r>
+              <a:rPr lang="en-US" sz="1300" dirty="0">
+                <a:solidFill>
+                  <a:srgbClr val="1E293B"/>
+                </a:solidFill>
+                <a:latin typeface="Calibri" pitchFamily="34" charset="0"/>
+                <a:ea typeface="Calibri" pitchFamily="34" charset="-122"/>
+                <a:cs typeface="Calibri" pitchFamily="34" charset="-120"/>
+              </a:rPr>
+              <a:t>When the tag comes first, the comma goes after it and the spoken words start with a capital.</a:t>
+            </a:r>
+            <a:endParaRPr lang="en-US" sz="1300" dirty="0"/>
           </a:p>
         </p:txBody>
       </p:sp>
@@ -4145,7 +5550,7 @@
             <a:avLst/>
           </a:prstGeom>
           <a:solidFill>
-            <a:srgbClr val="0E1C42"/>
+            <a:srgbClr val="C7922C"/>
           </a:solidFill>
           <a:ln/>
         </p:spPr>
@@ -4183,7 +5588,7 @@
                 <a:ea typeface="Calibri" pitchFamily="34" charset="-122"/>
                 <a:cs typeface="Calibri" pitchFamily="34" charset="-120"/>
               </a:rPr>
-              <a:t>🔠  Spelling</a:t>
+              <a:t>✏️  Grammar — Your turn</a:t>
             </a:r>
             <a:endParaRPr lang="en-US" sz="2200" dirty="0"/>
           </a:p>
@@ -4197,7 +5602,7 @@
         </p:nvSpPr>
         <p:spPr>
           <a:xfrm>
-            <a:off x="365760" y="777240"/>
+            <a:off x="365760" y="749808"/>
             <a:ext cx="8229600" cy="237744"/>
           </a:xfrm>
           <a:prstGeom prst="rect">
@@ -4216,13 +5621,13 @@
             <a:r>
               <a:rPr lang="en-US" sz="1100" b="1" spc="100" kern="0" dirty="0">
                 <a:solidFill>
-                  <a:srgbClr val="0E1C42"/>
-                </a:solidFill>
-                <a:latin typeface="Calibri" pitchFamily="34" charset="0"/>
-                <a:ea typeface="Calibri" pitchFamily="34" charset="-122"/>
-                <a:cs typeface="Calibri" pitchFamily="34" charset="-120"/>
-              </a:rPr>
-              <a:t>POSSESSIVES AND PLURALS</a:t>
+                  <a:srgbClr val="C7922C"/>
+                </a:solidFill>
+                <a:latin typeface="Calibri" pitchFamily="34" charset="0"/>
+                <a:ea typeface="Calibri" pitchFamily="34" charset="-122"/>
+                <a:cs typeface="Calibri" pitchFamily="34" charset="-120"/>
+              </a:rPr>
+              <a:t>PUNCTUATING DIALOGUE</a:t>
             </a:r>
             <a:endParaRPr lang="en-US" sz="1100" dirty="0"/>
           </a:p>
@@ -4236,79 +5641,23 @@
         </p:nvSpPr>
         <p:spPr>
           <a:xfrm>
-            <a:off x="411480" y="1078992"/>
-            <a:ext cx="4114800" cy="457200"/>
+            <a:off x="365760" y="1051560"/>
+            <a:ext cx="8412480" cy="914400"/>
           </a:xfrm>
           <a:prstGeom prst="roundRect">
             <a:avLst>
-              <a:gd name="adj" fmla="val 16000"/>
-            </a:avLst>
-          </a:prstGeom>
-          <a:solidFill>
-            <a:srgbClr val="0E1C42"/>
-          </a:solidFill>
-          <a:ln/>
-        </p:spPr>
-      </p:sp>
-      <p:sp>
-        <p:nvSpPr>
-          <p:cNvPr id="6" name="Text 4"/>
-          <p:cNvSpPr/>
-          <p:nvPr/>
-        </p:nvSpPr>
-        <p:spPr>
-          <a:xfrm>
-            <a:off x="457200" y="1133856"/>
-            <a:ext cx="4023360" cy="347472"/>
-          </a:xfrm>
-          <a:prstGeom prst="rect">
-            <a:avLst/>
-          </a:prstGeom>
-          <a:noFill/>
-          <a:ln/>
-        </p:spPr>
-        <p:txBody>
-          <a:bodyPr wrap="square" lIns="0" tIns="0" rIns="0" bIns="0" rtlCol="0" anchor="ctr"/>
-          <a:lstStyle/>
-          <a:p>
-            <a:pPr algn="ctr" indent="0" marL="0">
-              <a:buNone/>
-            </a:pPr>
-            <a:r>
-              <a:rPr lang="en-US" sz="1300" b="1" dirty="0">
-                <a:solidFill>
-                  <a:srgbClr val="FFFFFF"/>
-                </a:solidFill>
-                <a:latin typeface="Calibri" pitchFamily="34" charset="0"/>
-                <a:ea typeface="Calibri" pitchFamily="34" charset="-122"/>
-                <a:cs typeface="Calibri" pitchFamily="34" charset="-120"/>
-              </a:rPr>
-              <a:t>Plural (more than one)</a:t>
-            </a:r>
-            <a:endParaRPr lang="en-US" sz="1300" dirty="0"/>
-          </a:p>
-        </p:txBody>
-      </p:sp>
-      <p:sp>
-        <p:nvSpPr>
-          <p:cNvPr id="7" name="Shape 5"/>
-          <p:cNvSpPr/>
-          <p:nvPr/>
-        </p:nvSpPr>
-        <p:spPr>
-          <a:xfrm>
-            <a:off x="411480" y="1591056"/>
-            <a:ext cx="4114800" cy="2103120"/>
-          </a:xfrm>
-          <a:prstGeom prst="roundRect">
-            <a:avLst>
-              <a:gd name="adj" fmla="val 4348"/>
+              <a:gd name="adj" fmla="val 10000"/>
             </a:avLst>
           </a:prstGeom>
           <a:solidFill>
             <a:srgbClr val="FFFFFF"/>
           </a:solidFill>
-          <a:ln/>
+          <a:ln w="19050">
+            <a:solidFill>
+              <a:srgbClr val="C7922C"/>
+            </a:solidFill>
+            <a:prstDash val="solid"/>
+          </a:ln>
           <a:effectLst>
             <a:outerShdw sx="100000" sy="100000" kx="0" ky="0" algn="bl" rotWithShape="0" blurRad="101600" dist="38100" dir="2700000">
               <a:srgbClr val="000000">
@@ -4320,14 +5669,14 @@
       </p:sp>
       <p:sp>
         <p:nvSpPr>
-          <p:cNvPr id="8" name="Text 6"/>
-          <p:cNvSpPr/>
-          <p:nvPr/>
-        </p:nvSpPr>
-        <p:spPr>
-          <a:xfrm>
-            <a:off x="502920" y="1700784"/>
-            <a:ext cx="3931920" cy="1883664"/>
+          <p:cNvPr id="6" name="Text 4"/>
+          <p:cNvSpPr/>
+          <p:nvPr/>
+        </p:nvSpPr>
+        <p:spPr>
+          <a:xfrm>
+            <a:off x="594360" y="1179576"/>
+            <a:ext cx="7955280" cy="658368"/>
           </a:xfrm>
           <a:prstGeom prst="rect">
             <a:avLst/>
@@ -4339,107 +5688,34 @@
           <a:bodyPr wrap="square" lIns="0" tIns="0" rIns="0" bIns="0" rtlCol="0" anchor="ctr"/>
           <a:lstStyle/>
           <a:p>
-            <a:pPr algn="ctr" indent="0" marL="0">
-              <a:buNone/>
-            </a:pPr>
-            <a:r>
-              <a:rPr lang="en-US" sz="1400" dirty="0">
-                <a:solidFill>
-                  <a:srgbClr val="1E293B"/>
-                </a:solidFill>
-                <a:latin typeface="Calibri" pitchFamily="34" charset="0"/>
-                <a:ea typeface="Calibri" pitchFamily="34" charset="-122"/>
-                <a:cs typeface="Calibri" pitchFamily="34" charset="-120"/>
-              </a:rPr>
-              <a:t>mice</a:t>
-            </a:r>
-            <a:endParaRPr lang="en-US" sz="1400" dirty="0"/>
-          </a:p>
-          <a:p>
-            <a:pPr algn="ctr" indent="0" marL="0">
-              <a:buNone/>
-            </a:pPr>
-            <a:r>
-              <a:rPr lang="en-US" sz="1400" dirty="0">
-                <a:solidFill>
-                  <a:srgbClr val="1E293B"/>
-                </a:solidFill>
-                <a:latin typeface="Calibri" pitchFamily="34" charset="0"/>
-                <a:ea typeface="Calibri" pitchFamily="34" charset="-122"/>
-                <a:cs typeface="Calibri" pitchFamily="34" charset="-120"/>
-              </a:rPr>
-              <a:t>spoons</a:t>
-            </a:r>
-            <a:endParaRPr lang="en-US" sz="1400" dirty="0"/>
-          </a:p>
-          <a:p>
-            <a:pPr algn="ctr" indent="0" marL="0">
-              <a:buNone/>
-            </a:pPr>
-            <a:r>
-              <a:rPr lang="en-US" sz="1400" dirty="0">
-                <a:solidFill>
-                  <a:srgbClr val="1E293B"/>
-                </a:solidFill>
-                <a:latin typeface="Calibri" pitchFamily="34" charset="0"/>
-                <a:ea typeface="Calibri" pitchFamily="34" charset="-122"/>
-                <a:cs typeface="Calibri" pitchFamily="34" charset="-120"/>
-              </a:rPr>
-              <a:t>rats</a:t>
-            </a:r>
-            <a:endParaRPr lang="en-US" sz="1400" dirty="0"/>
-          </a:p>
-          <a:p>
-            <a:pPr algn="ctr" indent="0" marL="0">
-              <a:buNone/>
-            </a:pPr>
-            <a:r>
-              <a:rPr lang="en-US" sz="1400" dirty="0">
-                <a:solidFill>
-                  <a:srgbClr val="1E293B"/>
-                </a:solidFill>
-                <a:latin typeface="Calibri" pitchFamily="34" charset="0"/>
-                <a:ea typeface="Calibri" pitchFamily="34" charset="-122"/>
-                <a:cs typeface="Calibri" pitchFamily="34" charset="-120"/>
-              </a:rPr>
-              <a:t>candles</a:t>
-            </a:r>
-            <a:endParaRPr lang="en-US" sz="1400" dirty="0"/>
-          </a:p>
-        </p:txBody>
-      </p:sp>
-      <p:sp>
-        <p:nvSpPr>
-          <p:cNvPr id="9" name="Shape 7"/>
-          <p:cNvSpPr/>
-          <p:nvPr/>
-        </p:nvSpPr>
-        <p:spPr>
-          <a:xfrm>
-            <a:off x="4617720" y="1078992"/>
-            <a:ext cx="4114800" cy="457200"/>
-          </a:xfrm>
-          <a:prstGeom prst="roundRect">
-            <a:avLst>
-              <a:gd name="adj" fmla="val 16000"/>
-            </a:avLst>
-          </a:prstGeom>
-          <a:solidFill>
-            <a:srgbClr val="0E1C42"/>
-          </a:solidFill>
-          <a:ln/>
-        </p:spPr>
-      </p:sp>
-      <p:sp>
-        <p:nvSpPr>
-          <p:cNvPr id="10" name="Text 8"/>
-          <p:cNvSpPr/>
-          <p:nvPr/>
-        </p:nvSpPr>
-        <p:spPr>
-          <a:xfrm>
-            <a:off x="4663440" y="1133856"/>
-            <a:ext cx="4023360" cy="347472"/>
+            <a:pPr indent="0" marL="0">
+              <a:buNone/>
+            </a:pPr>
+            <a:r>
+              <a:rPr lang="en-US" sz="1700" dirty="0">
+                <a:solidFill>
+                  <a:srgbClr val="0E1C42"/>
+                </a:solidFill>
+                <a:latin typeface="Calibri" pitchFamily="34" charset="0"/>
+                <a:ea typeface="Calibri" pitchFamily="34" charset="-122"/>
+                <a:cs typeface="Calibri" pitchFamily="34" charset="-120"/>
+              </a:rPr>
+              <a:t>“Carry the basket,” said Roscuro.    ·    Cook said, “That is soup.”    ·    “I am hungry” the prince said.    ·    Mig said, “I want to be a princess.”    ·    “Carry the basket” said Roscuro.    ·    Cook said, “that is soup.”    ·    “I am hungry,” the prince said.    ·    Mig said “I want to be a princess.”</a:t>
+            </a:r>
+            <a:endParaRPr lang="en-US" sz="1700" dirty="0"/>
+          </a:p>
+        </p:txBody>
+      </p:sp>
+      <p:sp>
+        <p:nvSpPr>
+          <p:cNvPr id="7" name="Text 5"/>
+          <p:cNvSpPr/>
+          <p:nvPr/>
+        </p:nvSpPr>
+        <p:spPr>
+          <a:xfrm>
+            <a:off x="365760" y="2148840"/>
+            <a:ext cx="8412480" cy="731520"/>
           </a:xfrm>
           <a:prstGeom prst="rect">
             <a:avLst/>
@@ -4451,140 +5727,21 @@
           <a:bodyPr wrap="square" lIns="0" tIns="0" rIns="0" bIns="0" rtlCol="0" anchor="ctr"/>
           <a:lstStyle/>
           <a:p>
-            <a:pPr algn="ctr" indent="0" marL="0">
-              <a:buNone/>
-            </a:pPr>
-            <a:r>
-              <a:rPr lang="en-US" sz="1300" b="1" dirty="0">
-                <a:solidFill>
-                  <a:srgbClr val="FFFFFF"/>
-                </a:solidFill>
-                <a:latin typeface="Calibri" pitchFamily="34" charset="0"/>
-                <a:ea typeface="Calibri" pitchFamily="34" charset="-122"/>
-                <a:cs typeface="Calibri" pitchFamily="34" charset="-120"/>
-              </a:rPr>
-              <a:t>Possessive (belongs to)</a:t>
-            </a:r>
-            <a:endParaRPr lang="en-US" sz="1300" dirty="0"/>
-          </a:p>
-        </p:txBody>
-      </p:sp>
-      <p:sp>
-        <p:nvSpPr>
-          <p:cNvPr id="11" name="Shape 9"/>
-          <p:cNvSpPr/>
-          <p:nvPr/>
-        </p:nvSpPr>
-        <p:spPr>
-          <a:xfrm>
-            <a:off x="4617720" y="1591056"/>
-            <a:ext cx="4114800" cy="2103120"/>
-          </a:xfrm>
-          <a:prstGeom prst="roundRect">
-            <a:avLst>
-              <a:gd name="adj" fmla="val 4348"/>
-            </a:avLst>
-          </a:prstGeom>
-          <a:solidFill>
-            <a:srgbClr val="FFFFFF"/>
-          </a:solidFill>
-          <a:ln/>
-          <a:effectLst>
-            <a:outerShdw sx="100000" sy="100000" kx="0" ky="0" algn="bl" rotWithShape="0" blurRad="101600" dist="38100" dir="2700000">
-              <a:srgbClr val="000000">
-                <a:alpha val="12000"/>
-              </a:srgbClr>
-            </a:outerShdw>
-          </a:effectLst>
-        </p:spPr>
-      </p:sp>
-      <p:sp>
-        <p:nvSpPr>
-          <p:cNvPr id="12" name="Text 10"/>
-          <p:cNvSpPr/>
-          <p:nvPr/>
-        </p:nvSpPr>
-        <p:spPr>
-          <a:xfrm>
-            <a:off x="4709160" y="1700784"/>
-            <a:ext cx="3931920" cy="1883664"/>
-          </a:xfrm>
-          <a:prstGeom prst="rect">
-            <a:avLst/>
-          </a:prstGeom>
-          <a:noFill/>
-          <a:ln/>
-        </p:spPr>
-        <p:txBody>
-          <a:bodyPr wrap="square" lIns="0" tIns="0" rIns="0" bIns="0" rtlCol="0" anchor="ctr"/>
-          <a:lstStyle/>
-          <a:p>
-            <a:pPr algn="ctr" indent="0" marL="0">
-              <a:buNone/>
-            </a:pPr>
-            <a:r>
-              <a:rPr lang="en-US" sz="1400" dirty="0">
-                <a:solidFill>
-                  <a:srgbClr val="1E293B"/>
-                </a:solidFill>
-                <a:latin typeface="Calibri" pitchFamily="34" charset="0"/>
-                <a:ea typeface="Calibri" pitchFamily="34" charset="-122"/>
-                <a:cs typeface="Calibri" pitchFamily="34" charset="-120"/>
-              </a:rPr>
-              <a:t>mice's</a:t>
-            </a:r>
-            <a:endParaRPr lang="en-US" sz="1400" dirty="0"/>
-          </a:p>
-          <a:p>
-            <a:pPr algn="ctr" indent="0" marL="0">
-              <a:buNone/>
-            </a:pPr>
-            <a:r>
-              <a:rPr lang="en-US" sz="1400" dirty="0">
-                <a:solidFill>
-                  <a:srgbClr val="1E293B"/>
-                </a:solidFill>
-                <a:latin typeface="Calibri" pitchFamily="34" charset="0"/>
-                <a:ea typeface="Calibri" pitchFamily="34" charset="-122"/>
-                <a:cs typeface="Calibri" pitchFamily="34" charset="-120"/>
-              </a:rPr>
-              <a:t>mouse's</a:t>
-            </a:r>
-            <a:endParaRPr lang="en-US" sz="1400" dirty="0"/>
-          </a:p>
-          <a:p>
-            <a:pPr algn="ctr" indent="0" marL="0">
-              <a:buNone/>
-            </a:pPr>
-            <a:r>
-              <a:rPr lang="en-US" sz="1400" dirty="0">
-                <a:solidFill>
-                  <a:srgbClr val="1E293B"/>
-                </a:solidFill>
-                <a:latin typeface="Calibri" pitchFamily="34" charset="0"/>
-                <a:ea typeface="Calibri" pitchFamily="34" charset="-122"/>
-                <a:cs typeface="Calibri" pitchFamily="34" charset="-120"/>
-              </a:rPr>
-              <a:t>king's</a:t>
-            </a:r>
-            <a:endParaRPr lang="en-US" sz="1400" dirty="0"/>
-          </a:p>
-          <a:p>
-            <a:pPr algn="ctr" indent="0" marL="0">
-              <a:buNone/>
-            </a:pPr>
-            <a:r>
-              <a:rPr lang="en-US" sz="1400" dirty="0">
-                <a:solidFill>
-                  <a:srgbClr val="1E293B"/>
-                </a:solidFill>
-                <a:latin typeface="Calibri" pitchFamily="34" charset="0"/>
-                <a:ea typeface="Calibri" pitchFamily="34" charset="-122"/>
-                <a:cs typeface="Calibri" pitchFamily="34" charset="-120"/>
-              </a:rPr>
-              <a:t>princess's</a:t>
-            </a:r>
-            <a:endParaRPr lang="en-US" sz="1400" dirty="0"/>
+            <a:pPr indent="0" marL="0">
+              <a:buNone/>
+            </a:pPr>
+            <a:r>
+              <a:rPr lang="en-US" sz="1500" i="1" dirty="0">
+                <a:solidFill>
+                  <a:srgbClr val="64748B"/>
+                </a:solidFill>
+                <a:latin typeface="Calibri" pitchFamily="34" charset="0"/>
+                <a:ea typeface="Calibri" pitchFamily="34" charset="-122"/>
+                <a:cs typeface="Calibri" pitchFamily="34" charset="-120"/>
+              </a:rPr>
+              <a:t>Your turn. Sort these eight into the two columns. The columns are blank on purpose — sort first, then work out what the split is. Read them slowly — the difference is one mark at a time.</a:t>
+            </a:r>
+            <a:endParaRPr lang="en-US" sz="1500" dirty="0"/>
           </a:p>
         </p:txBody>
       </p:sp>
@@ -4599,6 +5756,1306 @@
 <file path=ppt/slides/slide15.xml><?xml version="1.0" encoding="utf-8"?>
 <p:sld xmlns:a="http://schemas.openxmlformats.org/drawingml/2006/main" xmlns:r="http://schemas.openxmlformats.org/officeDocument/2006/relationships" xmlns:p="http://schemas.openxmlformats.org/presentationml/2006/main">
   <p:cSld name="Slide 15">
+    <p:bg>
+      <p:bgPr>
+        <a:solidFill>
+          <a:srgbClr val="F8FAFC"/>
+        </a:solidFill>
+      </p:bgPr>
+    </p:bg>
+    <p:spTree>
+      <p:nvGrpSpPr>
+        <p:cNvPr id="1" name=""/>
+        <p:cNvGrpSpPr/>
+        <p:nvPr/>
+      </p:nvGrpSpPr>
+      <p:grpSpPr>
+        <a:xfrm>
+          <a:off x="0" y="0"/>
+          <a:ext cx="0" cy="0"/>
+          <a:chOff x="0" y="0"/>
+          <a:chExt cx="0" cy="0"/>
+        </a:xfrm>
+      </p:grpSpPr>
+      <p:sp>
+        <p:nvSpPr>
+          <p:cNvPr id="2" name="Shape 0"/>
+          <p:cNvSpPr/>
+          <p:nvPr/>
+        </p:nvSpPr>
+        <p:spPr>
+          <a:xfrm>
+            <a:off x="0" y="0"/>
+            <a:ext cx="9144000" cy="566928"/>
+          </a:xfrm>
+          <a:prstGeom prst="rect">
+            <a:avLst/>
+          </a:prstGeom>
+          <a:solidFill>
+            <a:srgbClr val="C7922C"/>
+          </a:solidFill>
+          <a:ln/>
+        </p:spPr>
+      </p:sp>
+      <p:sp>
+        <p:nvSpPr>
+          <p:cNvPr id="3" name="Text 1"/>
+          <p:cNvSpPr/>
+          <p:nvPr/>
+        </p:nvSpPr>
+        <p:spPr>
+          <a:xfrm>
+            <a:off x="365760" y="54864"/>
+            <a:ext cx="8412480" cy="457200"/>
+          </a:xfrm>
+          <a:prstGeom prst="rect">
+            <a:avLst/>
+          </a:prstGeom>
+          <a:noFill/>
+          <a:ln/>
+        </p:spPr>
+        <p:txBody>
+          <a:bodyPr wrap="square" lIns="0" tIns="0" rIns="0" bIns="0" rtlCol="0" anchor="ctr"/>
+          <a:lstStyle/>
+          <a:p>
+            <a:pPr indent="0" marL="0">
+              <a:buNone/>
+            </a:pPr>
+            <a:r>
+              <a:rPr lang="en-US" sz="2200" b="1" dirty="0">
+                <a:solidFill>
+                  <a:srgbClr val="FFFFFF"/>
+                </a:solidFill>
+                <a:latin typeface="Calibri" pitchFamily="34" charset="0"/>
+                <a:ea typeface="Calibri" pitchFamily="34" charset="-122"/>
+                <a:cs typeface="Calibri" pitchFamily="34" charset="-120"/>
+              </a:rPr>
+              <a:t>✏️  Grammar — Your turn</a:t>
+            </a:r>
+            <a:endParaRPr lang="en-US" sz="2200" dirty="0"/>
+          </a:p>
+        </p:txBody>
+      </p:sp>
+      <p:sp>
+        <p:nvSpPr>
+          <p:cNvPr id="4" name="Text 2"/>
+          <p:cNvSpPr/>
+          <p:nvPr/>
+        </p:nvSpPr>
+        <p:spPr>
+          <a:xfrm>
+            <a:off x="365760" y="749808"/>
+            <a:ext cx="8229600" cy="237744"/>
+          </a:xfrm>
+          <a:prstGeom prst="rect">
+            <a:avLst/>
+          </a:prstGeom>
+          <a:noFill/>
+          <a:ln/>
+        </p:spPr>
+        <p:txBody>
+          <a:bodyPr wrap="square" lIns="0" tIns="0" rIns="0" bIns="0" rtlCol="0" anchor="ctr"/>
+          <a:lstStyle/>
+          <a:p>
+            <a:pPr indent="0" marL="0">
+              <a:buNone/>
+            </a:pPr>
+            <a:r>
+              <a:rPr lang="en-US" sz="1100" b="1" spc="100" kern="0" dirty="0">
+                <a:solidFill>
+                  <a:srgbClr val="C7922C"/>
+                </a:solidFill>
+                <a:latin typeface="Calibri" pitchFamily="34" charset="0"/>
+                <a:ea typeface="Calibri" pitchFamily="34" charset="-122"/>
+                <a:cs typeface="Calibri" pitchFamily="34" charset="-120"/>
+              </a:rPr>
+              <a:t>PUNCTUATING DIALOGUE</a:t>
+            </a:r>
+            <a:endParaRPr lang="en-US" sz="1100" dirty="0"/>
+          </a:p>
+        </p:txBody>
+      </p:sp>
+      <p:sp>
+        <p:nvSpPr>
+          <p:cNvPr id="5" name="Shape 3"/>
+          <p:cNvSpPr/>
+          <p:nvPr/>
+        </p:nvSpPr>
+        <p:spPr>
+          <a:xfrm>
+            <a:off x="411480" y="1051560"/>
+            <a:ext cx="4114800" cy="457200"/>
+          </a:xfrm>
+          <a:prstGeom prst="roundRect">
+            <a:avLst>
+              <a:gd name="adj" fmla="val 16000"/>
+            </a:avLst>
+          </a:prstGeom>
+          <a:solidFill>
+            <a:srgbClr val="C7922C"/>
+          </a:solidFill>
+          <a:ln/>
+        </p:spPr>
+      </p:sp>
+      <p:sp>
+        <p:nvSpPr>
+          <p:cNvPr id="6" name="Text 4"/>
+          <p:cNvSpPr/>
+          <p:nvPr/>
+        </p:nvSpPr>
+        <p:spPr>
+          <a:xfrm>
+            <a:off x="457200" y="1106424"/>
+            <a:ext cx="4023360" cy="347472"/>
+          </a:xfrm>
+          <a:prstGeom prst="rect">
+            <a:avLst/>
+          </a:prstGeom>
+          <a:noFill/>
+          <a:ln/>
+        </p:spPr>
+        <p:txBody>
+          <a:bodyPr wrap="square" lIns="0" tIns="0" rIns="0" bIns="0" rtlCol="0" anchor="ctr"/>
+          <a:lstStyle/>
+          <a:p>
+            <a:pPr algn="ctr" indent="0" marL="0">
+              <a:buNone/>
+            </a:pPr>
+            <a:r>
+              <a:rPr lang="en-US" sz="1400" b="1" dirty="0">
+                <a:solidFill>
+                  <a:srgbClr val="FFFFFF"/>
+                </a:solidFill>
+                <a:latin typeface="Calibri" pitchFamily="34" charset="0"/>
+                <a:ea typeface="Calibri" pitchFamily="34" charset="-122"/>
+                <a:cs typeface="Calibri" pitchFamily="34" charset="-120"/>
+              </a:rPr>
+              <a:t>Group 1</a:t>
+            </a:r>
+            <a:endParaRPr lang="en-US" sz="1400" dirty="0"/>
+          </a:p>
+        </p:txBody>
+      </p:sp>
+      <p:sp>
+        <p:nvSpPr>
+          <p:cNvPr id="7" name="Shape 5"/>
+          <p:cNvSpPr/>
+          <p:nvPr/>
+        </p:nvSpPr>
+        <p:spPr>
+          <a:xfrm>
+            <a:off x="411480" y="1572768"/>
+            <a:ext cx="4114800" cy="2011680"/>
+          </a:xfrm>
+          <a:prstGeom prst="roundRect">
+            <a:avLst>
+              <a:gd name="adj" fmla="val 4545"/>
+            </a:avLst>
+          </a:prstGeom>
+          <a:solidFill>
+            <a:srgbClr val="FFFFFF"/>
+          </a:solidFill>
+          <a:ln/>
+          <a:effectLst>
+            <a:outerShdw sx="100000" sy="100000" kx="0" ky="0" algn="bl" rotWithShape="0" blurRad="101600" dist="38100" dir="2700000">
+              <a:srgbClr val="000000">
+                <a:alpha val="12000"/>
+              </a:srgbClr>
+            </a:outerShdw>
+          </a:effectLst>
+        </p:spPr>
+      </p:sp>
+      <p:sp>
+        <p:nvSpPr>
+          <p:cNvPr id="8" name="Text 6"/>
+          <p:cNvSpPr/>
+          <p:nvPr/>
+        </p:nvSpPr>
+        <p:spPr>
+          <a:xfrm>
+            <a:off x="502920" y="1664208"/>
+            <a:ext cx="3931920" cy="1828800"/>
+          </a:xfrm>
+          <a:prstGeom prst="rect">
+            <a:avLst/>
+          </a:prstGeom>
+          <a:noFill/>
+          <a:ln/>
+        </p:spPr>
+        <p:txBody>
+          <a:bodyPr wrap="square" lIns="0" tIns="0" rIns="0" bIns="0" rtlCol="0" anchor="ctr"/>
+          <a:lstStyle/>
+          <a:p>
+            <a:pPr algn="ctr" indent="0" marL="0">
+              <a:buNone/>
+            </a:pPr>
+            <a:r>
+              <a:rPr lang="en-US" sz="1600" dirty="0">
+                <a:solidFill>
+                  <a:srgbClr val="1E293B"/>
+                </a:solidFill>
+                <a:latin typeface="Calibri" pitchFamily="34" charset="0"/>
+                <a:ea typeface="Calibri" pitchFamily="34" charset="-122"/>
+                <a:cs typeface="Calibri" pitchFamily="34" charset="-120"/>
+              </a:rPr>
+              <a:t>“Carry the basket,” said Roscuro.</a:t>
+            </a:r>
+            <a:endParaRPr lang="en-US" sz="1600" dirty="0"/>
+          </a:p>
+          <a:p>
+            <a:pPr algn="ctr" indent="0" marL="0">
+              <a:buNone/>
+            </a:pPr>
+            <a:r>
+              <a:rPr lang="en-US" sz="1600" dirty="0">
+                <a:solidFill>
+                  <a:srgbClr val="1E293B"/>
+                </a:solidFill>
+                <a:latin typeface="Calibri" pitchFamily="34" charset="0"/>
+                <a:ea typeface="Calibri" pitchFamily="34" charset="-122"/>
+                <a:cs typeface="Calibri" pitchFamily="34" charset="-120"/>
+              </a:rPr>
+              <a:t>Mig said, “I want to be a princess.”</a:t>
+            </a:r>
+            <a:endParaRPr lang="en-US" sz="1600" dirty="0"/>
+          </a:p>
+          <a:p>
+            <a:pPr algn="ctr" indent="0" marL="0">
+              <a:buNone/>
+            </a:pPr>
+            <a:r>
+              <a:rPr lang="en-US" sz="1600" dirty="0">
+                <a:solidFill>
+                  <a:srgbClr val="1E293B"/>
+                </a:solidFill>
+                <a:latin typeface="Calibri" pitchFamily="34" charset="0"/>
+                <a:ea typeface="Calibri" pitchFamily="34" charset="-122"/>
+                <a:cs typeface="Calibri" pitchFamily="34" charset="-120"/>
+              </a:rPr>
+              <a:t>“I am hungry,” the prince said.</a:t>
+            </a:r>
+            <a:endParaRPr lang="en-US" sz="1600" dirty="0"/>
+          </a:p>
+          <a:p>
+            <a:pPr algn="ctr" indent="0" marL="0">
+              <a:buNone/>
+            </a:pPr>
+            <a:r>
+              <a:rPr lang="en-US" sz="1600" dirty="0">
+                <a:solidFill>
+                  <a:srgbClr val="1E293B"/>
+                </a:solidFill>
+                <a:latin typeface="Calibri" pitchFamily="34" charset="0"/>
+                <a:ea typeface="Calibri" pitchFamily="34" charset="-122"/>
+                <a:cs typeface="Calibri" pitchFamily="34" charset="-120"/>
+              </a:rPr>
+              <a:t>Cook said, “That is soup.”</a:t>
+            </a:r>
+            <a:endParaRPr lang="en-US" sz="1600" dirty="0"/>
+          </a:p>
+        </p:txBody>
+      </p:sp>
+      <p:sp>
+        <p:nvSpPr>
+          <p:cNvPr id="9" name="Shape 7"/>
+          <p:cNvSpPr/>
+          <p:nvPr/>
+        </p:nvSpPr>
+        <p:spPr>
+          <a:xfrm>
+            <a:off x="4617720" y="1051560"/>
+            <a:ext cx="4114800" cy="457200"/>
+          </a:xfrm>
+          <a:prstGeom prst="roundRect">
+            <a:avLst>
+              <a:gd name="adj" fmla="val 16000"/>
+            </a:avLst>
+          </a:prstGeom>
+          <a:solidFill>
+            <a:srgbClr val="C7922C"/>
+          </a:solidFill>
+          <a:ln/>
+        </p:spPr>
+      </p:sp>
+      <p:sp>
+        <p:nvSpPr>
+          <p:cNvPr id="10" name="Text 8"/>
+          <p:cNvSpPr/>
+          <p:nvPr/>
+        </p:nvSpPr>
+        <p:spPr>
+          <a:xfrm>
+            <a:off x="4663440" y="1106424"/>
+            <a:ext cx="4023360" cy="347472"/>
+          </a:xfrm>
+          <a:prstGeom prst="rect">
+            <a:avLst/>
+          </a:prstGeom>
+          <a:noFill/>
+          <a:ln/>
+        </p:spPr>
+        <p:txBody>
+          <a:bodyPr wrap="square" lIns="0" tIns="0" rIns="0" bIns="0" rtlCol="0" anchor="ctr"/>
+          <a:lstStyle/>
+          <a:p>
+            <a:pPr algn="ctr" indent="0" marL="0">
+              <a:buNone/>
+            </a:pPr>
+            <a:r>
+              <a:rPr lang="en-US" sz="1400" b="1" dirty="0">
+                <a:solidFill>
+                  <a:srgbClr val="FFFFFF"/>
+                </a:solidFill>
+                <a:latin typeface="Calibri" pitchFamily="34" charset="0"/>
+                <a:ea typeface="Calibri" pitchFamily="34" charset="-122"/>
+                <a:cs typeface="Calibri" pitchFamily="34" charset="-120"/>
+              </a:rPr>
+              <a:t>Group 2</a:t>
+            </a:r>
+            <a:endParaRPr lang="en-US" sz="1400" dirty="0"/>
+          </a:p>
+        </p:txBody>
+      </p:sp>
+      <p:sp>
+        <p:nvSpPr>
+          <p:cNvPr id="11" name="Shape 9"/>
+          <p:cNvSpPr/>
+          <p:nvPr/>
+        </p:nvSpPr>
+        <p:spPr>
+          <a:xfrm>
+            <a:off x="4617720" y="1572768"/>
+            <a:ext cx="4114800" cy="2011680"/>
+          </a:xfrm>
+          <a:prstGeom prst="roundRect">
+            <a:avLst>
+              <a:gd name="adj" fmla="val 4545"/>
+            </a:avLst>
+          </a:prstGeom>
+          <a:solidFill>
+            <a:srgbClr val="FFFFFF"/>
+          </a:solidFill>
+          <a:ln/>
+          <a:effectLst>
+            <a:outerShdw sx="100000" sy="100000" kx="0" ky="0" algn="bl" rotWithShape="0" blurRad="101600" dist="38100" dir="2700000">
+              <a:srgbClr val="000000">
+                <a:alpha val="12000"/>
+              </a:srgbClr>
+            </a:outerShdw>
+          </a:effectLst>
+        </p:spPr>
+      </p:sp>
+      <p:sp>
+        <p:nvSpPr>
+          <p:cNvPr id="12" name="Text 10"/>
+          <p:cNvSpPr/>
+          <p:nvPr/>
+        </p:nvSpPr>
+        <p:spPr>
+          <a:xfrm>
+            <a:off x="4709160" y="1664208"/>
+            <a:ext cx="3931920" cy="1828800"/>
+          </a:xfrm>
+          <a:prstGeom prst="rect">
+            <a:avLst/>
+          </a:prstGeom>
+          <a:noFill/>
+          <a:ln/>
+        </p:spPr>
+        <p:txBody>
+          <a:bodyPr wrap="square" lIns="0" tIns="0" rIns="0" bIns="0" rtlCol="0" anchor="ctr"/>
+          <a:lstStyle/>
+          <a:p>
+            <a:pPr algn="ctr" indent="0" marL="0">
+              <a:buNone/>
+            </a:pPr>
+            <a:r>
+              <a:rPr lang="en-US" sz="1600" dirty="0">
+                <a:solidFill>
+                  <a:srgbClr val="1E293B"/>
+                </a:solidFill>
+                <a:latin typeface="Calibri" pitchFamily="34" charset="0"/>
+                <a:ea typeface="Calibri" pitchFamily="34" charset="-122"/>
+                <a:cs typeface="Calibri" pitchFamily="34" charset="-120"/>
+              </a:rPr>
+              <a:t>“Carry the basket” said Roscuro.</a:t>
+            </a:r>
+            <a:endParaRPr lang="en-US" sz="1600" dirty="0"/>
+          </a:p>
+          <a:p>
+            <a:pPr algn="ctr" indent="0" marL="0">
+              <a:buNone/>
+            </a:pPr>
+            <a:r>
+              <a:rPr lang="en-US" sz="1600" dirty="0">
+                <a:solidFill>
+                  <a:srgbClr val="1E293B"/>
+                </a:solidFill>
+                <a:latin typeface="Calibri" pitchFamily="34" charset="0"/>
+                <a:ea typeface="Calibri" pitchFamily="34" charset="-122"/>
+                <a:cs typeface="Calibri" pitchFamily="34" charset="-120"/>
+              </a:rPr>
+              <a:t>Mig said “I want to be a princess.”</a:t>
+            </a:r>
+            <a:endParaRPr lang="en-US" sz="1600" dirty="0"/>
+          </a:p>
+          <a:p>
+            <a:pPr algn="ctr" indent="0" marL="0">
+              <a:buNone/>
+            </a:pPr>
+            <a:r>
+              <a:rPr lang="en-US" sz="1600" dirty="0">
+                <a:solidFill>
+                  <a:srgbClr val="1E293B"/>
+                </a:solidFill>
+                <a:latin typeface="Calibri" pitchFamily="34" charset="0"/>
+                <a:ea typeface="Calibri" pitchFamily="34" charset="-122"/>
+                <a:cs typeface="Calibri" pitchFamily="34" charset="-120"/>
+              </a:rPr>
+              <a:t>“I am hungry” the prince said.</a:t>
+            </a:r>
+            <a:endParaRPr lang="en-US" sz="1600" dirty="0"/>
+          </a:p>
+          <a:p>
+            <a:pPr algn="ctr" indent="0" marL="0">
+              <a:buNone/>
+            </a:pPr>
+            <a:r>
+              <a:rPr lang="en-US" sz="1600" dirty="0">
+                <a:solidFill>
+                  <a:srgbClr val="1E293B"/>
+                </a:solidFill>
+                <a:latin typeface="Calibri" pitchFamily="34" charset="0"/>
+                <a:ea typeface="Calibri" pitchFamily="34" charset="-122"/>
+                <a:cs typeface="Calibri" pitchFamily="34" charset="-120"/>
+              </a:rPr>
+              <a:t>Cook said, “that is soup.”</a:t>
+            </a:r>
+            <a:endParaRPr lang="en-US" sz="1600" dirty="0"/>
+          </a:p>
+        </p:txBody>
+      </p:sp>
+      <p:sp>
+        <p:nvSpPr>
+          <p:cNvPr id="13" name="Text 11"/>
+          <p:cNvSpPr/>
+          <p:nvPr/>
+        </p:nvSpPr>
+        <p:spPr>
+          <a:xfrm>
+            <a:off x="365760" y="3703320"/>
+            <a:ext cx="8412480" cy="411480"/>
+          </a:xfrm>
+          <a:prstGeom prst="rect">
+            <a:avLst/>
+          </a:prstGeom>
+          <a:noFill/>
+          <a:ln/>
+        </p:spPr>
+        <p:txBody>
+          <a:bodyPr wrap="square" lIns="0" tIns="0" rIns="0" bIns="0" rtlCol="0" anchor="ctr"/>
+          <a:lstStyle/>
+          <a:p>
+            <a:pPr indent="0" marL="0">
+              <a:buNone/>
+            </a:pPr>
+            <a:r>
+              <a:rPr lang="en-US" sz="1500" b="1" dirty="0">
+                <a:solidFill>
+                  <a:srgbClr val="34B76F"/>
+                </a:solidFill>
+                <a:latin typeface="Calibri" pitchFamily="34" charset="0"/>
+                <a:ea typeface="Calibri" pitchFamily="34" charset="-122"/>
+                <a:cs typeface="Calibri" pitchFamily="34" charset="-120"/>
+              </a:rPr>
+              <a:t>Now name the split: what does every word in each group have in common?</a:t>
+            </a:r>
+            <a:endParaRPr lang="en-US" sz="1500" dirty="0"/>
+          </a:p>
+        </p:txBody>
+      </p:sp>
+    </p:spTree>
+  </p:cSld>
+  <p:clrMapOvr>
+    <a:masterClrMapping/>
+  </p:clrMapOvr>
+</p:sld>
+</file>
+
+<file path=ppt/slides/slide16.xml><?xml version="1.0" encoding="utf-8"?>
+<p:sld xmlns:a="http://schemas.openxmlformats.org/drawingml/2006/main" xmlns:r="http://schemas.openxmlformats.org/officeDocument/2006/relationships" xmlns:p="http://schemas.openxmlformats.org/presentationml/2006/main">
+  <p:cSld name="Slide 16">
+    <p:bg>
+      <p:bgPr>
+        <a:solidFill>
+          <a:srgbClr val="F8FAFC"/>
+        </a:solidFill>
+      </p:bgPr>
+    </p:bg>
+    <p:spTree>
+      <p:nvGrpSpPr>
+        <p:cNvPr id="1" name=""/>
+        <p:cNvGrpSpPr/>
+        <p:nvPr/>
+      </p:nvGrpSpPr>
+      <p:grpSpPr>
+        <a:xfrm>
+          <a:off x="0" y="0"/>
+          <a:ext cx="0" cy="0"/>
+          <a:chOff x="0" y="0"/>
+          <a:chExt cx="0" cy="0"/>
+        </a:xfrm>
+      </p:grpSpPr>
+      <p:sp>
+        <p:nvSpPr>
+          <p:cNvPr id="2" name="Shape 0"/>
+          <p:cNvSpPr/>
+          <p:nvPr/>
+        </p:nvSpPr>
+        <p:spPr>
+          <a:xfrm>
+            <a:off x="0" y="0"/>
+            <a:ext cx="9144000" cy="566928"/>
+          </a:xfrm>
+          <a:prstGeom prst="rect">
+            <a:avLst/>
+          </a:prstGeom>
+          <a:solidFill>
+            <a:srgbClr val="0E1C42"/>
+          </a:solidFill>
+          <a:ln/>
+        </p:spPr>
+      </p:sp>
+      <p:sp>
+        <p:nvSpPr>
+          <p:cNvPr id="3" name="Text 1"/>
+          <p:cNvSpPr/>
+          <p:nvPr/>
+        </p:nvSpPr>
+        <p:spPr>
+          <a:xfrm>
+            <a:off x="365760" y="54864"/>
+            <a:ext cx="8412480" cy="457200"/>
+          </a:xfrm>
+          <a:prstGeom prst="rect">
+            <a:avLst/>
+          </a:prstGeom>
+          <a:noFill/>
+          <a:ln/>
+        </p:spPr>
+        <p:txBody>
+          <a:bodyPr wrap="square" lIns="0" tIns="0" rIns="0" bIns="0" rtlCol="0" anchor="ctr"/>
+          <a:lstStyle/>
+          <a:p>
+            <a:pPr indent="0" marL="0">
+              <a:buNone/>
+            </a:pPr>
+            <a:r>
+              <a:rPr lang="en-US" sz="2200" b="1" dirty="0">
+                <a:solidFill>
+                  <a:srgbClr val="FFFFFF"/>
+                </a:solidFill>
+                <a:latin typeface="Calibri" pitchFamily="34" charset="0"/>
+                <a:ea typeface="Calibri" pitchFamily="34" charset="-122"/>
+                <a:cs typeface="Calibri" pitchFamily="34" charset="-120"/>
+              </a:rPr>
+              <a:t>🔠  Spelling</a:t>
+            </a:r>
+            <a:endParaRPr lang="en-US" sz="2200" dirty="0"/>
+          </a:p>
+        </p:txBody>
+      </p:sp>
+      <p:sp>
+        <p:nvSpPr>
+          <p:cNvPr id="4" name="Text 2"/>
+          <p:cNvSpPr/>
+          <p:nvPr/>
+        </p:nvSpPr>
+        <p:spPr>
+          <a:xfrm>
+            <a:off x="365760" y="777240"/>
+            <a:ext cx="8229600" cy="237744"/>
+          </a:xfrm>
+          <a:prstGeom prst="rect">
+            <a:avLst/>
+          </a:prstGeom>
+          <a:noFill/>
+          <a:ln/>
+        </p:spPr>
+        <p:txBody>
+          <a:bodyPr wrap="square" lIns="0" tIns="0" rIns="0" bIns="0" rtlCol="0" anchor="ctr"/>
+          <a:lstStyle/>
+          <a:p>
+            <a:pPr indent="0" marL="0">
+              <a:buNone/>
+            </a:pPr>
+            <a:r>
+              <a:rPr lang="en-US" sz="1100" b="1" spc="100" kern="0" dirty="0">
+                <a:solidFill>
+                  <a:srgbClr val="0E1C42"/>
+                </a:solidFill>
+                <a:latin typeface="Calibri" pitchFamily="34" charset="0"/>
+                <a:ea typeface="Calibri" pitchFamily="34" charset="-122"/>
+                <a:cs typeface="Calibri" pitchFamily="34" charset="-120"/>
+              </a:rPr>
+              <a:t>MULTISYLLABIC WORDS WITH FAMILIAR SUFFIXES</a:t>
+            </a:r>
+            <a:endParaRPr lang="en-US" sz="1100" dirty="0"/>
+          </a:p>
+        </p:txBody>
+      </p:sp>
+      <p:sp>
+        <p:nvSpPr>
+          <p:cNvPr id="5" name="Text 3"/>
+          <p:cNvSpPr/>
+          <p:nvPr/>
+        </p:nvSpPr>
+        <p:spPr>
+          <a:xfrm>
+            <a:off x="365760" y="1078992"/>
+            <a:ext cx="8229600" cy="237744"/>
+          </a:xfrm>
+          <a:prstGeom prst="rect">
+            <a:avLst/>
+          </a:prstGeom>
+          <a:noFill/>
+          <a:ln/>
+        </p:spPr>
+        <p:txBody>
+          <a:bodyPr wrap="square" lIns="0" tIns="0" rIns="0" bIns="0" rtlCol="0" anchor="ctr"/>
+          <a:lstStyle/>
+          <a:p>
+            <a:pPr indent="0" marL="0">
+              <a:buNone/>
+            </a:pPr>
+            <a:r>
+              <a:rPr lang="en-US" sz="1100" b="1" spc="100" kern="0" dirty="0">
+                <a:solidFill>
+                  <a:srgbClr val="64748B"/>
+                </a:solidFill>
+                <a:latin typeface="Calibri" pitchFamily="34" charset="0"/>
+                <a:ea typeface="Calibri" pitchFamily="34" charset="-122"/>
+                <a:cs typeface="Calibri" pitchFamily="34" charset="-120"/>
+              </a:rPr>
+              <a:t>WORD BANK</a:t>
+            </a:r>
+            <a:endParaRPr lang="en-US" sz="1100" dirty="0"/>
+          </a:p>
+        </p:txBody>
+      </p:sp>
+      <p:sp>
+        <p:nvSpPr>
+          <p:cNvPr id="6" name="Shape 4"/>
+          <p:cNvSpPr/>
+          <p:nvPr/>
+        </p:nvSpPr>
+        <p:spPr>
+          <a:xfrm>
+            <a:off x="365760" y="1353312"/>
+            <a:ext cx="8412480" cy="1005840"/>
+          </a:xfrm>
+          <a:prstGeom prst="roundRect">
+            <a:avLst>
+              <a:gd name="adj" fmla="val 9091"/>
+            </a:avLst>
+          </a:prstGeom>
+          <a:solidFill>
+            <a:srgbClr val="FFFFFF"/>
+          </a:solidFill>
+          <a:ln w="19050">
+            <a:solidFill>
+              <a:srgbClr val="0E1C42"/>
+            </a:solidFill>
+            <a:prstDash val="solid"/>
+          </a:ln>
+          <a:effectLst>
+            <a:outerShdw sx="100000" sy="100000" kx="0" ky="0" algn="bl" rotWithShape="0" blurRad="101600" dist="38100" dir="2700000">
+              <a:srgbClr val="000000">
+                <a:alpha val="12000"/>
+              </a:srgbClr>
+            </a:outerShdw>
+          </a:effectLst>
+        </p:spPr>
+      </p:sp>
+      <p:sp>
+        <p:nvSpPr>
+          <p:cNvPr id="7" name="Text 5"/>
+          <p:cNvSpPr/>
+          <p:nvPr/>
+        </p:nvSpPr>
+        <p:spPr>
+          <a:xfrm>
+            <a:off x="594360" y="1481328"/>
+            <a:ext cx="7955280" cy="749808"/>
+          </a:xfrm>
+          <a:prstGeom prst="rect">
+            <a:avLst/>
+          </a:prstGeom>
+          <a:noFill/>
+          <a:ln/>
+        </p:spPr>
+        <p:txBody>
+          <a:bodyPr wrap="square" lIns="0" tIns="0" rIns="0" bIns="0" rtlCol="0" anchor="ctr"/>
+          <a:lstStyle/>
+          <a:p>
+            <a:pPr indent="0" marL="0">
+              <a:buNone/>
+            </a:pPr>
+            <a:r>
+              <a:rPr lang="en-US" sz="1700" dirty="0">
+                <a:solidFill>
+                  <a:srgbClr val="0E1C42"/>
+                </a:solidFill>
+                <a:latin typeface="Calibri" pitchFamily="34" charset="0"/>
+                <a:ea typeface="Calibri" pitchFamily="34" charset="-122"/>
+                <a:cs typeface="Calibri" pitchFamily="34" charset="-120"/>
+              </a:rPr>
+              <a:t>hopelessness   ·   thoughtfulness   ·   fearlessly   ·   impatiently   ·   darkness   ·   hopeful   ·   quickly   ·   disagree</a:t>
+            </a:r>
+            <a:endParaRPr lang="en-US" sz="1700" dirty="0"/>
+          </a:p>
+        </p:txBody>
+      </p:sp>
+      <p:sp>
+        <p:nvSpPr>
+          <p:cNvPr id="8" name="Text 6"/>
+          <p:cNvSpPr/>
+          <p:nvPr/>
+        </p:nvSpPr>
+        <p:spPr>
+          <a:xfrm>
+            <a:off x="365760" y="2514600"/>
+            <a:ext cx="8412480" cy="457200"/>
+          </a:xfrm>
+          <a:prstGeom prst="rect">
+            <a:avLst/>
+          </a:prstGeom>
+          <a:noFill/>
+          <a:ln/>
+        </p:spPr>
+        <p:txBody>
+          <a:bodyPr wrap="square" lIns="0" tIns="0" rIns="0" bIns="0" rtlCol="0" anchor="ctr"/>
+          <a:lstStyle/>
+          <a:p>
+            <a:pPr indent="0" marL="0">
+              <a:buNone/>
+            </a:pPr>
+            <a:r>
+              <a:rPr lang="en-US" sz="1500" i="1" dirty="0">
+                <a:solidFill>
+                  <a:srgbClr val="64748B"/>
+                </a:solidFill>
+                <a:latin typeface="Calibri" pitchFamily="34" charset="0"/>
+                <a:ea typeface="Calibri" pitchFamily="34" charset="-122"/>
+                <a:cs typeface="Calibri" pitchFamily="34" charset="-120"/>
+              </a:rPr>
+              <a:t>Which column does each word belong in?  Columns: Base + two endings  |  Base + one ending</a:t>
+            </a:r>
+            <a:endParaRPr lang="en-US" sz="1500" dirty="0"/>
+          </a:p>
+        </p:txBody>
+      </p:sp>
+    </p:spTree>
+  </p:cSld>
+  <p:clrMapOvr>
+    <a:masterClrMapping/>
+  </p:clrMapOvr>
+</p:sld>
+</file>
+
+<file path=ppt/slides/slide17.xml><?xml version="1.0" encoding="utf-8"?>
+<p:sld xmlns:a="http://schemas.openxmlformats.org/drawingml/2006/main" xmlns:r="http://schemas.openxmlformats.org/officeDocument/2006/relationships" xmlns:p="http://schemas.openxmlformats.org/presentationml/2006/main">
+  <p:cSld name="Slide 17">
+    <p:bg>
+      <p:bgPr>
+        <a:solidFill>
+          <a:srgbClr val="F8FAFC"/>
+        </a:solidFill>
+      </p:bgPr>
+    </p:bg>
+    <p:spTree>
+      <p:nvGrpSpPr>
+        <p:cNvPr id="1" name=""/>
+        <p:cNvGrpSpPr/>
+        <p:nvPr/>
+      </p:nvGrpSpPr>
+      <p:grpSpPr>
+        <a:xfrm>
+          <a:off x="0" y="0"/>
+          <a:ext cx="0" cy="0"/>
+          <a:chOff x="0" y="0"/>
+          <a:chExt cx="0" cy="0"/>
+        </a:xfrm>
+      </p:grpSpPr>
+      <p:sp>
+        <p:nvSpPr>
+          <p:cNvPr id="2" name="Shape 0"/>
+          <p:cNvSpPr/>
+          <p:nvPr/>
+        </p:nvSpPr>
+        <p:spPr>
+          <a:xfrm>
+            <a:off x="0" y="0"/>
+            <a:ext cx="9144000" cy="566928"/>
+          </a:xfrm>
+          <a:prstGeom prst="rect">
+            <a:avLst/>
+          </a:prstGeom>
+          <a:solidFill>
+            <a:srgbClr val="0E1C42"/>
+          </a:solidFill>
+          <a:ln/>
+        </p:spPr>
+      </p:sp>
+      <p:sp>
+        <p:nvSpPr>
+          <p:cNvPr id="3" name="Text 1"/>
+          <p:cNvSpPr/>
+          <p:nvPr/>
+        </p:nvSpPr>
+        <p:spPr>
+          <a:xfrm>
+            <a:off x="365760" y="54864"/>
+            <a:ext cx="8412480" cy="457200"/>
+          </a:xfrm>
+          <a:prstGeom prst="rect">
+            <a:avLst/>
+          </a:prstGeom>
+          <a:noFill/>
+          <a:ln/>
+        </p:spPr>
+        <p:txBody>
+          <a:bodyPr wrap="square" lIns="0" tIns="0" rIns="0" bIns="0" rtlCol="0" anchor="ctr"/>
+          <a:lstStyle/>
+          <a:p>
+            <a:pPr indent="0" marL="0">
+              <a:buNone/>
+            </a:pPr>
+            <a:r>
+              <a:rPr lang="en-US" sz="2200" b="1" dirty="0">
+                <a:solidFill>
+                  <a:srgbClr val="FFFFFF"/>
+                </a:solidFill>
+                <a:latin typeface="Calibri" pitchFamily="34" charset="0"/>
+                <a:ea typeface="Calibri" pitchFamily="34" charset="-122"/>
+                <a:cs typeface="Calibri" pitchFamily="34" charset="-120"/>
+              </a:rPr>
+              <a:t>🔠  Spelling</a:t>
+            </a:r>
+            <a:endParaRPr lang="en-US" sz="2200" dirty="0"/>
+          </a:p>
+        </p:txBody>
+      </p:sp>
+      <p:sp>
+        <p:nvSpPr>
+          <p:cNvPr id="4" name="Text 2"/>
+          <p:cNvSpPr/>
+          <p:nvPr/>
+        </p:nvSpPr>
+        <p:spPr>
+          <a:xfrm>
+            <a:off x="365760" y="777240"/>
+            <a:ext cx="8229600" cy="237744"/>
+          </a:xfrm>
+          <a:prstGeom prst="rect">
+            <a:avLst/>
+          </a:prstGeom>
+          <a:noFill/>
+          <a:ln/>
+        </p:spPr>
+        <p:txBody>
+          <a:bodyPr wrap="square" lIns="0" tIns="0" rIns="0" bIns="0" rtlCol="0" anchor="ctr"/>
+          <a:lstStyle/>
+          <a:p>
+            <a:pPr indent="0" marL="0">
+              <a:buNone/>
+            </a:pPr>
+            <a:r>
+              <a:rPr lang="en-US" sz="1100" b="1" spc="100" kern="0" dirty="0">
+                <a:solidFill>
+                  <a:srgbClr val="0E1C42"/>
+                </a:solidFill>
+                <a:latin typeface="Calibri" pitchFamily="34" charset="0"/>
+                <a:ea typeface="Calibri" pitchFamily="34" charset="-122"/>
+                <a:cs typeface="Calibri" pitchFamily="34" charset="-120"/>
+              </a:rPr>
+              <a:t>MULTISYLLABIC WORDS WITH FAMILIAR SUFFIXES</a:t>
+            </a:r>
+            <a:endParaRPr lang="en-US" sz="1100" dirty="0"/>
+          </a:p>
+        </p:txBody>
+      </p:sp>
+      <p:sp>
+        <p:nvSpPr>
+          <p:cNvPr id="5" name="Shape 3"/>
+          <p:cNvSpPr/>
+          <p:nvPr/>
+        </p:nvSpPr>
+        <p:spPr>
+          <a:xfrm>
+            <a:off x="411480" y="1078992"/>
+            <a:ext cx="4114800" cy="457200"/>
+          </a:xfrm>
+          <a:prstGeom prst="roundRect">
+            <a:avLst>
+              <a:gd name="adj" fmla="val 16000"/>
+            </a:avLst>
+          </a:prstGeom>
+          <a:solidFill>
+            <a:srgbClr val="0E1C42"/>
+          </a:solidFill>
+          <a:ln/>
+        </p:spPr>
+      </p:sp>
+      <p:sp>
+        <p:nvSpPr>
+          <p:cNvPr id="6" name="Text 4"/>
+          <p:cNvSpPr/>
+          <p:nvPr/>
+        </p:nvSpPr>
+        <p:spPr>
+          <a:xfrm>
+            <a:off x="457200" y="1133856"/>
+            <a:ext cx="4023360" cy="347472"/>
+          </a:xfrm>
+          <a:prstGeom prst="rect">
+            <a:avLst/>
+          </a:prstGeom>
+          <a:noFill/>
+          <a:ln/>
+        </p:spPr>
+        <p:txBody>
+          <a:bodyPr wrap="square" lIns="0" tIns="0" rIns="0" bIns="0" rtlCol="0" anchor="ctr"/>
+          <a:lstStyle/>
+          <a:p>
+            <a:pPr algn="ctr" indent="0" marL="0">
+              <a:buNone/>
+            </a:pPr>
+            <a:r>
+              <a:rPr lang="en-US" sz="1300" b="1" dirty="0">
+                <a:solidFill>
+                  <a:srgbClr val="FFFFFF"/>
+                </a:solidFill>
+                <a:latin typeface="Calibri" pitchFamily="34" charset="0"/>
+                <a:ea typeface="Calibri" pitchFamily="34" charset="-122"/>
+                <a:cs typeface="Calibri" pitchFamily="34" charset="-120"/>
+              </a:rPr>
+              <a:t>Base + two endings</a:t>
+            </a:r>
+            <a:endParaRPr lang="en-US" sz="1300" dirty="0"/>
+          </a:p>
+        </p:txBody>
+      </p:sp>
+      <p:sp>
+        <p:nvSpPr>
+          <p:cNvPr id="7" name="Shape 5"/>
+          <p:cNvSpPr/>
+          <p:nvPr/>
+        </p:nvSpPr>
+        <p:spPr>
+          <a:xfrm>
+            <a:off x="411480" y="1591056"/>
+            <a:ext cx="4114800" cy="2103120"/>
+          </a:xfrm>
+          <a:prstGeom prst="roundRect">
+            <a:avLst>
+              <a:gd name="adj" fmla="val 4348"/>
+            </a:avLst>
+          </a:prstGeom>
+          <a:solidFill>
+            <a:srgbClr val="FFFFFF"/>
+          </a:solidFill>
+          <a:ln/>
+          <a:effectLst>
+            <a:outerShdw sx="100000" sy="100000" kx="0" ky="0" algn="bl" rotWithShape="0" blurRad="101600" dist="38100" dir="2700000">
+              <a:srgbClr val="000000">
+                <a:alpha val="12000"/>
+              </a:srgbClr>
+            </a:outerShdw>
+          </a:effectLst>
+        </p:spPr>
+      </p:sp>
+      <p:sp>
+        <p:nvSpPr>
+          <p:cNvPr id="8" name="Text 6"/>
+          <p:cNvSpPr/>
+          <p:nvPr/>
+        </p:nvSpPr>
+        <p:spPr>
+          <a:xfrm>
+            <a:off x="502920" y="1700784"/>
+            <a:ext cx="3931920" cy="1883664"/>
+          </a:xfrm>
+          <a:prstGeom prst="rect">
+            <a:avLst/>
+          </a:prstGeom>
+          <a:noFill/>
+          <a:ln/>
+        </p:spPr>
+        <p:txBody>
+          <a:bodyPr wrap="square" lIns="0" tIns="0" rIns="0" bIns="0" rtlCol="0" anchor="ctr"/>
+          <a:lstStyle/>
+          <a:p>
+            <a:pPr algn="ctr" indent="0" marL="0">
+              <a:buNone/>
+            </a:pPr>
+            <a:r>
+              <a:rPr lang="en-US" sz="1400" dirty="0">
+                <a:solidFill>
+                  <a:srgbClr val="1E293B"/>
+                </a:solidFill>
+                <a:latin typeface="Calibri" pitchFamily="34" charset="0"/>
+                <a:ea typeface="Calibri" pitchFamily="34" charset="-122"/>
+                <a:cs typeface="Calibri" pitchFamily="34" charset="-120"/>
+              </a:rPr>
+              <a:t>hopelessness</a:t>
+            </a:r>
+            <a:endParaRPr lang="en-US" sz="1400" dirty="0"/>
+          </a:p>
+          <a:p>
+            <a:pPr algn="ctr" indent="0" marL="0">
+              <a:buNone/>
+            </a:pPr>
+            <a:r>
+              <a:rPr lang="en-US" sz="1400" dirty="0">
+                <a:solidFill>
+                  <a:srgbClr val="1E293B"/>
+                </a:solidFill>
+                <a:latin typeface="Calibri" pitchFamily="34" charset="0"/>
+                <a:ea typeface="Calibri" pitchFamily="34" charset="-122"/>
+                <a:cs typeface="Calibri" pitchFamily="34" charset="-120"/>
+              </a:rPr>
+              <a:t>thoughtfulness</a:t>
+            </a:r>
+            <a:endParaRPr lang="en-US" sz="1400" dirty="0"/>
+          </a:p>
+          <a:p>
+            <a:pPr algn="ctr" indent="0" marL="0">
+              <a:buNone/>
+            </a:pPr>
+            <a:r>
+              <a:rPr lang="en-US" sz="1400" dirty="0">
+                <a:solidFill>
+                  <a:srgbClr val="1E293B"/>
+                </a:solidFill>
+                <a:latin typeface="Calibri" pitchFamily="34" charset="0"/>
+                <a:ea typeface="Calibri" pitchFamily="34" charset="-122"/>
+                <a:cs typeface="Calibri" pitchFamily="34" charset="-120"/>
+              </a:rPr>
+              <a:t>fearlessly</a:t>
+            </a:r>
+            <a:endParaRPr lang="en-US" sz="1400" dirty="0"/>
+          </a:p>
+          <a:p>
+            <a:pPr algn="ctr" indent="0" marL="0">
+              <a:buNone/>
+            </a:pPr>
+            <a:r>
+              <a:rPr lang="en-US" sz="1400" dirty="0">
+                <a:solidFill>
+                  <a:srgbClr val="1E293B"/>
+                </a:solidFill>
+                <a:latin typeface="Calibri" pitchFamily="34" charset="0"/>
+                <a:ea typeface="Calibri" pitchFamily="34" charset="-122"/>
+                <a:cs typeface="Calibri" pitchFamily="34" charset="-120"/>
+              </a:rPr>
+              <a:t>impatiently</a:t>
+            </a:r>
+            <a:endParaRPr lang="en-US" sz="1400" dirty="0"/>
+          </a:p>
+        </p:txBody>
+      </p:sp>
+      <p:sp>
+        <p:nvSpPr>
+          <p:cNvPr id="9" name="Shape 7"/>
+          <p:cNvSpPr/>
+          <p:nvPr/>
+        </p:nvSpPr>
+        <p:spPr>
+          <a:xfrm>
+            <a:off x="4617720" y="1078992"/>
+            <a:ext cx="4114800" cy="457200"/>
+          </a:xfrm>
+          <a:prstGeom prst="roundRect">
+            <a:avLst>
+              <a:gd name="adj" fmla="val 16000"/>
+            </a:avLst>
+          </a:prstGeom>
+          <a:solidFill>
+            <a:srgbClr val="0E1C42"/>
+          </a:solidFill>
+          <a:ln/>
+        </p:spPr>
+      </p:sp>
+      <p:sp>
+        <p:nvSpPr>
+          <p:cNvPr id="10" name="Text 8"/>
+          <p:cNvSpPr/>
+          <p:nvPr/>
+        </p:nvSpPr>
+        <p:spPr>
+          <a:xfrm>
+            <a:off x="4663440" y="1133856"/>
+            <a:ext cx="4023360" cy="347472"/>
+          </a:xfrm>
+          <a:prstGeom prst="rect">
+            <a:avLst/>
+          </a:prstGeom>
+          <a:noFill/>
+          <a:ln/>
+        </p:spPr>
+        <p:txBody>
+          <a:bodyPr wrap="square" lIns="0" tIns="0" rIns="0" bIns="0" rtlCol="0" anchor="ctr"/>
+          <a:lstStyle/>
+          <a:p>
+            <a:pPr algn="ctr" indent="0" marL="0">
+              <a:buNone/>
+            </a:pPr>
+            <a:r>
+              <a:rPr lang="en-US" sz="1300" b="1" dirty="0">
+                <a:solidFill>
+                  <a:srgbClr val="FFFFFF"/>
+                </a:solidFill>
+                <a:latin typeface="Calibri" pitchFamily="34" charset="0"/>
+                <a:ea typeface="Calibri" pitchFamily="34" charset="-122"/>
+                <a:cs typeface="Calibri" pitchFamily="34" charset="-120"/>
+              </a:rPr>
+              <a:t>Base + one ending</a:t>
+            </a:r>
+            <a:endParaRPr lang="en-US" sz="1300" dirty="0"/>
+          </a:p>
+        </p:txBody>
+      </p:sp>
+      <p:sp>
+        <p:nvSpPr>
+          <p:cNvPr id="11" name="Shape 9"/>
+          <p:cNvSpPr/>
+          <p:nvPr/>
+        </p:nvSpPr>
+        <p:spPr>
+          <a:xfrm>
+            <a:off x="4617720" y="1591056"/>
+            <a:ext cx="4114800" cy="2103120"/>
+          </a:xfrm>
+          <a:prstGeom prst="roundRect">
+            <a:avLst>
+              <a:gd name="adj" fmla="val 4348"/>
+            </a:avLst>
+          </a:prstGeom>
+          <a:solidFill>
+            <a:srgbClr val="FFFFFF"/>
+          </a:solidFill>
+          <a:ln/>
+          <a:effectLst>
+            <a:outerShdw sx="100000" sy="100000" kx="0" ky="0" algn="bl" rotWithShape="0" blurRad="101600" dist="38100" dir="2700000">
+              <a:srgbClr val="000000">
+                <a:alpha val="12000"/>
+              </a:srgbClr>
+            </a:outerShdw>
+          </a:effectLst>
+        </p:spPr>
+      </p:sp>
+      <p:sp>
+        <p:nvSpPr>
+          <p:cNvPr id="12" name="Text 10"/>
+          <p:cNvSpPr/>
+          <p:nvPr/>
+        </p:nvSpPr>
+        <p:spPr>
+          <a:xfrm>
+            <a:off x="4709160" y="1700784"/>
+            <a:ext cx="3931920" cy="1883664"/>
+          </a:xfrm>
+          <a:prstGeom prst="rect">
+            <a:avLst/>
+          </a:prstGeom>
+          <a:noFill/>
+          <a:ln/>
+        </p:spPr>
+        <p:txBody>
+          <a:bodyPr wrap="square" lIns="0" tIns="0" rIns="0" bIns="0" rtlCol="0" anchor="ctr"/>
+          <a:lstStyle/>
+          <a:p>
+            <a:pPr algn="ctr" indent="0" marL="0">
+              <a:buNone/>
+            </a:pPr>
+            <a:r>
+              <a:rPr lang="en-US" sz="1400" dirty="0">
+                <a:solidFill>
+                  <a:srgbClr val="1E293B"/>
+                </a:solidFill>
+                <a:latin typeface="Calibri" pitchFamily="34" charset="0"/>
+                <a:ea typeface="Calibri" pitchFamily="34" charset="-122"/>
+                <a:cs typeface="Calibri" pitchFamily="34" charset="-120"/>
+              </a:rPr>
+              <a:t>darkness</a:t>
+            </a:r>
+            <a:endParaRPr lang="en-US" sz="1400" dirty="0"/>
+          </a:p>
+          <a:p>
+            <a:pPr algn="ctr" indent="0" marL="0">
+              <a:buNone/>
+            </a:pPr>
+            <a:r>
+              <a:rPr lang="en-US" sz="1400" dirty="0">
+                <a:solidFill>
+                  <a:srgbClr val="1E293B"/>
+                </a:solidFill>
+                <a:latin typeface="Calibri" pitchFamily="34" charset="0"/>
+                <a:ea typeface="Calibri" pitchFamily="34" charset="-122"/>
+                <a:cs typeface="Calibri" pitchFamily="34" charset="-120"/>
+              </a:rPr>
+              <a:t>hopeful</a:t>
+            </a:r>
+            <a:endParaRPr lang="en-US" sz="1400" dirty="0"/>
+          </a:p>
+          <a:p>
+            <a:pPr algn="ctr" indent="0" marL="0">
+              <a:buNone/>
+            </a:pPr>
+            <a:r>
+              <a:rPr lang="en-US" sz="1400" dirty="0">
+                <a:solidFill>
+                  <a:srgbClr val="1E293B"/>
+                </a:solidFill>
+                <a:latin typeface="Calibri" pitchFamily="34" charset="0"/>
+                <a:ea typeface="Calibri" pitchFamily="34" charset="-122"/>
+                <a:cs typeface="Calibri" pitchFamily="34" charset="-120"/>
+              </a:rPr>
+              <a:t>quickly</a:t>
+            </a:r>
+            <a:endParaRPr lang="en-US" sz="1400" dirty="0"/>
+          </a:p>
+          <a:p>
+            <a:pPr algn="ctr" indent="0" marL="0">
+              <a:buNone/>
+            </a:pPr>
+            <a:r>
+              <a:rPr lang="en-US" sz="1400" dirty="0">
+                <a:solidFill>
+                  <a:srgbClr val="1E293B"/>
+                </a:solidFill>
+                <a:latin typeface="Calibri" pitchFamily="34" charset="0"/>
+                <a:ea typeface="Calibri" pitchFamily="34" charset="-122"/>
+                <a:cs typeface="Calibri" pitchFamily="34" charset="-120"/>
+              </a:rPr>
+              <a:t>disagree</a:t>
+            </a:r>
+            <a:endParaRPr lang="en-US" sz="1400" dirty="0"/>
+          </a:p>
+        </p:txBody>
+      </p:sp>
+    </p:spTree>
+  </p:cSld>
+  <p:clrMapOvr>
+    <a:masterClrMapping/>
+  </p:clrMapOvr>
+</p:sld>
+</file>
+
+<file path=ppt/slides/slide18.xml><?xml version="1.0" encoding="utf-8"?>
+<p:sld xmlns:a="http://schemas.openxmlformats.org/drawingml/2006/main" xmlns:r="http://schemas.openxmlformats.org/officeDocument/2006/relationships" xmlns:p="http://schemas.openxmlformats.org/presentationml/2006/main">
+  <p:cSld name="Slide 18">
     <p:bg>
       <p:bgPr>
         <a:solidFill>
@@ -4933,9 +7390,9 @@
 </p:sld>
 </file>
 
-<file path=ppt/slides/slide16.xml><?xml version="1.0" encoding="utf-8"?>
+<file path=ppt/slides/slide19.xml><?xml version="1.0" encoding="utf-8"?>
 <p:sld xmlns:a="http://schemas.openxmlformats.org/drawingml/2006/main" xmlns:r="http://schemas.openxmlformats.org/officeDocument/2006/relationships" xmlns:p="http://schemas.openxmlformats.org/presentationml/2006/main">
-  <p:cSld name="Slide 16">
+  <p:cSld name="Slide 19">
     <p:bg>
       <p:bgPr>
         <a:solidFill>
@@ -6473,7 +8930,7 @@
                 <a:ea typeface="Calibri" pitchFamily="34" charset="-122"/>
                 <a:cs typeface="Calibri" pitchFamily="34" charset="-120"/>
               </a:rPr>
-              <a:t>Good readers pay attention to setting . Places shape what characters feel and do.</a:t>
+              <a:t>Good readers pay attention to setting. Places shape what characters feel and do.</a:t>
             </a:r>
             <a:endParaRPr lang="en-US" sz="1500" dirty="0"/>
           </a:p>
@@ -6493,7 +8950,7 @@
     <p:bg>
       <p:bgPr>
         <a:solidFill>
-          <a:srgbClr val="F8FAFC"/>
+          <a:srgbClr val="FFFFFF"/>
         </a:solidFill>
       </p:bgPr>
     </p:bg>
@@ -6578,7 +9035,7 @@
         </p:nvSpPr>
         <p:spPr>
           <a:xfrm>
-            <a:off x="365760" y="749808"/>
+            <a:off x="365760" y="804672"/>
             <a:ext cx="8229600" cy="237744"/>
           </a:xfrm>
           <a:prstGeom prst="rect">
@@ -6603,7 +9060,7 @@
                 <a:ea typeface="Calibri" pitchFamily="34" charset="-122"/>
                 <a:cs typeface="Calibri" pitchFamily="34" charset="-120"/>
               </a:rPr>
-              <a:t>FIX THESE SENTENCES</a:t>
+              <a:t>CORRECT MODEL — STUDY WHAT IS RIGHT</a:t>
             </a:r>
             <a:endParaRPr lang="en-US" sz="1100" dirty="0"/>
           </a:p>
@@ -6617,16 +9074,16 @@
         </p:nvSpPr>
         <p:spPr>
           <a:xfrm>
-            <a:off x="365760" y="1024128"/>
-            <a:ext cx="8412480" cy="777240"/>
+            <a:off x="365760" y="1078992"/>
+            <a:ext cx="8412480" cy="822960"/>
           </a:xfrm>
           <a:prstGeom prst="roundRect">
             <a:avLst>
-              <a:gd name="adj" fmla="val 11765"/>
+              <a:gd name="adj" fmla="val 11111"/>
             </a:avLst>
           </a:prstGeom>
           <a:solidFill>
-            <a:srgbClr val="FFFFFF"/>
+            <a:srgbClr val="E5F7FC"/>
           </a:solidFill>
           <a:ln w="19050">
             <a:solidFill>
@@ -6651,8 +9108,8 @@
         </p:nvSpPr>
         <p:spPr>
           <a:xfrm>
-            <a:off x="594360" y="1152144"/>
-            <a:ext cx="7955280" cy="521208"/>
+            <a:off x="594360" y="1207008"/>
+            <a:ext cx="7955280" cy="566928"/>
           </a:xfrm>
           <a:prstGeom prst="rect">
             <a:avLst/>
@@ -6676,7 +9133,7 @@
                 <a:ea typeface="Calibri" pitchFamily="34" charset="-122"/>
                 <a:cs typeface="Calibri" pitchFamily="34" charset="-120"/>
               </a:rPr>
-              <a:t>1. the princess pea sat in the dungeon and thought about what despereaux must be doing right now</a:t>
+              <a:t>The Princess Pea waited in the dark and listened for the sound of small feet.</a:t>
             </a:r>
             <a:endParaRPr lang="en-US" sz="1700" dirty="0"/>
           </a:p>
@@ -6684,37 +9141,42 @@
       </p:sp>
       <p:sp>
         <p:nvSpPr>
-          <p:cNvPr id="7" name="Shape 5"/>
-          <p:cNvSpPr/>
-          <p:nvPr/>
-        </p:nvSpPr>
-        <p:spPr>
-          <a:xfrm>
-            <a:off x="365760" y="1874520"/>
-            <a:ext cx="8412480" cy="777240"/>
-          </a:xfrm>
-          <a:prstGeom prst="roundRect">
-            <a:avLst>
-              <a:gd name="adj" fmla="val 11765"/>
-            </a:avLst>
-          </a:prstGeom>
-          <a:solidFill>
-            <a:srgbClr val="FFFFFF"/>
-          </a:solidFill>
-          <a:ln w="19050">
-            <a:solidFill>
-              <a:srgbClr val="55C8E8"/>
-            </a:solidFill>
-            <a:prstDash val="solid"/>
-          </a:ln>
-          <a:effectLst>
-            <a:outerShdw sx="100000" sy="100000" kx="0" ky="0" algn="bl" rotWithShape="0" blurRad="101600" dist="38100" dir="2700000">
-              <a:srgbClr val="000000">
-                <a:alpha val="12000"/>
-              </a:srgbClr>
-            </a:outerShdw>
-          </a:effectLst>
-        </p:spPr>
+          <p:cNvPr id="7" name="Text 5"/>
+          <p:cNvSpPr/>
+          <p:nvPr/>
+        </p:nvSpPr>
+        <p:spPr>
+          <a:xfrm>
+            <a:off x="365760" y="2103120"/>
+            <a:ext cx="8229600" cy="237744"/>
+          </a:xfrm>
+          <a:prstGeom prst="rect">
+            <a:avLst/>
+          </a:prstGeom>
+          <a:noFill/>
+          <a:ln/>
+        </p:spPr>
+        <p:txBody>
+          <a:bodyPr wrap="square" lIns="0" tIns="0" rIns="0" bIns="0" rtlCol="0" anchor="ctr"/>
+          <a:lstStyle/>
+          <a:p>
+            <a:pPr indent="0" marL="0">
+              <a:buNone/>
+            </a:pPr>
+            <a:r>
+              <a:rPr lang="en-US" sz="1100" b="1" spc="100" kern="0" dirty="0">
+                <a:solidFill>
+                  <a:srgbClr val="55C8E8"/>
+                </a:solidFill>
+                <a:latin typeface="Calibri" pitchFamily="34" charset="0"/>
+                <a:ea typeface="Calibri" pitchFamily="34" charset="-122"/>
+                <a:cs typeface="Calibri" pitchFamily="34" charset="-120"/>
+              </a:rPr>
+              <a:t>NOTICE</a:t>
+            </a:r>
+            <a:endParaRPr lang="en-US" sz="1100" dirty="0"/>
+          </a:p>
+        </p:txBody>
       </p:sp>
       <p:sp>
         <p:nvSpPr>
@@ -6724,73 +9186,34 @@
         </p:nvSpPr>
         <p:spPr>
           <a:xfrm>
-            <a:off x="594360" y="2002536"/>
-            <a:ext cx="7955280" cy="521208"/>
-          </a:xfrm>
-          <a:prstGeom prst="rect">
-            <a:avLst/>
-          </a:prstGeom>
-          <a:noFill/>
-          <a:ln/>
-        </p:spPr>
-        <p:txBody>
-          <a:bodyPr wrap="square" lIns="0" tIns="0" rIns="0" bIns="0" rtlCol="0" anchor="ctr"/>
-          <a:lstStyle/>
-          <a:p>
-            <a:pPr indent="0" marL="0">
-              <a:buNone/>
-            </a:pPr>
-            <a:r>
-              <a:rPr lang="en-US" sz="1700" dirty="0">
-                <a:solidFill>
-                  <a:srgbClr val="1E293B"/>
-                </a:solidFill>
-                <a:latin typeface="Calibri" pitchFamily="34" charset="0"/>
-                <a:ea typeface="Calibri" pitchFamily="34" charset="-122"/>
-                <a:cs typeface="Calibri" pitchFamily="34" charset="-120"/>
-              </a:rPr>
-              <a:t>2. she could hear a mouse scratching somewhere on the other side of the heavy stone door</a:t>
-            </a:r>
-            <a:endParaRPr lang="en-US" sz="1700" dirty="0"/>
-          </a:p>
-        </p:txBody>
-      </p:sp>
-      <p:sp>
-        <p:nvSpPr>
-          <p:cNvPr id="9" name="Text 7"/>
-          <p:cNvSpPr/>
-          <p:nvPr/>
-        </p:nvSpPr>
-        <p:spPr>
-          <a:xfrm>
-            <a:off x="365760" y="2788920"/>
-            <a:ext cx="8412480" cy="365760"/>
-          </a:xfrm>
-          <a:prstGeom prst="rect">
-            <a:avLst/>
-          </a:prstGeom>
-          <a:noFill/>
-          <a:ln/>
-        </p:spPr>
-        <p:txBody>
-          <a:bodyPr wrap="square" lIns="0" tIns="0" rIns="0" bIns="0" rtlCol="0" anchor="ctr"/>
-          <a:lstStyle/>
-          <a:p>
-            <a:pPr indent="0" marL="0">
-              <a:buNone/>
-            </a:pPr>
-            <a:r>
-              <a:rPr lang="en-US" sz="1600" b="1" dirty="0">
-                <a:solidFill>
-                  <a:srgbClr val="0E1C42"/>
-                </a:solidFill>
-                <a:latin typeface="Calibri" pitchFamily="34" charset="0"/>
-                <a:ea typeface="Calibri" pitchFamily="34" charset="-122"/>
-                <a:cs typeface="Calibri" pitchFamily="34" charset="-120"/>
-              </a:rPr>
-              <a:t>Rewrite both sentences correctly in your notebook.</a:t>
-            </a:r>
-            <a:endParaRPr lang="en-US" sz="1600" dirty="0"/>
+            <a:off x="365760" y="2359152"/>
+            <a:ext cx="8412480" cy="1097280"/>
+          </a:xfrm>
+          <a:prstGeom prst="rect">
+            <a:avLst/>
+          </a:prstGeom>
+          <a:noFill/>
+          <a:ln/>
+        </p:spPr>
+        <p:txBody>
+          <a:bodyPr wrap="square" lIns="0" tIns="0" rIns="0" bIns="0" rtlCol="0" anchor="t"/>
+          <a:lstStyle/>
+          <a:p>
+            <a:pPr indent="0" marL="0">
+              <a:buNone/>
+            </a:pPr>
+            <a:r>
+              <a:rPr lang="en-US" sz="1500" dirty="0">
+                <a:solidFill>
+                  <a:srgbClr val="1E293B"/>
+                </a:solidFill>
+                <a:latin typeface="Calibri" pitchFamily="34" charset="0"/>
+                <a:ea typeface="Calibri" pitchFamily="34" charset="-122"/>
+                <a:cs typeface="Calibri" pitchFamily="34" charset="-120"/>
+              </a:rPr>
+              <a:t>Princess Pea is a name, so both words are capitalized. The two verbs waited and listened are joined by and with no comma, because they share one subject. A period ends the sentence.</a:t>
+            </a:r>
+            <a:endParaRPr lang="en-US" sz="1500" dirty="0"/>
           </a:p>
         </p:txBody>
       </p:sp>
@@ -6918,7 +9341,7 @@
                 <a:ea typeface="Calibri" pitchFamily="34" charset="-122"/>
                 <a:cs typeface="Calibri" pitchFamily="34" charset="-120"/>
               </a:rPr>
-              <a:t>FIX THESE SENTENCES</a:t>
+              <a:t>NOW FIX THIS ONE</a:t>
             </a:r>
             <a:endParaRPr lang="en-US" sz="1100" dirty="0"/>
           </a:p>
@@ -6991,7 +9414,7 @@
                 <a:ea typeface="Calibri" pitchFamily="34" charset="-122"/>
                 <a:cs typeface="Calibri" pitchFamily="34" charset="-120"/>
               </a:rPr>
-              <a:t>1. the princess pea sat in the dungeon and thought about what despereaux must be doing right now</a:t>
+              <a:t>the princess pea sat in the dungeon and thought about what despereaux must be doing right now</a:t>
             </a:r>
             <a:endParaRPr lang="en-US" sz="1700" dirty="0"/>
           </a:p>
@@ -6999,48 +9422,14 @@
       </p:sp>
       <p:sp>
         <p:nvSpPr>
-          <p:cNvPr id="7" name="Shape 5"/>
-          <p:cNvSpPr/>
-          <p:nvPr/>
-        </p:nvSpPr>
-        <p:spPr>
-          <a:xfrm>
-            <a:off x="365760" y="1874520"/>
-            <a:ext cx="8412480" cy="777240"/>
-          </a:xfrm>
-          <a:prstGeom prst="roundRect">
-            <a:avLst>
-              <a:gd name="adj" fmla="val 11765"/>
-            </a:avLst>
-          </a:prstGeom>
-          <a:solidFill>
-            <a:srgbClr val="FFFFFF"/>
-          </a:solidFill>
-          <a:ln w="19050">
-            <a:solidFill>
-              <a:srgbClr val="55C8E8"/>
-            </a:solidFill>
-            <a:prstDash val="solid"/>
-          </a:ln>
-          <a:effectLst>
-            <a:outerShdw sx="100000" sy="100000" kx="0" ky="0" algn="bl" rotWithShape="0" blurRad="101600" dist="38100" dir="2700000">
-              <a:srgbClr val="000000">
-                <a:alpha val="12000"/>
-              </a:srgbClr>
-            </a:outerShdw>
-          </a:effectLst>
-        </p:spPr>
-      </p:sp>
-      <p:sp>
-        <p:nvSpPr>
-          <p:cNvPr id="8" name="Text 6"/>
-          <p:cNvSpPr/>
-          <p:nvPr/>
-        </p:nvSpPr>
-        <p:spPr>
-          <a:xfrm>
-            <a:off x="594360" y="2002536"/>
-            <a:ext cx="7955280" cy="521208"/>
+          <p:cNvPr id="7" name="Text 5"/>
+          <p:cNvSpPr/>
+          <p:nvPr/>
+        </p:nvSpPr>
+        <p:spPr>
+          <a:xfrm>
+            <a:off x="365760" y="2788920"/>
+            <a:ext cx="8412480" cy="365760"/>
           </a:xfrm>
           <a:prstGeom prst="rect">
             <a:avLst/>
@@ -7056,169 +9445,17 @@
               <a:buNone/>
             </a:pPr>
             <a:r>
-              <a:rPr lang="en-US" sz="1700" dirty="0">
-                <a:solidFill>
-                  <a:srgbClr val="1E293B"/>
-                </a:solidFill>
-                <a:latin typeface="Calibri" pitchFamily="34" charset="0"/>
-                <a:ea typeface="Calibri" pitchFamily="34" charset="-122"/>
-                <a:cs typeface="Calibri" pitchFamily="34" charset="-120"/>
-              </a:rPr>
-              <a:t>2. she could hear a mouse scratching somewhere on the other side of the heavy stone door</a:t>
-            </a:r>
-            <a:endParaRPr lang="en-US" sz="1700" dirty="0"/>
-          </a:p>
-        </p:txBody>
-      </p:sp>
-      <p:sp>
-        <p:nvSpPr>
-          <p:cNvPr id="9" name="Shape 7"/>
-          <p:cNvSpPr/>
-          <p:nvPr/>
-        </p:nvSpPr>
-        <p:spPr>
-          <a:xfrm>
-            <a:off x="365760" y="2743200"/>
-            <a:ext cx="8412480" cy="1417320"/>
-          </a:xfrm>
-          <a:prstGeom prst="roundRect">
-            <a:avLst>
-              <a:gd name="adj" fmla="val 6452"/>
-            </a:avLst>
-          </a:prstGeom>
-          <a:solidFill>
-            <a:srgbClr val="E8F8EF"/>
-          </a:solidFill>
-          <a:ln/>
-          <a:effectLst>
-            <a:outerShdw sx="100000" sy="100000" kx="0" ky="0" algn="bl" rotWithShape="0" blurRad="101600" dist="38100" dir="2700000">
-              <a:srgbClr val="000000">
-                <a:alpha val="12000"/>
-              </a:srgbClr>
-            </a:outerShdw>
-          </a:effectLst>
-        </p:spPr>
-      </p:sp>
-      <p:sp>
-        <p:nvSpPr>
-          <p:cNvPr id="10" name="Text 8"/>
-          <p:cNvSpPr/>
-          <p:nvPr/>
-        </p:nvSpPr>
-        <p:spPr>
-          <a:xfrm>
-            <a:off x="566928" y="2816352"/>
-            <a:ext cx="8229600" cy="237744"/>
-          </a:xfrm>
-          <a:prstGeom prst="rect">
-            <a:avLst/>
-          </a:prstGeom>
-          <a:noFill/>
-          <a:ln/>
-        </p:spPr>
-        <p:txBody>
-          <a:bodyPr wrap="square" lIns="0" tIns="0" rIns="0" bIns="0" rtlCol="0" anchor="ctr"/>
-          <a:lstStyle/>
-          <a:p>
-            <a:pPr indent="0" marL="0">
-              <a:buNone/>
-            </a:pPr>
-            <a:r>
-              <a:rPr lang="en-US" sz="1100" b="1" spc="100" kern="0" dirty="0">
-                <a:solidFill>
-                  <a:srgbClr val="34B76F"/>
-                </a:solidFill>
-                <a:latin typeface="Calibri" pitchFamily="34" charset="0"/>
-                <a:ea typeface="Calibri" pitchFamily="34" charset="-122"/>
-                <a:cs typeface="Calibri" pitchFamily="34" charset="-120"/>
-              </a:rPr>
-              <a:t>✅  CORRECTED</a:t>
-            </a:r>
-            <a:endParaRPr lang="en-US" sz="1100" dirty="0"/>
-          </a:p>
-        </p:txBody>
-      </p:sp>
-      <p:sp>
-        <p:nvSpPr>
-          <p:cNvPr id="11" name="Text 9"/>
-          <p:cNvSpPr/>
-          <p:nvPr/>
-        </p:nvSpPr>
-        <p:spPr>
-          <a:xfrm>
-            <a:off x="566928" y="3072384"/>
-            <a:ext cx="8010144" cy="685800"/>
-          </a:xfrm>
-          <a:prstGeom prst="rect">
-            <a:avLst/>
-          </a:prstGeom>
-          <a:noFill/>
-          <a:ln/>
-        </p:spPr>
-        <p:txBody>
-          <a:bodyPr wrap="square" lIns="0" tIns="0" rIns="0" bIns="0" rtlCol="0" anchor="ctr"/>
-          <a:lstStyle/>
-          <a:p>
-            <a:pPr indent="0" marL="0">
-              <a:buNone/>
-            </a:pPr>
-            <a:endParaRPr lang="en-US" sz="1400" dirty="0"/>
-          </a:p>
-          <a:p>
-            <a:pPr indent="0" marL="0">
-              <a:buNone/>
-            </a:pPr>
-            <a:r>
-              <a:rPr lang="en-US" sz="1400" i="1" dirty="0">
-                <a:solidFill>
-                  <a:srgbClr val="1E293B"/>
-                </a:solidFill>
-                <a:latin typeface="Calibri" pitchFamily="34" charset="0"/>
-                <a:ea typeface="Calibri" pitchFamily="34" charset="-122"/>
-                <a:cs typeface="Calibri" pitchFamily="34" charset="-120"/>
-              </a:rPr>
-              <a:t>1. The Princess Pea sat in the dungeon and thought about what Despereaux must be doing right now.</a:t>
-            </a:r>
-            <a:endParaRPr lang="en-US" sz="1400" dirty="0"/>
-          </a:p>
-        </p:txBody>
-      </p:sp>
-      <p:sp>
-        <p:nvSpPr>
-          <p:cNvPr id="12" name="Text 10"/>
-          <p:cNvSpPr/>
-          <p:nvPr/>
-        </p:nvSpPr>
-        <p:spPr>
-          <a:xfrm>
-            <a:off x="566928" y="3767328"/>
-            <a:ext cx="8010144" cy="320040"/>
-          </a:xfrm>
-          <a:prstGeom prst="rect">
-            <a:avLst/>
-          </a:prstGeom>
-          <a:noFill/>
-          <a:ln/>
-        </p:spPr>
-        <p:txBody>
-          <a:bodyPr wrap="square" lIns="0" tIns="0" rIns="0" bIns="0" rtlCol="0" anchor="ctr"/>
-          <a:lstStyle/>
-          <a:p>
-            <a:pPr indent="0" marL="0">
-              <a:buNone/>
-            </a:pPr>
-            <a:r>
-              <a:rPr lang="en-US" sz="1200" dirty="0">
-                <a:solidFill>
-                  <a:srgbClr val="64748B"/>
-                </a:solidFill>
-                <a:latin typeface="Calibri" pitchFamily="34" charset="0"/>
-                <a:ea typeface="Calibri" pitchFamily="34" charset="-122"/>
-                <a:cs typeface="Calibri" pitchFamily="34" charset="-120"/>
-              </a:rPr>
-              <a:t>Did you catch the proper nouns (Princess Pea, Despereaux), the pronoun (she), and capital letters?</a:t>
-            </a:r>
-            <a:endParaRPr lang="en-US" sz="1200" dirty="0"/>
+              <a:rPr lang="en-US" sz="1600" b="1" dirty="0">
+                <a:solidFill>
+                  <a:srgbClr val="0E1C42"/>
+                </a:solidFill>
+                <a:latin typeface="Calibri" pitchFamily="34" charset="0"/>
+                <a:ea typeface="Calibri" pitchFamily="34" charset="-122"/>
+                <a:cs typeface="Calibri" pitchFamily="34" charset="-120"/>
+              </a:rPr>
+              <a:t>Rewrite the sentence correctly in your notebook.</a:t>
+            </a:r>
+            <a:endParaRPr lang="en-US" sz="1600" dirty="0"/>
           </a:p>
         </p:txBody>
       </p:sp>
@@ -7236,7 +9473,7 @@
     <p:bg>
       <p:bgPr>
         <a:solidFill>
-          <a:srgbClr val="FFFFFF"/>
+          <a:srgbClr val="F8FAFC"/>
         </a:solidFill>
       </p:bgPr>
     </p:bg>
@@ -7269,7 +9506,7 @@
             <a:avLst/>
           </a:prstGeom>
           <a:solidFill>
-            <a:srgbClr val="8B6FC0"/>
+            <a:srgbClr val="55C8E8"/>
           </a:solidFill>
           <a:ln/>
         </p:spPr>
@@ -7307,7 +9544,7 @@
                 <a:ea typeface="Calibri" pitchFamily="34" charset="-122"/>
                 <a:cs typeface="Calibri" pitchFamily="34" charset="-120"/>
               </a:rPr>
-              <a:t>🌱  Morphology</a:t>
+              <a:t>✏️  Daily Oral Language</a:t>
             </a:r>
             <a:endParaRPr lang="en-US" sz="2200" dirty="0"/>
           </a:p>
@@ -7321,7 +9558,7 @@
         </p:nvSpPr>
         <p:spPr>
           <a:xfrm>
-            <a:off x="365760" y="804672"/>
+            <a:off x="365760" y="749808"/>
             <a:ext cx="8229600" cy="237744"/>
           </a:xfrm>
           <a:prstGeom prst="rect">
@@ -7340,13 +9577,13 @@
             <a:r>
               <a:rPr lang="en-US" sz="1100" b="1" spc="100" kern="0" dirty="0">
                 <a:solidFill>
-                  <a:srgbClr val="8B6FC0"/>
-                </a:solidFill>
-                <a:latin typeface="Calibri" pitchFamily="34" charset="0"/>
-                <a:ea typeface="Calibri" pitchFamily="34" charset="-122"/>
-                <a:cs typeface="Calibri" pitchFamily="34" charset="-120"/>
-              </a:rPr>
-              <a:t>-LY</a:t>
+                  <a:srgbClr val="55C8E8"/>
+                </a:solidFill>
+                <a:latin typeface="Calibri" pitchFamily="34" charset="0"/>
+                <a:ea typeface="Calibri" pitchFamily="34" charset="-122"/>
+                <a:cs typeface="Calibri" pitchFamily="34" charset="-120"/>
+              </a:rPr>
+              <a:t>NOW FIX THIS ONE</a:t>
             </a:r>
             <a:endParaRPr lang="en-US" sz="1100" dirty="0"/>
           </a:p>
@@ -7360,18 +9597,23 @@
         </p:nvSpPr>
         <p:spPr>
           <a:xfrm>
-            <a:off x="365760" y="1097280"/>
-            <a:ext cx="8412480" cy="621792"/>
+            <a:off x="365760" y="1024128"/>
+            <a:ext cx="8412480" cy="777240"/>
           </a:xfrm>
           <a:prstGeom prst="roundRect">
             <a:avLst>
-              <a:gd name="adj" fmla="val 14706"/>
+              <a:gd name="adj" fmla="val 11765"/>
             </a:avLst>
           </a:prstGeom>
           <a:solidFill>
-            <a:srgbClr val="F0E8FF"/>
+            <a:srgbClr val="FFFFFF"/>
           </a:solidFill>
-          <a:ln/>
+          <a:ln w="19050">
+            <a:solidFill>
+              <a:srgbClr val="55C8E8"/>
+            </a:solidFill>
+            <a:prstDash val="solid"/>
+          </a:ln>
           <a:effectLst>
             <a:outerShdw sx="100000" sy="100000" kx="0" ky="0" algn="bl" rotWithShape="0" blurRad="101600" dist="38100" dir="2700000">
               <a:srgbClr val="000000">
@@ -7389,8 +9631,8 @@
         </p:nvSpPr>
         <p:spPr>
           <a:xfrm>
-            <a:off x="594360" y="1216152"/>
-            <a:ext cx="7863840" cy="384048"/>
+            <a:off x="594360" y="1152144"/>
+            <a:ext cx="7955280" cy="521208"/>
           </a:xfrm>
           <a:prstGeom prst="rect">
             <a:avLst/>
@@ -7406,17 +9648,17 @@
               <a:buNone/>
             </a:pPr>
             <a:r>
-              <a:rPr lang="en-US" sz="1500" dirty="0">
-                <a:solidFill>
-                  <a:srgbClr val="1E293B"/>
-                </a:solidFill>
-                <a:latin typeface="Calibri" pitchFamily="34" charset="0"/>
-                <a:ea typeface="Calibri" pitchFamily="34" charset="-122"/>
-                <a:cs typeface="Calibri" pitchFamily="34" charset="-120"/>
-              </a:rPr>
-              <a:t>🌱  slowly — base word: slow</a:t>
-            </a:r>
-            <a:endParaRPr lang="en-US" sz="1500" dirty="0"/>
+              <a:rPr lang="en-US" sz="1700" dirty="0">
+                <a:solidFill>
+                  <a:srgbClr val="1E293B"/>
+                </a:solidFill>
+                <a:latin typeface="Calibri" pitchFamily="34" charset="0"/>
+                <a:ea typeface="Calibri" pitchFamily="34" charset="-122"/>
+                <a:cs typeface="Calibri" pitchFamily="34" charset="-120"/>
+              </a:rPr>
+              <a:t>the princess pea sat in the dungeon and thought about what despereaux must be doing right now</a:t>
+            </a:r>
+            <a:endParaRPr lang="en-US" sz="1700" dirty="0"/>
           </a:p>
         </p:txBody>
       </p:sp>
@@ -7428,16 +9670,16 @@
         </p:nvSpPr>
         <p:spPr>
           <a:xfrm>
-            <a:off x="365760" y="1792224"/>
-            <a:ext cx="8412480" cy="621792"/>
+            <a:off x="365760" y="2743200"/>
+            <a:ext cx="8412480" cy="1417320"/>
           </a:xfrm>
           <a:prstGeom prst="roundRect">
             <a:avLst>
-              <a:gd name="adj" fmla="val 14706"/>
+              <a:gd name="adj" fmla="val 6452"/>
             </a:avLst>
           </a:prstGeom>
           <a:solidFill>
-            <a:srgbClr val="F8F4FF"/>
+            <a:srgbClr val="E8F8EF"/>
           </a:solidFill>
           <a:ln/>
           <a:effectLst>
@@ -7457,8 +9699,8 @@
         </p:nvSpPr>
         <p:spPr>
           <a:xfrm>
-            <a:off x="594360" y="1911096"/>
-            <a:ext cx="7863840" cy="384048"/>
+            <a:off x="566928" y="2816352"/>
+            <a:ext cx="8229600" cy="237744"/>
           </a:xfrm>
           <a:prstGeom prst="rect">
             <a:avLst/>
@@ -7474,59 +9716,30 @@
               <a:buNone/>
             </a:pPr>
             <a:r>
-              <a:rPr lang="en-US" sz="1500" dirty="0">
-                <a:solidFill>
-                  <a:srgbClr val="1E293B"/>
-                </a:solidFill>
-                <a:latin typeface="Calibri" pitchFamily="34" charset="0"/>
-                <a:ea typeface="Calibri" pitchFamily="34" charset="-122"/>
-                <a:cs typeface="Calibri" pitchFamily="34" charset="-120"/>
-              </a:rPr>
-              <a:t>🌱  quietly — base word: quiet</a:t>
-            </a:r>
-            <a:endParaRPr lang="en-US" sz="1500" dirty="0"/>
-          </a:p>
-        </p:txBody>
-      </p:sp>
-      <p:sp>
-        <p:nvSpPr>
-          <p:cNvPr id="9" name="Shape 7"/>
-          <p:cNvSpPr/>
-          <p:nvPr/>
-        </p:nvSpPr>
-        <p:spPr>
-          <a:xfrm>
-            <a:off x="365760" y="2487168"/>
-            <a:ext cx="8412480" cy="621792"/>
-          </a:xfrm>
-          <a:prstGeom prst="roundRect">
-            <a:avLst>
-              <a:gd name="adj" fmla="val 14706"/>
-            </a:avLst>
-          </a:prstGeom>
-          <a:solidFill>
-            <a:srgbClr val="F0E8FF"/>
-          </a:solidFill>
-          <a:ln/>
-          <a:effectLst>
-            <a:outerShdw sx="100000" sy="100000" kx="0" ky="0" algn="bl" rotWithShape="0" blurRad="101600" dist="38100" dir="2700000">
-              <a:srgbClr val="000000">
-                <a:alpha val="12000"/>
-              </a:srgbClr>
-            </a:outerShdw>
-          </a:effectLst>
-        </p:spPr>
-      </p:sp>
-      <p:sp>
-        <p:nvSpPr>
-          <p:cNvPr id="10" name="Text 8"/>
-          <p:cNvSpPr/>
-          <p:nvPr/>
-        </p:nvSpPr>
-        <p:spPr>
-          <a:xfrm>
-            <a:off x="594360" y="2606040"/>
-            <a:ext cx="7863840" cy="384048"/>
+              <a:rPr lang="en-US" sz="1100" b="1" spc="100" kern="0" dirty="0">
+                <a:solidFill>
+                  <a:srgbClr val="34B76F"/>
+                </a:solidFill>
+                <a:latin typeface="Calibri" pitchFamily="34" charset="0"/>
+                <a:ea typeface="Calibri" pitchFamily="34" charset="-122"/>
+                <a:cs typeface="Calibri" pitchFamily="34" charset="-120"/>
+              </a:rPr>
+              <a:t>✅  CORRECTED</a:t>
+            </a:r>
+            <a:endParaRPr lang="en-US" sz="1100" dirty="0"/>
+          </a:p>
+        </p:txBody>
+      </p:sp>
+      <p:sp>
+        <p:nvSpPr>
+          <p:cNvPr id="9" name="Text 7"/>
+          <p:cNvSpPr/>
+          <p:nvPr/>
+        </p:nvSpPr>
+        <p:spPr>
+          <a:xfrm>
+            <a:off x="566928" y="3072384"/>
+            <a:ext cx="8010144" cy="685800"/>
           </a:xfrm>
           <a:prstGeom prst="rect">
             <a:avLst/>
@@ -7542,85 +9755,23 @@
               <a:buNone/>
             </a:pPr>
             <a:r>
-              <a:rPr lang="en-US" sz="1500" dirty="0">
-                <a:solidFill>
-                  <a:srgbClr val="1E293B"/>
-                </a:solidFill>
-                <a:latin typeface="Calibri" pitchFamily="34" charset="0"/>
-                <a:ea typeface="Calibri" pitchFamily="34" charset="-122"/>
-                <a:cs typeface="Calibri" pitchFamily="34" charset="-120"/>
-              </a:rPr>
-              <a:t>🌱  bravely — base word: brave</a:t>
-            </a:r>
-            <a:endParaRPr lang="en-US" sz="1500" dirty="0"/>
-          </a:p>
-        </p:txBody>
-      </p:sp>
-      <p:sp>
-        <p:nvSpPr>
-          <p:cNvPr id="11" name="Shape 9"/>
-          <p:cNvSpPr/>
-          <p:nvPr/>
-        </p:nvSpPr>
-        <p:spPr>
-          <a:xfrm>
-            <a:off x="365760" y="3182112"/>
-            <a:ext cx="8412480" cy="621792"/>
-          </a:xfrm>
-          <a:prstGeom prst="roundRect">
-            <a:avLst>
-              <a:gd name="adj" fmla="val 14706"/>
-            </a:avLst>
-          </a:prstGeom>
-          <a:solidFill>
-            <a:srgbClr val="F8F4FF"/>
-          </a:solidFill>
-          <a:ln/>
-          <a:effectLst>
-            <a:outerShdw sx="100000" sy="100000" kx="0" ky="0" algn="bl" rotWithShape="0" blurRad="101600" dist="38100" dir="2700000">
-              <a:srgbClr val="000000">
-                <a:alpha val="12000"/>
-              </a:srgbClr>
-            </a:outerShdw>
-          </a:effectLst>
-        </p:spPr>
-      </p:sp>
-      <p:sp>
-        <p:nvSpPr>
-          <p:cNvPr id="12" name="Text 10"/>
-          <p:cNvSpPr/>
-          <p:nvPr/>
-        </p:nvSpPr>
-        <p:spPr>
-          <a:xfrm>
-            <a:off x="594360" y="3300984"/>
-            <a:ext cx="7863840" cy="384048"/>
-          </a:xfrm>
-          <a:prstGeom prst="rect">
-            <a:avLst/>
-          </a:prstGeom>
-          <a:noFill/>
-          <a:ln/>
-        </p:spPr>
-        <p:txBody>
-          <a:bodyPr wrap="square" lIns="0" tIns="0" rIns="0" bIns="0" rtlCol="0" anchor="ctr"/>
-          <a:lstStyle/>
-          <a:p>
-            <a:pPr indent="0" marL="0">
-              <a:buNone/>
-            </a:pPr>
-            <a:r>
-              <a:rPr lang="en-US" sz="1500" dirty="0">
-                <a:solidFill>
-                  <a:srgbClr val="1E293B"/>
-                </a:solidFill>
-                <a:latin typeface="Calibri" pitchFamily="34" charset="0"/>
-                <a:ea typeface="Calibri" pitchFamily="34" charset="-122"/>
-                <a:cs typeface="Calibri" pitchFamily="34" charset="-120"/>
-              </a:rPr>
-              <a:t>🌱  quickly — base word: quick</a:t>
-            </a:r>
-            <a:endParaRPr lang="en-US" sz="1500" dirty="0"/>
+              <a:rPr lang="en-US" sz="1400" i="1" dirty="0">
+                <a:solidFill>
+                  <a:srgbClr val="1E293B"/>
+                </a:solidFill>
+                <a:latin typeface="Calibri" pitchFamily="34" charset="0"/>
+                <a:ea typeface="Calibri" pitchFamily="34" charset="-122"/>
+                <a:cs typeface="Calibri" pitchFamily="34" charset="-120"/>
+              </a:rPr>
+              <a:t>The Princess Pea sat in the dungeon and thought about what Despereaux must be doing right now.</a:t>
+            </a:r>
+            <a:endParaRPr lang="en-US" sz="1400" dirty="0"/>
+          </a:p>
+          <a:p>
+            <a:pPr indent="0" marL="0">
+              <a:buNone/>
+            </a:pPr>
+            <a:endParaRPr lang="en-US" sz="1400" dirty="0"/>
           </a:p>
         </p:txBody>
       </p:sp>
